--- a/IN-Motion.pptx
+++ b/IN-Motion.pptx
@@ -2814,8 +2814,8 @@
         </p:blipFill>
         <p:spPr>
           <a:xfrm>
-            <a:off x="7589520" y="685800"/>
-            <a:ext cx="4023360" cy="4023360"/>
+            <a:off x="5618602" y="350335"/>
+            <a:ext cx="5878601" cy="5878601"/>
           </a:xfrm>
           <a:prstGeom prst="rect">
             <a:avLst/>
@@ -2830,7 +2830,7 @@
         </p:nvSpPr>
         <p:spPr>
           <a:xfrm>
-            <a:off x="640080" y="1965960"/>
+            <a:off x="640080" y="1783080"/>
             <a:ext cx="6766560" cy="1188720"/>
           </a:xfrm>
           <a:prstGeom prst="rect">
@@ -2869,8 +2869,8 @@
         </p:nvSpPr>
         <p:spPr>
           <a:xfrm>
-            <a:off x="640080" y="3200400"/>
-            <a:ext cx="6583680" cy="548640"/>
+            <a:off x="640080" y="3291840"/>
+            <a:ext cx="4978522" cy="548640"/>
           </a:xfrm>
           <a:prstGeom prst="rect">
             <a:avLst/>
@@ -2947,7 +2947,7 @@
         </p:nvSpPr>
         <p:spPr>
           <a:xfrm>
-            <a:off x="640080" y="5943600"/>
+            <a:off x="640080" y="5029200"/>
             <a:ext cx="7315200" cy="365760"/>
           </a:xfrm>
           <a:prstGeom prst="rect">
@@ -10809,6 +10809,128 @@
           </a:p>
         </p:txBody>
       </p:sp>
+      <p:sp>
+        <p:nvSpPr>
+          <p:cNvPr id="2" name="Text 38">
+            <a:extLst>
+              <a:ext uri="{FF2B5EF4-FFF2-40B4-BE49-F238E27FC236}">
+                <a16:creationId xmlns:a16="http://schemas.microsoft.com/office/drawing/2014/main" id="{E539BE4B-16E0-0DA3-73BB-DAB3A3804168}"/>
+              </a:ext>
+            </a:extLst>
+          </p:cNvPr>
+          <p:cNvSpPr txBox="1"/>
+          <p:nvPr/>
+        </p:nvSpPr>
+        <p:spPr>
+          <a:xfrm>
+            <a:off x="10799064" y="4736592"/>
+            <a:ext cx="850392" cy="566928"/>
+          </a:xfrm>
+          <a:prstGeom prst="rect">
+            <a:avLst/>
+          </a:prstGeom>
+          <a:noFill/>
+          <a:ln/>
+        </p:spPr>
+        <p:txBody>
+          <a:bodyPr wrap="square" lIns="0" tIns="0" rIns="0" bIns="0" rtlCol="0" anchor="ctr"/>
+          <a:lstStyle/>
+          <a:p>
+            <a:pPr marL="0" indent="0" algn="ctr">
+              <a:lnSpc>
+                <a:spcPct val="105000"/>
+              </a:lnSpc>
+              <a:buNone/>
+            </a:pPr>
+            <a:r>
+              <a:rPr lang="en-US" sz="950" dirty="0">
+                <a:solidFill>
+                  <a:srgbClr val="E8EEF7"/>
+                </a:solidFill>
+                <a:latin typeface="Calibri" pitchFamily="34" charset="0"/>
+                <a:cs typeface="Calibri" pitchFamily="34" charset="-120"/>
+              </a:rPr>
+              <a:t>PNG </a:t>
+            </a:r>
+          </a:p>
+          <a:p>
+            <a:pPr marL="0" indent="0" algn="ctr">
+              <a:lnSpc>
+                <a:spcPct val="105000"/>
+              </a:lnSpc>
+              <a:buNone/>
+            </a:pPr>
+            <a:r>
+              <a:rPr lang="en-US" sz="950" dirty="0">
+                <a:solidFill>
+                  <a:srgbClr val="E8EEF7"/>
+                </a:solidFill>
+                <a:latin typeface="Calibri" pitchFamily="34" charset="0"/>
+                <a:cs typeface="Calibri" pitchFamily="34" charset="-120"/>
+              </a:rPr>
+              <a:t>2400x2400 </a:t>
+            </a:r>
+            <a:r>
+              <a:rPr lang="en-US" sz="950" dirty="0" err="1">
+                <a:solidFill>
+                  <a:srgbClr val="E8EEF7"/>
+                </a:solidFill>
+                <a:latin typeface="Calibri" pitchFamily="34" charset="0"/>
+                <a:cs typeface="Calibri" pitchFamily="34" charset="-120"/>
+              </a:rPr>
+              <a:t>px</a:t>
+            </a:r>
+            <a:endParaRPr lang="en-US" sz="950" dirty="0"/>
+          </a:p>
+        </p:txBody>
+      </p:sp>
+      <p:sp>
+        <p:nvSpPr>
+          <p:cNvPr id="63" name="Text 38">
+            <a:extLst>
+              <a:ext uri="{FF2B5EF4-FFF2-40B4-BE49-F238E27FC236}">
+                <a16:creationId xmlns:a16="http://schemas.microsoft.com/office/drawing/2014/main" id="{D57EC650-8406-EDF8-DD1B-FCE31D7B9666}"/>
+              </a:ext>
+            </a:extLst>
+          </p:cNvPr>
+          <p:cNvSpPr txBox="1"/>
+          <p:nvPr/>
+        </p:nvSpPr>
+        <p:spPr>
+          <a:xfrm>
+            <a:off x="10799064" y="3468551"/>
+            <a:ext cx="850392" cy="566928"/>
+          </a:xfrm>
+          <a:prstGeom prst="rect">
+            <a:avLst/>
+          </a:prstGeom>
+          <a:noFill/>
+          <a:ln/>
+        </p:spPr>
+        <p:txBody>
+          <a:bodyPr wrap="square" lIns="0" tIns="0" rIns="0" bIns="0" rtlCol="0" anchor="ctr"/>
+          <a:lstStyle/>
+          <a:p>
+            <a:pPr marL="0" indent="0" algn="ctr">
+              <a:lnSpc>
+                <a:spcPct val="105000"/>
+              </a:lnSpc>
+              <a:buNone/>
+            </a:pPr>
+            <a:r>
+              <a:rPr lang="en-US" sz="950" dirty="0">
+                <a:solidFill>
+                  <a:srgbClr val="E8EEF7"/>
+                </a:solidFill>
+                <a:latin typeface="Calibri" pitchFamily="34" charset="0"/>
+                <a:cs typeface="Calibri" pitchFamily="34" charset="-120"/>
+              </a:rPr>
+              <a:t>44.100 Hz</a:t>
+            </a:r>
+            <a:endParaRPr lang="en-US" sz="950" dirty="0"/>
+          </a:p>
+        </p:txBody>
+      </p:sp>
     </p:spTree>
   </p:cSld>
   <p:clrMapOvr>
@@ -12297,8 +12419,8 @@
         </p:nvSpPr>
         <p:spPr>
           <a:xfrm>
-            <a:off x="640080" y="685800"/>
-            <a:ext cx="10881360" cy="777240"/>
+            <a:off x="6050280" y="813522"/>
+            <a:ext cx="5257800" cy="777240"/>
           </a:xfrm>
           <a:prstGeom prst="rect">
             <a:avLst/>
@@ -12314,7 +12436,7 @@
               <a:buNone/>
             </a:pPr>
             <a:r>
-              <a:rPr lang="en-US" sz="3400" b="1" dirty="0">
+              <a:rPr lang="en-US" sz="3400" b="1" dirty="0" err="1">
                 <a:solidFill>
                   <a:srgbClr val="E8EEF7"/>
                 </a:solidFill>
@@ -12322,7 +12444,18 @@
                 <a:ea typeface="Cambria" pitchFamily="34" charset="-122"/>
                 <a:cs typeface="Cambria" pitchFamily="34" charset="-120"/>
               </a:rPr>
-              <a:t>La voce e il gesto</a:t>
+              <a:t>Dispersione</a:t>
+            </a:r>
+            <a:r>
+              <a:rPr lang="en-US" sz="3400" b="1" dirty="0">
+                <a:solidFill>
+                  <a:srgbClr val="E8EEF7"/>
+                </a:solidFill>
+                <a:latin typeface="Cambria" pitchFamily="34" charset="0"/>
+                <a:ea typeface="Cambria" pitchFamily="34" charset="-122"/>
+                <a:cs typeface="Cambria" pitchFamily="34" charset="-120"/>
+              </a:rPr>
+              <a:t> Mandala</a:t>
             </a:r>
             <a:endParaRPr lang="en-US" sz="3400" dirty="0"/>
           </a:p>
@@ -12757,6 +12890,62 @@
               <a:t>, tappeto musicale e traccia della meditazione si aprono all'avvio e restano aperti fino alla fine: quello che si accende e si spegne è solo un interruttore.</a:t>
             </a:r>
             <a:endParaRPr lang="en-US" sz="1350" dirty="0"/>
+          </a:p>
+        </p:txBody>
+      </p:sp>
+      <p:sp>
+        <p:nvSpPr>
+          <p:cNvPr id="13" name="Text 1">
+            <a:extLst>
+              <a:ext uri="{FF2B5EF4-FFF2-40B4-BE49-F238E27FC236}">
+                <a16:creationId xmlns:a16="http://schemas.microsoft.com/office/drawing/2014/main" id="{4F867328-C7ED-7DF5-1D68-4C4EEDCA60DB}"/>
+              </a:ext>
+            </a:extLst>
+          </p:cNvPr>
+          <p:cNvSpPr txBox="1"/>
+          <p:nvPr/>
+        </p:nvSpPr>
+        <p:spPr>
+          <a:xfrm>
+            <a:off x="792480" y="838200"/>
+            <a:ext cx="5257800" cy="777240"/>
+          </a:xfrm>
+          <a:prstGeom prst="rect">
+            <a:avLst/>
+          </a:prstGeom>
+          <a:noFill/>
+          <a:ln/>
+        </p:spPr>
+        <p:txBody>
+          <a:bodyPr wrap="square" rtlCol="0" anchor="ctr"/>
+          <a:lstStyle/>
+          <a:p>
+            <a:pPr marL="0" indent="0">
+              <a:buNone/>
+            </a:pPr>
+            <a:r>
+              <a:rPr lang="en-US" sz="3400" b="1" dirty="0" err="1">
+                <a:solidFill>
+                  <a:srgbClr val="E8EEF7"/>
+                </a:solidFill>
+                <a:latin typeface="Cambria" pitchFamily="34" charset="0"/>
+                <a:ea typeface="Cambria" pitchFamily="34" charset="-122"/>
+                <a:cs typeface="Cambria" pitchFamily="34" charset="-120"/>
+              </a:rPr>
+              <a:t>Microfono</a:t>
+            </a:r>
+            <a:r>
+              <a:rPr lang="en-US" sz="3400" b="1" dirty="0">
+                <a:solidFill>
+                  <a:srgbClr val="E8EEF7"/>
+                </a:solidFill>
+                <a:latin typeface="Cambria" pitchFamily="34" charset="0"/>
+                <a:ea typeface="Cambria" pitchFamily="34" charset="-122"/>
+                <a:cs typeface="Cambria" pitchFamily="34" charset="-120"/>
+              </a:rPr>
+              <a:t> e Whisper</a:t>
+            </a:r>
+            <a:endParaRPr lang="en-US" sz="3400" dirty="0"/>
           </a:p>
         </p:txBody>
       </p:sp>
@@ -14770,7 +14959,7 @@
         </p:nvSpPr>
         <p:spPr>
           <a:xfrm>
-            <a:off x="640080" y="1572768"/>
+            <a:off x="640080" y="1782089"/>
             <a:ext cx="10881360" cy="411480"/>
           </a:xfrm>
           <a:prstGeom prst="rect">
@@ -14828,7 +15017,7 @@
         </p:blipFill>
         <p:spPr>
           <a:xfrm>
-            <a:off x="886968" y="2084832"/>
+            <a:off x="886968" y="2503476"/>
             <a:ext cx="2743200" cy="2212848"/>
           </a:xfrm>
           <a:prstGeom prst="rect">
@@ -14844,7 +15033,7 @@
         </p:nvSpPr>
         <p:spPr>
           <a:xfrm>
-            <a:off x="502920" y="4370832"/>
+            <a:off x="502920" y="4789476"/>
             <a:ext cx="3502152" cy="329184"/>
           </a:xfrm>
           <a:prstGeom prst="rect">
@@ -14883,7 +15072,7 @@
         </p:nvSpPr>
         <p:spPr>
           <a:xfrm>
-            <a:off x="640080" y="4754880"/>
+            <a:off x="640080" y="5173524"/>
             <a:ext cx="3227832" cy="914400"/>
           </a:xfrm>
           <a:prstGeom prst="rect">
@@ -14933,7 +15122,7 @@
         </p:blipFill>
         <p:spPr>
           <a:xfrm>
-            <a:off x="4663440" y="2084832"/>
+            <a:off x="4663440" y="2503476"/>
             <a:ext cx="2743200" cy="2212848"/>
           </a:xfrm>
           <a:prstGeom prst="rect">
@@ -14949,7 +15138,7 @@
         </p:nvSpPr>
         <p:spPr>
           <a:xfrm>
-            <a:off x="4279392" y="4370832"/>
+            <a:off x="4279392" y="4789476"/>
             <a:ext cx="3502152" cy="329184"/>
           </a:xfrm>
           <a:prstGeom prst="rect">
@@ -14988,7 +15177,7 @@
         </p:nvSpPr>
         <p:spPr>
           <a:xfrm>
-            <a:off x="4416552" y="4754880"/>
+            <a:off x="4416552" y="5173524"/>
             <a:ext cx="3227832" cy="914400"/>
           </a:xfrm>
           <a:prstGeom prst="rect">
@@ -15038,7 +15227,7 @@
         </p:blipFill>
         <p:spPr>
           <a:xfrm>
-            <a:off x="8439912" y="2084832"/>
+            <a:off x="8439912" y="2503476"/>
             <a:ext cx="2743200" cy="2212848"/>
           </a:xfrm>
           <a:prstGeom prst="rect">
@@ -15054,7 +15243,7 @@
         </p:nvSpPr>
         <p:spPr>
           <a:xfrm>
-            <a:off x="8055864" y="4370832"/>
+            <a:off x="8055864" y="4789476"/>
             <a:ext cx="3502152" cy="329184"/>
           </a:xfrm>
           <a:prstGeom prst="rect">
@@ -15093,7 +15282,7 @@
         </p:nvSpPr>
         <p:spPr>
           <a:xfrm>
-            <a:off x="8193024" y="4754880"/>
+            <a:off x="8193024" y="5173524"/>
             <a:ext cx="3227832" cy="914400"/>
           </a:xfrm>
           <a:prstGeom prst="rect">
@@ -15155,126 +15344,6 @@
                 <a:cs typeface="Calibri" pitchFamily="34" charset="-120"/>
               </a:rPr>
               <a:t>queste</a:t>
-            </a:r>
-            <a:r>
-              <a:rPr lang="en-US" sz="1100" dirty="0">
-                <a:solidFill>
-                  <a:srgbClr val="E8EEF7"/>
-                </a:solidFill>
-                <a:latin typeface="Calibri" pitchFamily="34" charset="0"/>
-                <a:ea typeface="Calibri" pitchFamily="34" charset="-122"/>
-                <a:cs typeface="Calibri" pitchFamily="34" charset="-120"/>
-              </a:rPr>
-              <a:t>.</a:t>
-            </a:r>
-            <a:endParaRPr lang="en-US" sz="1100" dirty="0"/>
-          </a:p>
-        </p:txBody>
-      </p:sp>
-      <p:sp>
-        <p:nvSpPr>
-          <p:cNvPr id="14" name="Shape 9"/>
-          <p:cNvSpPr/>
-          <p:nvPr/>
-        </p:nvSpPr>
-        <p:spPr>
-          <a:xfrm>
-            <a:off x="640080" y="5742432"/>
-            <a:ext cx="10881360" cy="713232"/>
-          </a:xfrm>
-          <a:prstGeom prst="roundRect">
-            <a:avLst>
-              <a:gd name="adj" fmla="val 6410"/>
-            </a:avLst>
-          </a:prstGeom>
-          <a:solidFill>
-            <a:srgbClr val="141B33"/>
-          </a:solidFill>
-          <a:ln w="15240">
-            <a:solidFill>
-              <a:srgbClr val="E8887F"/>
-            </a:solidFill>
-            <a:prstDash val="solid"/>
-          </a:ln>
-        </p:spPr>
-        <p:txBody>
-          <a:bodyPr/>
-          <a:lstStyle/>
-          <a:p>
-            <a:endParaRPr lang="en-IT"/>
-          </a:p>
-        </p:txBody>
-      </p:sp>
-      <p:sp>
-        <p:nvSpPr>
-          <p:cNvPr id="15" name="Text 10"/>
-          <p:cNvSpPr txBox="1"/>
-          <p:nvPr/>
-        </p:nvSpPr>
-        <p:spPr>
-          <a:xfrm>
-            <a:off x="896112" y="5852160"/>
-            <a:ext cx="10378440" cy="548640"/>
-          </a:xfrm>
-          <a:prstGeom prst="rect">
-            <a:avLst/>
-          </a:prstGeom>
-          <a:noFill/>
-          <a:ln/>
-        </p:spPr>
-        <p:txBody>
-          <a:bodyPr wrap="square" lIns="0" tIns="0" rIns="0" bIns="0" rtlCol="0" anchor="ctr"/>
-          <a:lstStyle/>
-          <a:p>
-            <a:pPr marL="0" indent="0">
-              <a:lnSpc>
-                <a:spcPct val="110000"/>
-              </a:lnSpc>
-              <a:buNone/>
-            </a:pPr>
-            <a:r>
-              <a:rPr lang="en-US" sz="1100" b="1" dirty="0" err="1">
-                <a:solidFill>
-                  <a:srgbClr val="E8887F"/>
-                </a:solidFill>
-                <a:latin typeface="Calibri" pitchFamily="34" charset="0"/>
-                <a:ea typeface="Calibri" pitchFamily="34" charset="-122"/>
-                <a:cs typeface="Calibri" pitchFamily="34" charset="-120"/>
-              </a:rPr>
-              <a:t>Dispersione</a:t>
-            </a:r>
-            <a:r>
-              <a:rPr lang="en-US" sz="1100" b="1" dirty="0">
-                <a:solidFill>
-                  <a:srgbClr val="E8887F"/>
-                </a:solidFill>
-                <a:latin typeface="Calibri" pitchFamily="34" charset="0"/>
-                <a:ea typeface="Calibri" pitchFamily="34" charset="-122"/>
-                <a:cs typeface="Calibri" pitchFamily="34" charset="-120"/>
-              </a:rPr>
-              <a:t> del Mandala: </a:t>
-            </a:r>
-            <a:r>
-              <a:rPr lang="en-US" sz="1100" dirty="0">
-                <a:solidFill>
-                  <a:srgbClr val="E8EEF7"/>
-                </a:solidFill>
-                <a:latin typeface="Calibri" pitchFamily="34" charset="0"/>
-                <a:ea typeface="Calibri" pitchFamily="34" charset="-122"/>
-                <a:cs typeface="Calibri" pitchFamily="34" charset="-120"/>
-              </a:rPr>
-              <a:t>alla fine della sessione è il gesto che libera il mandala. Le particelle colpite smettono di inseguirlo e volano via — non tornano indietro perché non hanno più un posto a cui </a:t>
-            </a:r>
-            <a:r>
-              <a:rPr lang="en-US" sz="1100" dirty="0" err="1">
-                <a:solidFill>
-                  <a:srgbClr val="E8EEF7"/>
-                </a:solidFill>
-                <a:latin typeface="Calibri" pitchFamily="34" charset="0"/>
-                <a:ea typeface="Calibri" pitchFamily="34" charset="-122"/>
-                <a:cs typeface="Calibri" pitchFamily="34" charset="-120"/>
-              </a:rPr>
-              <a:t>tornare</a:t>
             </a:r>
             <a:r>
               <a:rPr lang="en-US" sz="1100" dirty="0">

--- a/IN-Motion.pptx
+++ b/IN-Motion.pptx
@@ -5,23 +5,26 @@
     <p:sldMasterId id="2147483648" r:id="rId1"/>
   </p:sldMasterIdLst>
   <p:notesMasterIdLst>
-    <p:notesMasterId r:id="rId16"/>
+    <p:notesMasterId r:id="rId19"/>
   </p:notesMasterIdLst>
   <p:sldIdLst>
-    <p:sldId id="256" r:id="rId2"/>
-    <p:sldId id="257" r:id="rId3"/>
-    <p:sldId id="258" r:id="rId4"/>
-    <p:sldId id="259" r:id="rId5"/>
-    <p:sldId id="260" r:id="rId6"/>
-    <p:sldId id="261" r:id="rId7"/>
-    <p:sldId id="262" r:id="rId8"/>
-    <p:sldId id="263" r:id="rId9"/>
-    <p:sldId id="264" r:id="rId10"/>
-    <p:sldId id="265" r:id="rId11"/>
-    <p:sldId id="266" r:id="rId12"/>
-    <p:sldId id="267" r:id="rId13"/>
-    <p:sldId id="268" r:id="rId14"/>
-    <p:sldId id="269" r:id="rId15"/>
+    <p:sldId id="270" r:id="rId2"/>
+    <p:sldId id="271" r:id="rId3"/>
+    <p:sldId id="272" r:id="rId4"/>
+    <p:sldId id="273" r:id="rId5"/>
+    <p:sldId id="274" r:id="rId6"/>
+    <p:sldId id="275" r:id="rId7"/>
+    <p:sldId id="276" r:id="rId8"/>
+    <p:sldId id="277" r:id="rId9"/>
+    <p:sldId id="278" r:id="rId10"/>
+    <p:sldId id="279" r:id="rId11"/>
+    <p:sldId id="280" r:id="rId12"/>
+    <p:sldId id="281" r:id="rId13"/>
+    <p:sldId id="282" r:id="rId14"/>
+    <p:sldId id="283" r:id="rId15"/>
+    <p:sldId id="284" r:id="rId16"/>
+    <p:sldId id="285" r:id="rId17"/>
+    <p:sldId id="286" r:id="rId18"/>
   </p:sldIdLst>
   <p:sldSz cx="12192000" cy="6858000"/>
   <p:notesSz cx="6858000" cy="12192000"/>
@@ -1396,10 +1399,7 @@
           <a:bodyPr/>
           <a:lstStyle/>
           <a:p>
-            <a:r>
-              <a:rPr lang="en-US" dirty="0"/>
-              <a:t>I quadranti di Russell non sono nel programma del corso: è un'estensione autonoma. La valenza non è direttamente controllabile in MuseMorphose — solo l'attivazione lo è.</a:t>
-            </a:r>
+            <a:endParaRPr lang="en-US" dirty="0"/>
           </a:p>
         </p:txBody>
       </p:sp>
@@ -1567,7 +1567,10 @@
           <a:bodyPr/>
           <a:lstStyle/>
           <a:p>
-            <a:endParaRPr lang="en-US" dirty="0"/>
+            <a:r>
+              <a:rPr lang="en-US" dirty="0"/>
+              <a:t>854 triangoli della mesh MediaPipe con coordinate baricentriche fisse. Densità per area^0.45: quota uguale bruciava in macchie bianche, densità uniforme cancellava i lineamenti. Le altre forze: attrazione verso la forma bersaglio, vento come corrente comune, rumore individuale. I boids sono stati scartati di proposito. Il libro propone come sfida l'installazione della Walt Disney Concert Hall (p.55): l'abbiamo fatta con i landmark facciali.</a:t>
+            </a:r>
           </a:p>
         </p:txBody>
       </p:sp>
@@ -1651,7 +1654,10 @@
           <a:bodyPr/>
           <a:lstStyle/>
           <a:p>
-            <a:endParaRPr lang="en-US" dirty="0"/>
+            <a:r>
+              <a:rPr lang="en-US" dirty="0"/>
+              <a:t>I quadranti di Russell non sono nel programma del corso: è un'estensione autonoma. La valenza non è direttamente controllabile in MuseMorphose — solo l'attivazione lo è.</a:t>
+            </a:r>
           </a:p>
         </p:txBody>
       </p:sp>
@@ -1775,6 +1781,258 @@
 </p:notes>
 </file>
 
+<file path=ppt/notesSlides/notesSlide15.xml><?xml version="1.0" encoding="utf-8"?>
+<p:notes xmlns:a="http://schemas.openxmlformats.org/drawingml/2006/main" xmlns:r="http://schemas.openxmlformats.org/officeDocument/2006/relationships" xmlns:p="http://schemas.openxmlformats.org/presentationml/2006/main">
+  <p:cSld>
+    <p:spTree>
+      <p:nvGrpSpPr>
+        <p:cNvPr id="1" name=""/>
+        <p:cNvGrpSpPr/>
+        <p:nvPr/>
+      </p:nvGrpSpPr>
+      <p:grpSpPr>
+        <a:xfrm>
+          <a:off x="0" y="0"/>
+          <a:ext cx="0" cy="0"/>
+          <a:chOff x="0" y="0"/>
+          <a:chExt cx="0" cy="0"/>
+        </a:xfrm>
+      </p:grpSpPr>
+      <p:sp>
+        <p:nvSpPr>
+          <p:cNvPr id="2" name="Slide Image Placeholder 1"/>
+          <p:cNvSpPr>
+            <a:spLocks noGrp="1" noRot="1" noChangeAspect="1"/>
+          </p:cNvSpPr>
+          <p:nvPr>
+            <p:ph type="sldImg"/>
+          </p:nvPr>
+        </p:nvSpPr>
+        <p:spPr/>
+      </p:sp>
+      <p:sp>
+        <p:nvSpPr>
+          <p:cNvPr id="3" name="Notes Placeholder 2"/>
+          <p:cNvSpPr>
+            <a:spLocks noGrp="1"/>
+          </p:cNvSpPr>
+          <p:nvPr>
+            <p:ph type="body" idx="1"/>
+          </p:nvPr>
+        </p:nvSpPr>
+        <p:spPr/>
+        <p:txBody>
+          <a:bodyPr/>
+          <a:lstStyle/>
+          <a:p>
+            <a:endParaRPr lang="en-US" dirty="0"/>
+          </a:p>
+        </p:txBody>
+      </p:sp>
+      <p:sp>
+        <p:nvSpPr>
+          <p:cNvPr id="4" name="Slide Number Placeholder 3"/>
+          <p:cNvSpPr>
+            <a:spLocks noGrp="1"/>
+          </p:cNvSpPr>
+          <p:nvPr>
+            <p:ph type="sldNum" sz="quarter" idx="10"/>
+          </p:nvPr>
+        </p:nvSpPr>
+        <p:spPr/>
+        <p:txBody>
+          <a:bodyPr/>
+          <a:lstStyle/>
+          <a:p>
+            <a:fld id="{F7021451-1387-4CA6-816F-3879F97B5CBC}" type="slidenum">
+              <a:rPr lang="en-US"/>
+              <a:t>15</a:t>
+            </a:fld>
+            <a:endParaRPr lang="en-US"/>
+          </a:p>
+        </p:txBody>
+      </p:sp>
+    </p:spTree>
+    <p:extLst>
+      <p:ext uri="{BB962C8B-B14F-4D97-AF65-F5344CB8AC3E}">
+        <p14:creationId xmlns:p14="http://schemas.microsoft.com/office/powerpoint/2010/main" val="1024086991"/>
+      </p:ext>
+    </p:extLst>
+  </p:cSld>
+  <p:clrMapOvr>
+    <a:masterClrMapping/>
+  </p:clrMapOvr>
+</p:notes>
+</file>
+
+<file path=ppt/notesSlides/notesSlide16.xml><?xml version="1.0" encoding="utf-8"?>
+<p:notes xmlns:a="http://schemas.openxmlformats.org/drawingml/2006/main" xmlns:r="http://schemas.openxmlformats.org/officeDocument/2006/relationships" xmlns:p="http://schemas.openxmlformats.org/presentationml/2006/main">
+  <p:cSld>
+    <p:spTree>
+      <p:nvGrpSpPr>
+        <p:cNvPr id="1" name=""/>
+        <p:cNvGrpSpPr/>
+        <p:nvPr/>
+      </p:nvGrpSpPr>
+      <p:grpSpPr>
+        <a:xfrm>
+          <a:off x="0" y="0"/>
+          <a:ext cx="0" cy="0"/>
+          <a:chOff x="0" y="0"/>
+          <a:chExt cx="0" cy="0"/>
+        </a:xfrm>
+      </p:grpSpPr>
+      <p:sp>
+        <p:nvSpPr>
+          <p:cNvPr id="2" name="Slide Image Placeholder 1"/>
+          <p:cNvSpPr>
+            <a:spLocks noGrp="1" noRot="1" noChangeAspect="1"/>
+          </p:cNvSpPr>
+          <p:nvPr>
+            <p:ph type="sldImg"/>
+          </p:nvPr>
+        </p:nvSpPr>
+        <p:spPr/>
+      </p:sp>
+      <p:sp>
+        <p:nvSpPr>
+          <p:cNvPr id="3" name="Notes Placeholder 2"/>
+          <p:cNvSpPr>
+            <a:spLocks noGrp="1"/>
+          </p:cNvSpPr>
+          <p:nvPr>
+            <p:ph type="body" idx="1"/>
+          </p:nvPr>
+        </p:nvSpPr>
+        <p:spPr/>
+        <p:txBody>
+          <a:bodyPr/>
+          <a:lstStyle/>
+          <a:p>
+            <a:endParaRPr lang="en-US" dirty="0"/>
+          </a:p>
+        </p:txBody>
+      </p:sp>
+      <p:sp>
+        <p:nvSpPr>
+          <p:cNvPr id="4" name="Slide Number Placeholder 3"/>
+          <p:cNvSpPr>
+            <a:spLocks noGrp="1"/>
+          </p:cNvSpPr>
+          <p:nvPr>
+            <p:ph type="sldNum" sz="quarter" idx="10"/>
+          </p:nvPr>
+        </p:nvSpPr>
+        <p:spPr/>
+        <p:txBody>
+          <a:bodyPr/>
+          <a:lstStyle/>
+          <a:p>
+            <a:fld id="{F7021451-1387-4CA6-816F-3879F97B5CBC}" type="slidenum">
+              <a:rPr lang="en-US"/>
+              <a:t>16</a:t>
+            </a:fld>
+            <a:endParaRPr lang="en-US"/>
+          </a:p>
+        </p:txBody>
+      </p:sp>
+    </p:spTree>
+    <p:extLst>
+      <p:ext uri="{BB962C8B-B14F-4D97-AF65-F5344CB8AC3E}">
+        <p14:creationId xmlns:p14="http://schemas.microsoft.com/office/powerpoint/2010/main" val="1024086991"/>
+      </p:ext>
+    </p:extLst>
+  </p:cSld>
+  <p:clrMapOvr>
+    <a:masterClrMapping/>
+  </p:clrMapOvr>
+</p:notes>
+</file>
+
+<file path=ppt/notesSlides/notesSlide17.xml><?xml version="1.0" encoding="utf-8"?>
+<p:notes xmlns:a="http://schemas.openxmlformats.org/drawingml/2006/main" xmlns:r="http://schemas.openxmlformats.org/officeDocument/2006/relationships" xmlns:p="http://schemas.openxmlformats.org/presentationml/2006/main">
+  <p:cSld>
+    <p:spTree>
+      <p:nvGrpSpPr>
+        <p:cNvPr id="1" name=""/>
+        <p:cNvGrpSpPr/>
+        <p:nvPr/>
+      </p:nvGrpSpPr>
+      <p:grpSpPr>
+        <a:xfrm>
+          <a:off x="0" y="0"/>
+          <a:ext cx="0" cy="0"/>
+          <a:chOff x="0" y="0"/>
+          <a:chExt cx="0" cy="0"/>
+        </a:xfrm>
+      </p:grpSpPr>
+      <p:sp>
+        <p:nvSpPr>
+          <p:cNvPr id="2" name="Slide Image Placeholder 1"/>
+          <p:cNvSpPr>
+            <a:spLocks noGrp="1" noRot="1" noChangeAspect="1"/>
+          </p:cNvSpPr>
+          <p:nvPr>
+            <p:ph type="sldImg"/>
+          </p:nvPr>
+        </p:nvSpPr>
+        <p:spPr/>
+      </p:sp>
+      <p:sp>
+        <p:nvSpPr>
+          <p:cNvPr id="3" name="Notes Placeholder 2"/>
+          <p:cNvSpPr>
+            <a:spLocks noGrp="1"/>
+          </p:cNvSpPr>
+          <p:nvPr>
+            <p:ph type="body" idx="1"/>
+          </p:nvPr>
+        </p:nvSpPr>
+        <p:spPr/>
+        <p:txBody>
+          <a:bodyPr/>
+          <a:lstStyle/>
+          <a:p>
+            <a:endParaRPr lang="en-US" dirty="0"/>
+          </a:p>
+        </p:txBody>
+      </p:sp>
+      <p:sp>
+        <p:nvSpPr>
+          <p:cNvPr id="4" name="Slide Number Placeholder 3"/>
+          <p:cNvSpPr>
+            <a:spLocks noGrp="1"/>
+          </p:cNvSpPr>
+          <p:nvPr>
+            <p:ph type="sldNum" sz="quarter" idx="10"/>
+          </p:nvPr>
+        </p:nvSpPr>
+        <p:spPr/>
+        <p:txBody>
+          <a:bodyPr/>
+          <a:lstStyle/>
+          <a:p>
+            <a:fld id="{F7021451-1387-4CA6-816F-3879F97B5CBC}" type="slidenum">
+              <a:rPr lang="en-US"/>
+              <a:t>17</a:t>
+            </a:fld>
+            <a:endParaRPr lang="en-US"/>
+          </a:p>
+        </p:txBody>
+      </p:sp>
+    </p:spTree>
+    <p:extLst>
+      <p:ext uri="{BB962C8B-B14F-4D97-AF65-F5344CB8AC3E}">
+        <p14:creationId xmlns:p14="http://schemas.microsoft.com/office/powerpoint/2010/main" val="1024086991"/>
+      </p:ext>
+    </p:extLst>
+  </p:cSld>
+  <p:clrMapOvr>
+    <a:masterClrMapping/>
+  </p:clrMapOvr>
+</p:notes>
+</file>
+
 <file path=ppt/notesSlides/notesSlide2.xml><?xml version="1.0" encoding="utf-8"?>
 <p:notes xmlns:a="http://schemas.openxmlformats.org/drawingml/2006/main" xmlns:r="http://schemas.openxmlformats.org/officeDocument/2006/relationships" xmlns:p="http://schemas.openxmlformats.org/presentationml/2006/main">
   <p:cSld>
@@ -1821,7 +2079,7 @@
           <a:p>
             <a:r>
               <a:rPr lang="en-US" dirty="0"/>
-              <a:t>Il mandala non è scelto per estetica: la sua grammatica simbolica coincide con la struttura dell'esperienza. Dichiarare che ci ispiriamo a una tradizione viva, senza pretendere di officiare un rito.</a:t>
+              <a:t>Non rivendichiamo di essere i primi: rivendichiamo l'incrocio. Le prime due colonne esistono da tempo, la terza è cambiata negli ultimi due anni ed è ciò che rende possibile il progetto adesso.</a:t>
             </a:r>
           </a:p>
         </p:txBody>
@@ -1906,7 +2164,10 @@
           <a:bodyPr/>
           <a:lstStyle/>
           <a:p>
-            <a:endParaRPr lang="en-US" dirty="0"/>
+            <a:r>
+              <a:rPr lang="en-US" dirty="0"/>
+              <a:t>Le tre risposte non sono aggiunte a posteriori: sono le tre decisioni di progetto da cui è nato tutto il resto. La terza è anche il significato del mandala, e torna nella slide successiva.</a:t>
+            </a:r>
           </a:p>
         </p:txBody>
       </p:sp>
@@ -1990,7 +2251,10 @@
           <a:bodyPr/>
           <a:lstStyle/>
           <a:p>
-            <a:endParaRPr lang="en-US" dirty="0"/>
+            <a:r>
+              <a:rPr lang="en-US" dirty="0"/>
+              <a:t>Questa slide è il cuore: se il pubblico ricorda una cosa sola, deve essere che l'interfaccia sono le palpebre. La campana risolve un problema reale — a occhi chiusi non esiste altro canale per dire 'ti ho visto'.</a:t>
+            </a:r>
           </a:p>
         </p:txBody>
       </p:sp>
@@ -2076,7 +2340,7 @@
           <a:p>
             <a:r>
               <a:rPr lang="en-US" dirty="0"/>
-              <a:t>Cinque moduli Python, un progetto TouchDesigner, una chiamata API.</a:t>
+              <a:t>Il mandala non è scelto per estetica: la sua grammatica simbolica coincide con la struttura dell'esperienza. Dichiarare che ci ispiriamo a una tradizione viva, senza pretendere di officiare un rito.</a:t>
             </a:r>
           </a:p>
         </p:txBody>
@@ -2161,10 +2425,7 @@
           <a:bodyPr/>
           <a:lstStyle/>
           <a:p>
-            <a:r>
-              <a:rPr lang="en-US" dirty="0"/>
-              <a:t>Feature extraction e normalisation (Zanoni p.149). Le x vanno moltiplicate per 16/9 prima di ogni distanza: sono normalizzate su larghezza e altezza separatamente. taratura.py misura due fasi da otto secondi.</a:t>
-            </a:r>
+            <a:endParaRPr lang="en-US" dirty="0"/>
           </a:p>
         </p:txBody>
       </p:sp>
@@ -2332,7 +2593,10 @@
           <a:bodyPr/>
           <a:lstStyle/>
           <a:p>
-            <a:endParaRPr lang="en-US" dirty="0"/>
+            <a:r>
+              <a:rPr lang="en-US" dirty="0"/>
+              <a:t>Cinque moduli Python, un progetto TouchDesigner, una chiamata API.</a:t>
+            </a:r>
           </a:p>
         </p:txBody>
       </p:sp>
@@ -2418,7 +2682,7 @@
           <a:p>
             <a:r>
               <a:rPr lang="en-US" dirty="0"/>
-              <a:t>854 triangoli della mesh MediaPipe con coordinate baricentriche fisse. Densità per area^0.45: quota uguale bruciava in macchie bianche, densità uniforme cancellava i lineamenti. Le altre forze: attrazione verso la forma bersaglio, vento come corrente comune, rumore individuale. I boids sono stati scartati di proposito. Il libro propone come sfida l'installazione della Walt Disney Concert Hall (p.55): l'abbiamo fatta con i landmark facciali.</a:t>
+              <a:t>Feature extraction e normalisation (Zanoni p.149). Le x vanno moltiplicate per 16/9 prima di ogni distanza: sono normalizzate su larghezza e altezza separatamente. taratura.py misura due fasi da otto secondi.</a:t>
             </a:r>
           </a:p>
         </p:txBody>
@@ -2988,6 +3252,3027 @@
 
 <file path=ppt/slides/slide10.xml><?xml version="1.0" encoding="utf-8"?>
 <p:sld xmlns:a="http://schemas.openxmlformats.org/drawingml/2006/main" xmlns:r="http://schemas.openxmlformats.org/officeDocument/2006/relationships" xmlns:p="http://schemas.openxmlformats.org/presentationml/2006/main">
+  <p:cSld name="Slide 7">
+    <p:bg>
+      <p:bgPr>
+        <a:solidFill>
+          <a:srgbClr val="0B1026"/>
+        </a:solidFill>
+        <a:effectLst/>
+      </p:bgPr>
+    </p:bg>
+    <p:spTree>
+      <p:nvGrpSpPr>
+        <p:cNvPr id="1" name=""/>
+        <p:cNvGrpSpPr/>
+        <p:nvPr/>
+      </p:nvGrpSpPr>
+      <p:grpSpPr>
+        <a:xfrm>
+          <a:off x="0" y="0"/>
+          <a:ext cx="0" cy="0"/>
+          <a:chOff x="0" y="0"/>
+          <a:chExt cx="0" cy="0"/>
+        </a:xfrm>
+      </p:grpSpPr>
+      <p:sp>
+        <p:nvSpPr>
+          <p:cNvPr id="2" name="Text 0"/>
+          <p:cNvSpPr txBox="1"/>
+          <p:nvPr/>
+        </p:nvSpPr>
+        <p:spPr>
+          <a:xfrm>
+            <a:off x="640080" y="384048"/>
+            <a:ext cx="10058400" cy="274320"/>
+          </a:xfrm>
+          <a:prstGeom prst="rect">
+            <a:avLst/>
+          </a:prstGeom>
+          <a:noFill/>
+          <a:ln/>
+        </p:spPr>
+        <p:txBody>
+          <a:bodyPr wrap="square" rtlCol="0" anchor="ctr"/>
+          <a:lstStyle/>
+          <a:p>
+            <a:pPr marL="0" indent="0">
+              <a:buNone/>
+            </a:pPr>
+            <a:r>
+              <a:rPr lang="en-US" sz="1200" b="1" kern="0" spc="200" dirty="0">
+                <a:solidFill>
+                  <a:srgbClr val="8FD9EC"/>
+                </a:solidFill>
+                <a:latin typeface="Calibri" pitchFamily="34" charset="0"/>
+                <a:ea typeface="Calibri" pitchFamily="34" charset="-122"/>
+                <a:cs typeface="Calibri" pitchFamily="34" charset="-120"/>
+              </a:rPr>
+              <a:t>PERCEZIONE</a:t>
+            </a:r>
+            <a:endParaRPr lang="en-US" sz="1200" dirty="0"/>
+          </a:p>
+        </p:txBody>
+      </p:sp>
+      <p:sp>
+        <p:nvSpPr>
+          <p:cNvPr id="3" name="Text 1"/>
+          <p:cNvSpPr txBox="1"/>
+          <p:nvPr/>
+        </p:nvSpPr>
+        <p:spPr>
+          <a:xfrm>
+            <a:off x="6050280" y="813522"/>
+            <a:ext cx="5257800" cy="777240"/>
+          </a:xfrm>
+          <a:prstGeom prst="rect">
+            <a:avLst/>
+          </a:prstGeom>
+          <a:noFill/>
+          <a:ln/>
+        </p:spPr>
+        <p:txBody>
+          <a:bodyPr wrap="square" rtlCol="0" anchor="ctr"/>
+          <a:lstStyle/>
+          <a:p>
+            <a:pPr marL="0" indent="0">
+              <a:buNone/>
+            </a:pPr>
+            <a:r>
+              <a:rPr lang="en-US" sz="3400" b="1" dirty="0" err="1">
+                <a:solidFill>
+                  <a:srgbClr val="E8EEF7"/>
+                </a:solidFill>
+                <a:latin typeface="Cambria" pitchFamily="34" charset="0"/>
+                <a:ea typeface="Cambria" pitchFamily="34" charset="-122"/>
+                <a:cs typeface="Cambria" pitchFamily="34" charset="-120"/>
+              </a:rPr>
+              <a:t>Dispersione</a:t>
+            </a:r>
+            <a:r>
+              <a:rPr lang="en-US" sz="3400" b="1" dirty="0">
+                <a:solidFill>
+                  <a:srgbClr val="E8EEF7"/>
+                </a:solidFill>
+                <a:latin typeface="Cambria" pitchFamily="34" charset="0"/>
+                <a:ea typeface="Cambria" pitchFamily="34" charset="-122"/>
+                <a:cs typeface="Cambria" pitchFamily="34" charset="-120"/>
+              </a:rPr>
+              <a:t> Mandala</a:t>
+            </a:r>
+            <a:endParaRPr lang="en-US" sz="3400" dirty="0"/>
+          </a:p>
+        </p:txBody>
+      </p:sp>
+      <p:sp>
+        <p:nvSpPr>
+          <p:cNvPr id="4" name="Shape 2"/>
+          <p:cNvSpPr/>
+          <p:nvPr/>
+        </p:nvSpPr>
+        <p:spPr>
+          <a:xfrm>
+            <a:off x="640080" y="1737360"/>
+            <a:ext cx="5257800" cy="2148840"/>
+          </a:xfrm>
+          <a:prstGeom prst="roundRect">
+            <a:avLst>
+              <a:gd name="adj" fmla="val 2553"/>
+            </a:avLst>
+          </a:prstGeom>
+          <a:solidFill>
+            <a:srgbClr val="141B33"/>
+          </a:solidFill>
+          <a:ln w="16510">
+            <a:solidFill>
+              <a:srgbClr val="8FD9EC"/>
+            </a:solidFill>
+            <a:prstDash val="solid"/>
+          </a:ln>
+        </p:spPr>
+        <p:txBody>
+          <a:bodyPr/>
+          <a:lstStyle/>
+          <a:p>
+            <a:endParaRPr lang="en-IT"/>
+          </a:p>
+        </p:txBody>
+      </p:sp>
+      <p:sp>
+        <p:nvSpPr>
+          <p:cNvPr id="5" name="Text 3"/>
+          <p:cNvSpPr txBox="1"/>
+          <p:nvPr/>
+        </p:nvSpPr>
+        <p:spPr>
+          <a:xfrm>
+            <a:off x="896112" y="1938528"/>
+            <a:ext cx="4800600" cy="310896"/>
+          </a:xfrm>
+          <a:prstGeom prst="rect">
+            <a:avLst/>
+          </a:prstGeom>
+          <a:noFill/>
+          <a:ln/>
+        </p:spPr>
+        <p:txBody>
+          <a:bodyPr wrap="square" lIns="0" tIns="0" rIns="0" bIns="0" rtlCol="0" anchor="ctr"/>
+          <a:lstStyle/>
+          <a:p>
+            <a:pPr marL="0" indent="0">
+              <a:buNone/>
+            </a:pPr>
+            <a:r>
+              <a:rPr lang="en-US" sz="1400" b="1" dirty="0">
+                <a:solidFill>
+                  <a:srgbClr val="8FD9EC"/>
+                </a:solidFill>
+                <a:latin typeface="Calibri" pitchFamily="34" charset="0"/>
+                <a:ea typeface="Calibri" pitchFamily="34" charset="-122"/>
+                <a:cs typeface="Calibri" pitchFamily="34" charset="-120"/>
+              </a:rPr>
+              <a:t>ascolto.py  ·  la voce </a:t>
+            </a:r>
+            <a:r>
+              <a:rPr lang="en-US" sz="1400" b="1" dirty="0" err="1">
+                <a:solidFill>
+                  <a:srgbClr val="8FD9EC"/>
+                </a:solidFill>
+                <a:latin typeface="Calibri" pitchFamily="34" charset="0"/>
+                <a:ea typeface="Calibri" pitchFamily="34" charset="-122"/>
+                <a:cs typeface="Calibri" pitchFamily="34" charset="-120"/>
+              </a:rPr>
+              <a:t>dell’utente</a:t>
+            </a:r>
+            <a:endParaRPr lang="en-US" sz="1400" dirty="0"/>
+          </a:p>
+        </p:txBody>
+      </p:sp>
+      <p:sp>
+        <p:nvSpPr>
+          <p:cNvPr id="6" name="Text 4"/>
+          <p:cNvSpPr txBox="1"/>
+          <p:nvPr/>
+        </p:nvSpPr>
+        <p:spPr>
+          <a:xfrm>
+            <a:off x="896112" y="2304288"/>
+            <a:ext cx="4800600" cy="1371600"/>
+          </a:xfrm>
+          <a:prstGeom prst="rect">
+            <a:avLst/>
+          </a:prstGeom>
+          <a:noFill/>
+          <a:ln/>
+        </p:spPr>
+        <p:txBody>
+          <a:bodyPr wrap="square" lIns="0" tIns="0" rIns="0" bIns="0" rtlCol="0" anchor="ctr"/>
+          <a:lstStyle/>
+          <a:p>
+            <a:pPr marL="0" indent="0">
+              <a:lnSpc>
+                <a:spcPct val="115000"/>
+              </a:lnSpc>
+              <a:buNone/>
+            </a:pPr>
+            <a:r>
+              <a:rPr lang="en-US" sz="1200" dirty="0">
+                <a:solidFill>
+                  <a:srgbClr val="E8EEF7"/>
+                </a:solidFill>
+                <a:latin typeface="Calibri" pitchFamily="34" charset="0"/>
+                <a:ea typeface="Calibri" pitchFamily="34" charset="-122"/>
+                <a:cs typeface="Calibri" pitchFamily="34" charset="-120"/>
+              </a:rPr>
+              <a:t>Whisper gira in locale, modello small, int8 su CPU. La registrazione parte quando gli occhi si chiudono e finisce quando si riaprono. L'audio non esce mai dal computer: esce solo la trascrizione.</a:t>
+            </a:r>
+            <a:endParaRPr lang="en-US" sz="1200" dirty="0"/>
+          </a:p>
+        </p:txBody>
+      </p:sp>
+      <p:sp>
+        <p:nvSpPr>
+          <p:cNvPr id="7" name="Shape 5"/>
+          <p:cNvSpPr/>
+          <p:nvPr/>
+        </p:nvSpPr>
+        <p:spPr>
+          <a:xfrm>
+            <a:off x="6172200" y="1737360"/>
+            <a:ext cx="5257800" cy="2148840"/>
+          </a:xfrm>
+          <a:prstGeom prst="roundRect">
+            <a:avLst>
+              <a:gd name="adj" fmla="val 2553"/>
+            </a:avLst>
+          </a:prstGeom>
+          <a:solidFill>
+            <a:srgbClr val="141B33"/>
+          </a:solidFill>
+          <a:ln w="16510">
+            <a:solidFill>
+              <a:srgbClr val="8FD9EC"/>
+            </a:solidFill>
+            <a:prstDash val="solid"/>
+          </a:ln>
+        </p:spPr>
+        <p:txBody>
+          <a:bodyPr/>
+          <a:lstStyle/>
+          <a:p>
+            <a:endParaRPr lang="en-IT"/>
+          </a:p>
+        </p:txBody>
+      </p:sp>
+      <p:sp>
+        <p:nvSpPr>
+          <p:cNvPr id="8" name="Text 6"/>
+          <p:cNvSpPr txBox="1"/>
+          <p:nvPr/>
+        </p:nvSpPr>
+        <p:spPr>
+          <a:xfrm>
+            <a:off x="6428232" y="1938528"/>
+            <a:ext cx="4800600" cy="310896"/>
+          </a:xfrm>
+          <a:prstGeom prst="rect">
+            <a:avLst/>
+          </a:prstGeom>
+          <a:noFill/>
+          <a:ln/>
+        </p:spPr>
+        <p:txBody>
+          <a:bodyPr wrap="square" lIns="0" tIns="0" rIns="0" bIns="0" rtlCol="0" anchor="ctr"/>
+          <a:lstStyle/>
+          <a:p>
+            <a:pPr marL="0" indent="0">
+              <a:buNone/>
+            </a:pPr>
+            <a:r>
+              <a:rPr lang="en-US" sz="1400" b="1" dirty="0">
+                <a:solidFill>
+                  <a:srgbClr val="8FD9EC"/>
+                </a:solidFill>
+                <a:latin typeface="Calibri" pitchFamily="34" charset="0"/>
+                <a:ea typeface="Calibri" pitchFamily="34" charset="-122"/>
+                <a:cs typeface="Calibri" pitchFamily="34" charset="-120"/>
+              </a:rPr>
+              <a:t>movimento.py  ·  </a:t>
+            </a:r>
+            <a:r>
+              <a:rPr lang="en-US" sz="1400" b="1" dirty="0" err="1">
+                <a:solidFill>
+                  <a:srgbClr val="8FD9EC"/>
+                </a:solidFill>
+                <a:latin typeface="Calibri" pitchFamily="34" charset="0"/>
+                <a:ea typeface="Calibri" pitchFamily="34" charset="-122"/>
+                <a:cs typeface="Calibri" pitchFamily="34" charset="-120"/>
+              </a:rPr>
+              <a:t>gesto</a:t>
+            </a:r>
+            <a:r>
+              <a:rPr lang="en-US" sz="1400" b="1" dirty="0">
+                <a:solidFill>
+                  <a:srgbClr val="8FD9EC"/>
+                </a:solidFill>
+                <a:latin typeface="Calibri" pitchFamily="34" charset="0"/>
+                <a:ea typeface="Calibri" pitchFamily="34" charset="-122"/>
+                <a:cs typeface="Calibri" pitchFamily="34" charset="-120"/>
+              </a:rPr>
+              <a:t> per </a:t>
+            </a:r>
+            <a:r>
+              <a:rPr lang="en-US" sz="1400" b="1" dirty="0" err="1">
+                <a:solidFill>
+                  <a:srgbClr val="8FD9EC"/>
+                </a:solidFill>
+                <a:latin typeface="Calibri" pitchFamily="34" charset="0"/>
+                <a:ea typeface="Calibri" pitchFamily="34" charset="-122"/>
+                <a:cs typeface="Calibri" pitchFamily="34" charset="-120"/>
+              </a:rPr>
+              <a:t>disperdere</a:t>
+            </a:r>
+            <a:r>
+              <a:rPr lang="en-US" sz="1400" b="1" dirty="0">
+                <a:solidFill>
+                  <a:srgbClr val="8FD9EC"/>
+                </a:solidFill>
+                <a:latin typeface="Calibri" pitchFamily="34" charset="0"/>
+                <a:ea typeface="Calibri" pitchFamily="34" charset="-122"/>
+                <a:cs typeface="Calibri" pitchFamily="34" charset="-120"/>
+              </a:rPr>
+              <a:t> Mandala</a:t>
+            </a:r>
+            <a:endParaRPr lang="en-US" sz="1400" dirty="0"/>
+          </a:p>
+        </p:txBody>
+      </p:sp>
+      <p:sp>
+        <p:nvSpPr>
+          <p:cNvPr id="9" name="Text 7"/>
+          <p:cNvSpPr txBox="1"/>
+          <p:nvPr/>
+        </p:nvSpPr>
+        <p:spPr>
+          <a:xfrm>
+            <a:off x="6428232" y="2304288"/>
+            <a:ext cx="4800600" cy="1371600"/>
+          </a:xfrm>
+          <a:prstGeom prst="rect">
+            <a:avLst/>
+          </a:prstGeom>
+          <a:noFill/>
+          <a:ln/>
+        </p:spPr>
+        <p:txBody>
+          <a:bodyPr wrap="square" lIns="0" tIns="0" rIns="0" bIns="0" rtlCol="0" anchor="ctr"/>
+          <a:lstStyle/>
+          <a:p>
+            <a:pPr marL="0" indent="0">
+              <a:lnSpc>
+                <a:spcPct val="115000"/>
+              </a:lnSpc>
+              <a:buNone/>
+            </a:pPr>
+            <a:r>
+              <a:rPr lang="en-US" sz="1200" dirty="0">
+                <a:solidFill>
+                  <a:srgbClr val="E8EEF7"/>
+                </a:solidFill>
+                <a:latin typeface="Calibri" pitchFamily="34" charset="0"/>
+                <a:ea typeface="Calibri" pitchFamily="34" charset="-122"/>
+                <a:cs typeface="Calibri" pitchFamily="34" charset="-120"/>
+              </a:rPr>
+              <a:t>Dalla punta del naso — il punto più sporgente dei 478 — ricava quanta energia c'è nel movimento. Sotto una soglia non conta: è respiro, non volontà.</a:t>
+            </a:r>
+            <a:endParaRPr lang="en-US" sz="1200" dirty="0"/>
+          </a:p>
+        </p:txBody>
+      </p:sp>
+      <p:sp>
+        <p:nvSpPr>
+          <p:cNvPr id="10" name="Text 8"/>
+          <p:cNvSpPr txBox="1"/>
+          <p:nvPr/>
+        </p:nvSpPr>
+        <p:spPr>
+          <a:xfrm>
+            <a:off x="640080" y="4206240"/>
+            <a:ext cx="10881360" cy="365760"/>
+          </a:xfrm>
+          <a:prstGeom prst="rect">
+            <a:avLst/>
+          </a:prstGeom>
+          <a:noFill/>
+          <a:ln/>
+        </p:spPr>
+        <p:txBody>
+          <a:bodyPr wrap="square" rtlCol="0" anchor="ctr"/>
+          <a:lstStyle/>
+          <a:p>
+            <a:pPr marL="0" indent="0">
+              <a:buNone/>
+            </a:pPr>
+            <a:r>
+              <a:rPr lang="en-US" sz="1700" b="1" dirty="0">
+                <a:solidFill>
+                  <a:srgbClr val="E8B87F"/>
+                </a:solidFill>
+                <a:latin typeface="Calibri" pitchFamily="34" charset="0"/>
+                <a:ea typeface="Calibri" pitchFamily="34" charset="-122"/>
+                <a:cs typeface="Calibri" pitchFamily="34" charset="-120"/>
+              </a:rPr>
+              <a:t>Tre flussi audio aperti una volta sola</a:t>
+            </a:r>
+            <a:endParaRPr lang="en-US" sz="1700" dirty="0"/>
+          </a:p>
+        </p:txBody>
+      </p:sp>
+      <p:sp>
+        <p:nvSpPr>
+          <p:cNvPr id="11" name="Text 9"/>
+          <p:cNvSpPr txBox="1"/>
+          <p:nvPr/>
+        </p:nvSpPr>
+        <p:spPr>
+          <a:xfrm>
+            <a:off x="640080" y="4663440"/>
+            <a:ext cx="10881360" cy="1005840"/>
+          </a:xfrm>
+          <a:prstGeom prst="rect">
+            <a:avLst/>
+          </a:prstGeom>
+          <a:noFill/>
+          <a:ln/>
+        </p:spPr>
+        <p:txBody>
+          <a:bodyPr wrap="square" rtlCol="0" anchor="ctr"/>
+          <a:lstStyle/>
+          <a:p>
+            <a:pPr marL="0" indent="0">
+              <a:lnSpc>
+                <a:spcPct val="125000"/>
+              </a:lnSpc>
+              <a:buNone/>
+            </a:pPr>
+            <a:r>
+              <a:rPr lang="en-US" sz="1350" dirty="0">
+                <a:solidFill>
+                  <a:srgbClr val="E8EEF7"/>
+                </a:solidFill>
+                <a:latin typeface="Calibri" pitchFamily="34" charset="0"/>
+                <a:ea typeface="Calibri" pitchFamily="34" charset="-122"/>
+                <a:cs typeface="Calibri" pitchFamily="34" charset="-120"/>
+              </a:rPr>
+              <a:t>Aprire o chiudere un flusso mentre un altro suona fa riconfigurare la scheda audio, e si sente come un “click” </a:t>
+            </a:r>
+            <a:r>
+              <a:rPr lang="en-US" sz="1350" dirty="0" err="1">
+                <a:solidFill>
+                  <a:srgbClr val="E8EEF7"/>
+                </a:solidFill>
+                <a:latin typeface="Calibri" pitchFamily="34" charset="0"/>
+                <a:ea typeface="Calibri" pitchFamily="34" charset="-122"/>
+                <a:cs typeface="Calibri" pitchFamily="34" charset="-120"/>
+              </a:rPr>
+              <a:t>fastidioso</a:t>
+            </a:r>
+            <a:r>
+              <a:rPr lang="en-US" sz="1350" dirty="0">
+                <a:solidFill>
+                  <a:srgbClr val="E8EEF7"/>
+                </a:solidFill>
+                <a:latin typeface="Calibri" pitchFamily="34" charset="0"/>
+                <a:ea typeface="Calibri" pitchFamily="34" charset="-122"/>
+                <a:cs typeface="Calibri" pitchFamily="34" charset="-120"/>
+              </a:rPr>
+              <a:t>. </a:t>
+            </a:r>
+            <a:r>
+              <a:rPr lang="en-US" sz="1350" dirty="0" err="1">
+                <a:solidFill>
+                  <a:srgbClr val="E8EEF7"/>
+                </a:solidFill>
+                <a:latin typeface="Calibri" pitchFamily="34" charset="0"/>
+                <a:ea typeface="Calibri" pitchFamily="34" charset="-122"/>
+                <a:cs typeface="Calibri" pitchFamily="34" charset="-120"/>
+              </a:rPr>
+              <a:t>Soluzione</a:t>
+            </a:r>
+            <a:r>
+              <a:rPr lang="en-US" sz="1350" dirty="0">
+                <a:solidFill>
+                  <a:srgbClr val="E8EEF7"/>
+                </a:solidFill>
+                <a:latin typeface="Calibri" pitchFamily="34" charset="0"/>
+                <a:ea typeface="Calibri" pitchFamily="34" charset="-122"/>
+                <a:cs typeface="Calibri" pitchFamily="34" charset="-120"/>
+              </a:rPr>
+              <a:t>: </a:t>
+            </a:r>
+            <a:r>
+              <a:rPr lang="en-US" sz="1350" dirty="0" err="1">
+                <a:solidFill>
+                  <a:srgbClr val="E8EEF7"/>
+                </a:solidFill>
+                <a:latin typeface="Calibri" pitchFamily="34" charset="0"/>
+                <a:ea typeface="Calibri" pitchFamily="34" charset="-122"/>
+                <a:cs typeface="Calibri" pitchFamily="34" charset="-120"/>
+              </a:rPr>
+              <a:t>microfono</a:t>
+            </a:r>
+            <a:r>
+              <a:rPr lang="en-US" sz="1350" dirty="0">
+                <a:solidFill>
+                  <a:srgbClr val="E8EEF7"/>
+                </a:solidFill>
+                <a:latin typeface="Calibri" pitchFamily="34" charset="0"/>
+                <a:ea typeface="Calibri" pitchFamily="34" charset="-122"/>
+                <a:cs typeface="Calibri" pitchFamily="34" charset="-120"/>
+              </a:rPr>
+              <a:t>, tappeto musicale e traccia della meditazione si aprono all'avvio e restano aperti fino alla fine: quello che si accende e si spegne è solo un interruttore.</a:t>
+            </a:r>
+            <a:endParaRPr lang="en-US" sz="1350" dirty="0"/>
+          </a:p>
+        </p:txBody>
+      </p:sp>
+      <p:sp>
+        <p:nvSpPr>
+          <p:cNvPr id="13" name="Text 1">
+            <a:extLst>
+              <a:ext uri="{FF2B5EF4-FFF2-40B4-BE49-F238E27FC236}">
+                <a16:creationId xmlns:a16="http://schemas.microsoft.com/office/drawing/2014/main" id="{4F867328-C7ED-7DF5-1D68-4C4EEDCA60DB}"/>
+              </a:ext>
+            </a:extLst>
+          </p:cNvPr>
+          <p:cNvSpPr txBox="1"/>
+          <p:nvPr/>
+        </p:nvSpPr>
+        <p:spPr>
+          <a:xfrm>
+            <a:off x="792480" y="838200"/>
+            <a:ext cx="5257800" cy="777240"/>
+          </a:xfrm>
+          <a:prstGeom prst="rect">
+            <a:avLst/>
+          </a:prstGeom>
+          <a:noFill/>
+          <a:ln/>
+        </p:spPr>
+        <p:txBody>
+          <a:bodyPr wrap="square" rtlCol="0" anchor="ctr"/>
+          <a:lstStyle/>
+          <a:p>
+            <a:pPr marL="0" indent="0">
+              <a:buNone/>
+            </a:pPr>
+            <a:r>
+              <a:rPr lang="en-US" sz="3400" b="1" dirty="0" err="1">
+                <a:solidFill>
+                  <a:srgbClr val="E8EEF7"/>
+                </a:solidFill>
+                <a:latin typeface="Cambria" pitchFamily="34" charset="0"/>
+                <a:ea typeface="Cambria" pitchFamily="34" charset="-122"/>
+                <a:cs typeface="Cambria" pitchFamily="34" charset="-120"/>
+              </a:rPr>
+              <a:t>Microfono</a:t>
+            </a:r>
+            <a:r>
+              <a:rPr lang="en-US" sz="3400" b="1" dirty="0">
+                <a:solidFill>
+                  <a:srgbClr val="E8EEF7"/>
+                </a:solidFill>
+                <a:latin typeface="Cambria" pitchFamily="34" charset="0"/>
+                <a:ea typeface="Cambria" pitchFamily="34" charset="-122"/>
+                <a:cs typeface="Cambria" pitchFamily="34" charset="-120"/>
+              </a:rPr>
+              <a:t> e Whisper</a:t>
+            </a:r>
+            <a:endParaRPr lang="en-US" sz="3400" dirty="0"/>
+          </a:p>
+        </p:txBody>
+      </p:sp>
+    </p:spTree>
+  </p:cSld>
+  <p:clrMapOvr>
+    <a:masterClrMapping/>
+  </p:clrMapOvr>
+</p:sld>
+</file>
+
+<file path=ppt/slides/slide11.xml><?xml version="1.0" encoding="utf-8"?>
+<p:sld xmlns:a="http://schemas.openxmlformats.org/drawingml/2006/main" xmlns:r="http://schemas.openxmlformats.org/officeDocument/2006/relationships" xmlns:p="http://schemas.openxmlformats.org/presentationml/2006/main">
+  <p:cSld name="Slide 8">
+    <p:bg>
+      <p:bgPr>
+        <a:solidFill>
+          <a:srgbClr val="0B1026"/>
+        </a:solidFill>
+        <a:effectLst/>
+      </p:bgPr>
+    </p:bg>
+    <p:spTree>
+      <p:nvGrpSpPr>
+        <p:cNvPr id="1" name=""/>
+        <p:cNvGrpSpPr/>
+        <p:nvPr/>
+      </p:nvGrpSpPr>
+      <p:grpSpPr>
+        <a:xfrm>
+          <a:off x="0" y="0"/>
+          <a:ext cx="0" cy="0"/>
+          <a:chOff x="0" y="0"/>
+          <a:chExt cx="0" cy="0"/>
+        </a:xfrm>
+      </p:grpSpPr>
+      <p:sp>
+        <p:nvSpPr>
+          <p:cNvPr id="2" name="Text 0"/>
+          <p:cNvSpPr txBox="1"/>
+          <p:nvPr/>
+        </p:nvSpPr>
+        <p:spPr>
+          <a:xfrm>
+            <a:off x="640080" y="384048"/>
+            <a:ext cx="10058400" cy="274320"/>
+          </a:xfrm>
+          <a:prstGeom prst="rect">
+            <a:avLst/>
+          </a:prstGeom>
+          <a:noFill/>
+          <a:ln/>
+        </p:spPr>
+        <p:txBody>
+          <a:bodyPr wrap="square" rtlCol="0" anchor="ctr"/>
+          <a:lstStyle/>
+          <a:p>
+            <a:pPr marL="0" indent="0">
+              <a:buNone/>
+            </a:pPr>
+            <a:r>
+              <a:rPr lang="en-US" sz="1200" b="1" kern="0" spc="200" dirty="0">
+                <a:solidFill>
+                  <a:srgbClr val="8FD9EC"/>
+                </a:solidFill>
+                <a:latin typeface="Calibri" pitchFamily="34" charset="0"/>
+                <a:ea typeface="Calibri" pitchFamily="34" charset="-122"/>
+                <a:cs typeface="Calibri" pitchFamily="34" charset="-120"/>
+              </a:rPr>
+              <a:t>RAZIONALITÀ</a:t>
+            </a:r>
+            <a:endParaRPr lang="en-US" sz="1200" dirty="0"/>
+          </a:p>
+        </p:txBody>
+      </p:sp>
+      <p:sp>
+        <p:nvSpPr>
+          <p:cNvPr id="3" name="Text 1"/>
+          <p:cNvSpPr txBox="1"/>
+          <p:nvPr/>
+        </p:nvSpPr>
+        <p:spPr>
+          <a:xfrm>
+            <a:off x="640080" y="685800"/>
+            <a:ext cx="10881360" cy="777240"/>
+          </a:xfrm>
+          <a:prstGeom prst="rect">
+            <a:avLst/>
+          </a:prstGeom>
+          <a:noFill/>
+          <a:ln/>
+        </p:spPr>
+        <p:txBody>
+          <a:bodyPr wrap="square" rtlCol="0" anchor="ctr"/>
+          <a:lstStyle/>
+          <a:p>
+            <a:pPr marL="0" indent="0">
+              <a:buNone/>
+            </a:pPr>
+            <a:r>
+              <a:rPr lang="en-US" sz="3400" b="1" dirty="0" err="1">
+                <a:solidFill>
+                  <a:srgbClr val="E8EEF7"/>
+                </a:solidFill>
+                <a:latin typeface="Cambria" pitchFamily="34" charset="0"/>
+                <a:ea typeface="Cambria" pitchFamily="34" charset="-122"/>
+                <a:cs typeface="Cambria" pitchFamily="34" charset="-120"/>
+              </a:rPr>
+              <a:t>Transitional</a:t>
+            </a:r>
+            <a:r>
+              <a:rPr lang="en-US" sz="3400" b="1" dirty="0">
+                <a:solidFill>
+                  <a:srgbClr val="E8EEF7"/>
+                </a:solidFill>
+                <a:latin typeface="Cambria" pitchFamily="34" charset="0"/>
+                <a:ea typeface="Cambria" pitchFamily="34" charset="-122"/>
+                <a:cs typeface="Cambria" pitchFamily="34" charset="-120"/>
+              </a:rPr>
+              <a:t> Network – </a:t>
+            </a:r>
+            <a:r>
+              <a:rPr lang="en-US" sz="3400" b="1" dirty="0" err="1">
+                <a:solidFill>
+                  <a:srgbClr val="E8EEF7"/>
+                </a:solidFill>
+                <a:latin typeface="Cambria" pitchFamily="34" charset="0"/>
+                <a:ea typeface="Cambria" pitchFamily="34" charset="-122"/>
+                <a:cs typeface="Cambria" pitchFamily="34" charset="-120"/>
+              </a:rPr>
+              <a:t>Macchina</a:t>
+            </a:r>
+            <a:r>
+              <a:rPr lang="en-US" sz="3400" b="1" dirty="0">
+                <a:solidFill>
+                  <a:srgbClr val="E8EEF7"/>
+                </a:solidFill>
+                <a:latin typeface="Cambria" pitchFamily="34" charset="0"/>
+                <a:ea typeface="Cambria" pitchFamily="34" charset="-122"/>
+                <a:cs typeface="Cambria" pitchFamily="34" charset="-120"/>
+              </a:rPr>
+              <a:t> a Stati</a:t>
+            </a:r>
+            <a:endParaRPr lang="en-US" sz="3400" dirty="0"/>
+          </a:p>
+        </p:txBody>
+      </p:sp>
+      <p:sp>
+        <p:nvSpPr>
+          <p:cNvPr id="4" name="Shape 2"/>
+          <p:cNvSpPr/>
+          <p:nvPr/>
+        </p:nvSpPr>
+        <p:spPr>
+          <a:xfrm>
+            <a:off x="502920" y="3135544"/>
+            <a:ext cx="1115568" cy="868680"/>
+          </a:xfrm>
+          <a:prstGeom prst="roundRect">
+            <a:avLst>
+              <a:gd name="adj" fmla="val 6316"/>
+            </a:avLst>
+          </a:prstGeom>
+          <a:solidFill>
+            <a:srgbClr val="141B33"/>
+          </a:solidFill>
+          <a:ln w="17780">
+            <a:solidFill>
+              <a:srgbClr val="5A7FB8"/>
+            </a:solidFill>
+            <a:prstDash val="solid"/>
+          </a:ln>
+        </p:spPr>
+        <p:txBody>
+          <a:bodyPr/>
+          <a:lstStyle/>
+          <a:p>
+            <a:endParaRPr lang="en-IT"/>
+          </a:p>
+        </p:txBody>
+      </p:sp>
+      <p:sp>
+        <p:nvSpPr>
+          <p:cNvPr id="5" name="Text 3"/>
+          <p:cNvSpPr txBox="1"/>
+          <p:nvPr/>
+        </p:nvSpPr>
+        <p:spPr>
+          <a:xfrm>
+            <a:off x="539496" y="3135544"/>
+            <a:ext cx="1042416" cy="868680"/>
+          </a:xfrm>
+          <a:prstGeom prst="rect">
+            <a:avLst/>
+          </a:prstGeom>
+          <a:noFill/>
+          <a:ln/>
+        </p:spPr>
+        <p:txBody>
+          <a:bodyPr wrap="square" lIns="0" tIns="0" rIns="0" bIns="0" rtlCol="0" anchor="ctr"/>
+          <a:lstStyle/>
+          <a:p>
+            <a:pPr marL="0" indent="0" algn="ctr">
+              <a:buNone/>
+            </a:pPr>
+            <a:r>
+              <a:rPr lang="en-US" sz="950" b="1" dirty="0">
+                <a:solidFill>
+                  <a:srgbClr val="E8EEF7"/>
+                </a:solidFill>
+                <a:latin typeface="Calibri" pitchFamily="34" charset="0"/>
+                <a:ea typeface="Calibri" pitchFamily="34" charset="-122"/>
+                <a:cs typeface="Calibri" pitchFamily="34" charset="-120"/>
+              </a:rPr>
+              <a:t>Benvenuto</a:t>
+            </a:r>
+            <a:endParaRPr lang="en-US" sz="950" dirty="0"/>
+          </a:p>
+        </p:txBody>
+      </p:sp>
+      <p:sp>
+        <p:nvSpPr>
+          <p:cNvPr id="6" name="Shape 4"/>
+          <p:cNvSpPr/>
+          <p:nvPr/>
+        </p:nvSpPr>
+        <p:spPr>
+          <a:xfrm>
+            <a:off x="1618488" y="3569884"/>
+            <a:ext cx="150876" cy="0"/>
+          </a:xfrm>
+          <a:prstGeom prst="line">
+            <a:avLst/>
+          </a:prstGeom>
+          <a:noFill/>
+          <a:ln w="16510">
+            <a:solidFill>
+              <a:srgbClr val="44507A"/>
+            </a:solidFill>
+            <a:prstDash val="solid"/>
+            <a:tailEnd type="triangle"/>
+          </a:ln>
+        </p:spPr>
+        <p:txBody>
+          <a:bodyPr/>
+          <a:lstStyle/>
+          <a:p>
+            <a:endParaRPr lang="en-IT"/>
+          </a:p>
+        </p:txBody>
+      </p:sp>
+      <p:sp>
+        <p:nvSpPr>
+          <p:cNvPr id="7" name="Shape 5"/>
+          <p:cNvSpPr/>
+          <p:nvPr/>
+        </p:nvSpPr>
+        <p:spPr>
+          <a:xfrm>
+            <a:off x="1769364" y="3135544"/>
+            <a:ext cx="1115568" cy="868680"/>
+          </a:xfrm>
+          <a:prstGeom prst="roundRect">
+            <a:avLst>
+              <a:gd name="adj" fmla="val 6316"/>
+            </a:avLst>
+          </a:prstGeom>
+          <a:solidFill>
+            <a:srgbClr val="141B33"/>
+          </a:solidFill>
+          <a:ln w="17780">
+            <a:solidFill>
+              <a:srgbClr val="5A7FB8"/>
+            </a:solidFill>
+            <a:prstDash val="solid"/>
+          </a:ln>
+        </p:spPr>
+        <p:txBody>
+          <a:bodyPr/>
+          <a:lstStyle/>
+          <a:p>
+            <a:endParaRPr lang="en-IT"/>
+          </a:p>
+        </p:txBody>
+      </p:sp>
+      <p:sp>
+        <p:nvSpPr>
+          <p:cNvPr id="8" name="Text 6"/>
+          <p:cNvSpPr txBox="1"/>
+          <p:nvPr/>
+        </p:nvSpPr>
+        <p:spPr>
+          <a:xfrm>
+            <a:off x="1805940" y="3135544"/>
+            <a:ext cx="1042416" cy="868680"/>
+          </a:xfrm>
+          <a:prstGeom prst="rect">
+            <a:avLst/>
+          </a:prstGeom>
+          <a:noFill/>
+          <a:ln/>
+        </p:spPr>
+        <p:txBody>
+          <a:bodyPr wrap="square" lIns="0" tIns="0" rIns="0" bIns="0" rtlCol="0" anchor="ctr"/>
+          <a:lstStyle/>
+          <a:p>
+            <a:pPr marL="0" indent="0" algn="ctr">
+              <a:buNone/>
+            </a:pPr>
+            <a:r>
+              <a:rPr lang="en-US" sz="950" b="1" dirty="0" err="1">
+                <a:solidFill>
+                  <a:srgbClr val="E8EEF7"/>
+                </a:solidFill>
+                <a:latin typeface="Calibri" pitchFamily="34" charset="0"/>
+                <a:ea typeface="Calibri" pitchFamily="34" charset="-122"/>
+                <a:cs typeface="Calibri" pitchFamily="34" charset="-120"/>
+              </a:rPr>
+              <a:t>Invito</a:t>
+            </a:r>
+            <a:endParaRPr lang="en-US" sz="950" b="1" dirty="0">
+              <a:solidFill>
+                <a:srgbClr val="E8EEF7"/>
+              </a:solidFill>
+              <a:latin typeface="Calibri" pitchFamily="34" charset="0"/>
+              <a:ea typeface="Calibri" pitchFamily="34" charset="-122"/>
+              <a:cs typeface="Calibri" pitchFamily="34" charset="-120"/>
+            </a:endParaRPr>
+          </a:p>
+          <a:p>
+            <a:pPr marL="0" indent="0" algn="ctr">
+              <a:buNone/>
+            </a:pPr>
+            <a:r>
+              <a:rPr lang="en-US" sz="950" b="1" dirty="0">
+                <a:solidFill>
+                  <a:srgbClr val="E8EEF7"/>
+                </a:solidFill>
+                <a:latin typeface="Calibri" pitchFamily="34" charset="0"/>
+                <a:cs typeface="Calibri" pitchFamily="34" charset="-120"/>
+              </a:rPr>
+              <a:t>a </a:t>
+            </a:r>
+            <a:r>
+              <a:rPr lang="en-US" sz="950" b="1" dirty="0" err="1">
+                <a:solidFill>
+                  <a:srgbClr val="E8EEF7"/>
+                </a:solidFill>
+                <a:latin typeface="Calibri" pitchFamily="34" charset="0"/>
+                <a:cs typeface="Calibri" pitchFamily="34" charset="-120"/>
+              </a:rPr>
+              <a:t>parlare</a:t>
+            </a:r>
+            <a:endParaRPr lang="en-US" sz="950" dirty="0"/>
+          </a:p>
+        </p:txBody>
+      </p:sp>
+      <p:sp>
+        <p:nvSpPr>
+          <p:cNvPr id="9" name="Shape 7"/>
+          <p:cNvSpPr/>
+          <p:nvPr/>
+        </p:nvSpPr>
+        <p:spPr>
+          <a:xfrm>
+            <a:off x="2884932" y="3569884"/>
+            <a:ext cx="150876" cy="0"/>
+          </a:xfrm>
+          <a:prstGeom prst="line">
+            <a:avLst/>
+          </a:prstGeom>
+          <a:noFill/>
+          <a:ln w="16510">
+            <a:solidFill>
+              <a:srgbClr val="44507A"/>
+            </a:solidFill>
+            <a:prstDash val="solid"/>
+            <a:tailEnd type="triangle"/>
+          </a:ln>
+        </p:spPr>
+        <p:txBody>
+          <a:bodyPr/>
+          <a:lstStyle/>
+          <a:p>
+            <a:endParaRPr lang="en-IT"/>
+          </a:p>
+        </p:txBody>
+      </p:sp>
+      <p:sp>
+        <p:nvSpPr>
+          <p:cNvPr id="10" name="Shape 8"/>
+          <p:cNvSpPr/>
+          <p:nvPr/>
+        </p:nvSpPr>
+        <p:spPr>
+          <a:xfrm>
+            <a:off x="3035808" y="3135544"/>
+            <a:ext cx="1115568" cy="868680"/>
+          </a:xfrm>
+          <a:prstGeom prst="roundRect">
+            <a:avLst>
+              <a:gd name="adj" fmla="val 6316"/>
+            </a:avLst>
+          </a:prstGeom>
+          <a:solidFill>
+            <a:srgbClr val="141B33"/>
+          </a:solidFill>
+          <a:ln w="17780">
+            <a:solidFill>
+              <a:srgbClr val="E8B87F"/>
+            </a:solidFill>
+            <a:prstDash val="solid"/>
+          </a:ln>
+        </p:spPr>
+        <p:txBody>
+          <a:bodyPr/>
+          <a:lstStyle/>
+          <a:p>
+            <a:endParaRPr lang="en-IT"/>
+          </a:p>
+        </p:txBody>
+      </p:sp>
+      <p:sp>
+        <p:nvSpPr>
+          <p:cNvPr id="11" name="Text 9"/>
+          <p:cNvSpPr txBox="1"/>
+          <p:nvPr/>
+        </p:nvSpPr>
+        <p:spPr>
+          <a:xfrm>
+            <a:off x="3072384" y="3135544"/>
+            <a:ext cx="1042416" cy="868680"/>
+          </a:xfrm>
+          <a:prstGeom prst="rect">
+            <a:avLst/>
+          </a:prstGeom>
+          <a:noFill/>
+          <a:ln/>
+        </p:spPr>
+        <p:txBody>
+          <a:bodyPr wrap="square" lIns="0" tIns="0" rIns="0" bIns="0" rtlCol="0" anchor="ctr"/>
+          <a:lstStyle/>
+          <a:p>
+            <a:pPr marL="0" indent="0" algn="ctr">
+              <a:buNone/>
+            </a:pPr>
+            <a:r>
+              <a:rPr lang="en-US" sz="950" b="1" dirty="0" err="1">
+                <a:solidFill>
+                  <a:srgbClr val="E8B87F"/>
+                </a:solidFill>
+                <a:latin typeface="Calibri" pitchFamily="34" charset="0"/>
+                <a:ea typeface="Calibri" pitchFamily="34" charset="-122"/>
+                <a:cs typeface="Calibri" pitchFamily="34" charset="-120"/>
+              </a:rPr>
+              <a:t>Ascolto</a:t>
+            </a:r>
+            <a:endParaRPr lang="en-US" sz="950" dirty="0"/>
+          </a:p>
+        </p:txBody>
+      </p:sp>
+      <p:sp>
+        <p:nvSpPr>
+          <p:cNvPr id="12" name="Shape 10"/>
+          <p:cNvSpPr/>
+          <p:nvPr/>
+        </p:nvSpPr>
+        <p:spPr>
+          <a:xfrm>
+            <a:off x="4151376" y="3569884"/>
+            <a:ext cx="150876" cy="0"/>
+          </a:xfrm>
+          <a:prstGeom prst="line">
+            <a:avLst/>
+          </a:prstGeom>
+          <a:noFill/>
+          <a:ln w="16510">
+            <a:solidFill>
+              <a:srgbClr val="44507A"/>
+            </a:solidFill>
+            <a:prstDash val="solid"/>
+            <a:tailEnd type="triangle"/>
+          </a:ln>
+        </p:spPr>
+        <p:txBody>
+          <a:bodyPr/>
+          <a:lstStyle/>
+          <a:p>
+            <a:endParaRPr lang="en-IT"/>
+          </a:p>
+        </p:txBody>
+      </p:sp>
+      <p:sp>
+        <p:nvSpPr>
+          <p:cNvPr id="13" name="Shape 11"/>
+          <p:cNvSpPr/>
+          <p:nvPr/>
+        </p:nvSpPr>
+        <p:spPr>
+          <a:xfrm>
+            <a:off x="4302252" y="3135544"/>
+            <a:ext cx="1115568" cy="868680"/>
+          </a:xfrm>
+          <a:prstGeom prst="roundRect">
+            <a:avLst>
+              <a:gd name="adj" fmla="val 6316"/>
+            </a:avLst>
+          </a:prstGeom>
+          <a:solidFill>
+            <a:srgbClr val="141B33"/>
+          </a:solidFill>
+          <a:ln w="17780">
+            <a:solidFill>
+              <a:srgbClr val="5A7FB8"/>
+            </a:solidFill>
+            <a:prstDash val="solid"/>
+          </a:ln>
+        </p:spPr>
+        <p:txBody>
+          <a:bodyPr/>
+          <a:lstStyle/>
+          <a:p>
+            <a:endParaRPr lang="en-IT"/>
+          </a:p>
+        </p:txBody>
+      </p:sp>
+      <p:sp>
+        <p:nvSpPr>
+          <p:cNvPr id="14" name="Text 12"/>
+          <p:cNvSpPr txBox="1"/>
+          <p:nvPr/>
+        </p:nvSpPr>
+        <p:spPr>
+          <a:xfrm>
+            <a:off x="4338828" y="3135544"/>
+            <a:ext cx="1042416" cy="868680"/>
+          </a:xfrm>
+          <a:prstGeom prst="rect">
+            <a:avLst/>
+          </a:prstGeom>
+          <a:noFill/>
+          <a:ln/>
+        </p:spPr>
+        <p:txBody>
+          <a:bodyPr wrap="square" lIns="0" tIns="0" rIns="0" bIns="0" rtlCol="0" anchor="ctr"/>
+          <a:lstStyle/>
+          <a:p>
+            <a:pPr marL="0" indent="0" algn="ctr">
+              <a:buNone/>
+            </a:pPr>
+            <a:r>
+              <a:rPr lang="en-US" sz="950" b="1" dirty="0" err="1">
+                <a:solidFill>
+                  <a:srgbClr val="E8EEF7"/>
+                </a:solidFill>
+                <a:latin typeface="Calibri" pitchFamily="34" charset="0"/>
+                <a:ea typeface="Calibri" pitchFamily="34" charset="-122"/>
+                <a:cs typeface="Calibri" pitchFamily="34" charset="-120"/>
+              </a:rPr>
+              <a:t>Attesa</a:t>
+            </a:r>
+            <a:endParaRPr lang="en-US" sz="950" dirty="0"/>
+          </a:p>
+        </p:txBody>
+      </p:sp>
+      <p:sp>
+        <p:nvSpPr>
+          <p:cNvPr id="15" name="Shape 13"/>
+          <p:cNvSpPr/>
+          <p:nvPr/>
+        </p:nvSpPr>
+        <p:spPr>
+          <a:xfrm>
+            <a:off x="5417820" y="3569884"/>
+            <a:ext cx="150876" cy="0"/>
+          </a:xfrm>
+          <a:prstGeom prst="line">
+            <a:avLst/>
+          </a:prstGeom>
+          <a:noFill/>
+          <a:ln w="16510">
+            <a:solidFill>
+              <a:srgbClr val="44507A"/>
+            </a:solidFill>
+            <a:prstDash val="solid"/>
+            <a:tailEnd type="triangle"/>
+          </a:ln>
+        </p:spPr>
+        <p:txBody>
+          <a:bodyPr/>
+          <a:lstStyle/>
+          <a:p>
+            <a:endParaRPr lang="en-IT"/>
+          </a:p>
+        </p:txBody>
+      </p:sp>
+      <p:sp>
+        <p:nvSpPr>
+          <p:cNvPr id="16" name="Shape 14"/>
+          <p:cNvSpPr/>
+          <p:nvPr/>
+        </p:nvSpPr>
+        <p:spPr>
+          <a:xfrm>
+            <a:off x="5568696" y="3135544"/>
+            <a:ext cx="1115568" cy="868680"/>
+          </a:xfrm>
+          <a:prstGeom prst="roundRect">
+            <a:avLst>
+              <a:gd name="adj" fmla="val 6316"/>
+            </a:avLst>
+          </a:prstGeom>
+          <a:solidFill>
+            <a:srgbClr val="141B33"/>
+          </a:solidFill>
+          <a:ln w="17780">
+            <a:solidFill>
+              <a:srgbClr val="5A7FB8"/>
+            </a:solidFill>
+            <a:prstDash val="solid"/>
+          </a:ln>
+        </p:spPr>
+        <p:txBody>
+          <a:bodyPr/>
+          <a:lstStyle/>
+          <a:p>
+            <a:endParaRPr lang="en-IT"/>
+          </a:p>
+        </p:txBody>
+      </p:sp>
+      <p:sp>
+        <p:nvSpPr>
+          <p:cNvPr id="17" name="Text 15"/>
+          <p:cNvSpPr txBox="1"/>
+          <p:nvPr/>
+        </p:nvSpPr>
+        <p:spPr>
+          <a:xfrm>
+            <a:off x="5605272" y="3135544"/>
+            <a:ext cx="1042416" cy="868680"/>
+          </a:xfrm>
+          <a:prstGeom prst="rect">
+            <a:avLst/>
+          </a:prstGeom>
+          <a:noFill/>
+          <a:ln/>
+        </p:spPr>
+        <p:txBody>
+          <a:bodyPr wrap="square" lIns="0" tIns="0" rIns="0" bIns="0" rtlCol="0" anchor="ctr"/>
+          <a:lstStyle/>
+          <a:p>
+            <a:pPr marL="0" indent="0" algn="ctr">
+              <a:buNone/>
+            </a:pPr>
+            <a:r>
+              <a:rPr lang="en-US" sz="950" b="1" dirty="0">
+                <a:solidFill>
+                  <a:srgbClr val="E8EEF7"/>
+                </a:solidFill>
+                <a:latin typeface="Calibri" pitchFamily="34" charset="0"/>
+                <a:ea typeface="Calibri" pitchFamily="34" charset="-122"/>
+                <a:cs typeface="Calibri" pitchFamily="34" charset="-120"/>
+              </a:rPr>
+              <a:t>Display </a:t>
+            </a:r>
+            <a:r>
+              <a:rPr lang="en-US" sz="950" b="1" dirty="0" err="1">
+                <a:solidFill>
+                  <a:srgbClr val="E8EEF7"/>
+                </a:solidFill>
+                <a:latin typeface="Calibri" pitchFamily="34" charset="0"/>
+                <a:ea typeface="Calibri" pitchFamily="34" charset="-122"/>
+                <a:cs typeface="Calibri" pitchFamily="34" charset="-120"/>
+              </a:rPr>
+              <a:t>frasi</a:t>
+            </a:r>
+            <a:r>
+              <a:rPr lang="en-US" sz="950" b="1" dirty="0">
+                <a:solidFill>
+                  <a:srgbClr val="E8EEF7"/>
+                </a:solidFill>
+                <a:latin typeface="Calibri" pitchFamily="34" charset="0"/>
+                <a:ea typeface="Calibri" pitchFamily="34" charset="-122"/>
+                <a:cs typeface="Calibri" pitchFamily="34" charset="-120"/>
+              </a:rPr>
+              <a:t> </a:t>
+            </a:r>
+            <a:r>
+              <a:rPr lang="en-US" sz="950" b="1" dirty="0" err="1">
+                <a:solidFill>
+                  <a:srgbClr val="E8EEF7"/>
+                </a:solidFill>
+                <a:latin typeface="Calibri" pitchFamily="34" charset="0"/>
+                <a:ea typeface="Calibri" pitchFamily="34" charset="-122"/>
+                <a:cs typeface="Calibri" pitchFamily="34" charset="-120"/>
+              </a:rPr>
+              <a:t>personalizzate</a:t>
+            </a:r>
+            <a:endParaRPr lang="en-US" sz="950" dirty="0"/>
+          </a:p>
+        </p:txBody>
+      </p:sp>
+      <p:sp>
+        <p:nvSpPr>
+          <p:cNvPr id="18" name="Shape 16"/>
+          <p:cNvSpPr/>
+          <p:nvPr/>
+        </p:nvSpPr>
+        <p:spPr>
+          <a:xfrm>
+            <a:off x="6684264" y="3569884"/>
+            <a:ext cx="150876" cy="0"/>
+          </a:xfrm>
+          <a:prstGeom prst="line">
+            <a:avLst/>
+          </a:prstGeom>
+          <a:noFill/>
+          <a:ln w="16510">
+            <a:solidFill>
+              <a:srgbClr val="44507A"/>
+            </a:solidFill>
+            <a:prstDash val="solid"/>
+            <a:tailEnd type="triangle"/>
+          </a:ln>
+        </p:spPr>
+        <p:txBody>
+          <a:bodyPr/>
+          <a:lstStyle/>
+          <a:p>
+            <a:endParaRPr lang="en-IT"/>
+          </a:p>
+        </p:txBody>
+      </p:sp>
+      <p:sp>
+        <p:nvSpPr>
+          <p:cNvPr id="19" name="Shape 17"/>
+          <p:cNvSpPr/>
+          <p:nvPr/>
+        </p:nvSpPr>
+        <p:spPr>
+          <a:xfrm>
+            <a:off x="6835140" y="3135544"/>
+            <a:ext cx="1115568" cy="868680"/>
+          </a:xfrm>
+          <a:prstGeom prst="roundRect">
+            <a:avLst>
+              <a:gd name="adj" fmla="val 6316"/>
+            </a:avLst>
+          </a:prstGeom>
+          <a:solidFill>
+            <a:srgbClr val="141B33"/>
+          </a:solidFill>
+          <a:ln w="17780">
+            <a:solidFill>
+              <a:srgbClr val="5A7FB8"/>
+            </a:solidFill>
+            <a:prstDash val="solid"/>
+          </a:ln>
+        </p:spPr>
+        <p:txBody>
+          <a:bodyPr/>
+          <a:lstStyle/>
+          <a:p>
+            <a:endParaRPr lang="en-IT"/>
+          </a:p>
+        </p:txBody>
+      </p:sp>
+      <p:sp>
+        <p:nvSpPr>
+          <p:cNvPr id="20" name="Text 18"/>
+          <p:cNvSpPr txBox="1"/>
+          <p:nvPr/>
+        </p:nvSpPr>
+        <p:spPr>
+          <a:xfrm>
+            <a:off x="6871716" y="3135544"/>
+            <a:ext cx="1042416" cy="868680"/>
+          </a:xfrm>
+          <a:prstGeom prst="rect">
+            <a:avLst/>
+          </a:prstGeom>
+          <a:noFill/>
+          <a:ln/>
+        </p:spPr>
+        <p:txBody>
+          <a:bodyPr wrap="square" lIns="0" tIns="0" rIns="0" bIns="0" rtlCol="0" anchor="ctr"/>
+          <a:lstStyle/>
+          <a:p>
+            <a:pPr marL="0" indent="0" algn="ctr">
+              <a:buNone/>
+            </a:pPr>
+            <a:r>
+              <a:rPr lang="en-US" sz="950" b="1" dirty="0" err="1">
+                <a:solidFill>
+                  <a:srgbClr val="E8EEF7"/>
+                </a:solidFill>
+                <a:latin typeface="Calibri" pitchFamily="34" charset="0"/>
+                <a:ea typeface="Calibri" pitchFamily="34" charset="-122"/>
+                <a:cs typeface="Calibri" pitchFamily="34" charset="-120"/>
+              </a:rPr>
+              <a:t>Invito</a:t>
+            </a:r>
+            <a:endParaRPr lang="en-US" sz="950" dirty="0"/>
+          </a:p>
+          <a:p>
+            <a:pPr marL="0" indent="0" algn="ctr">
+              <a:buNone/>
+            </a:pPr>
+            <a:r>
+              <a:rPr lang="en-US" sz="950" b="1" dirty="0">
+                <a:solidFill>
+                  <a:srgbClr val="E8EEF7"/>
+                </a:solidFill>
+                <a:latin typeface="Calibri" pitchFamily="34" charset="0"/>
+                <a:ea typeface="Calibri" pitchFamily="34" charset="-122"/>
+                <a:cs typeface="Calibri" pitchFamily="34" charset="-120"/>
+              </a:rPr>
+              <a:t>meditazione</a:t>
+            </a:r>
+            <a:endParaRPr lang="en-US" sz="950" dirty="0"/>
+          </a:p>
+        </p:txBody>
+      </p:sp>
+      <p:sp>
+        <p:nvSpPr>
+          <p:cNvPr id="21" name="Shape 19"/>
+          <p:cNvSpPr/>
+          <p:nvPr/>
+        </p:nvSpPr>
+        <p:spPr>
+          <a:xfrm>
+            <a:off x="7950708" y="3569884"/>
+            <a:ext cx="150876" cy="0"/>
+          </a:xfrm>
+          <a:prstGeom prst="line">
+            <a:avLst/>
+          </a:prstGeom>
+          <a:noFill/>
+          <a:ln w="16510">
+            <a:solidFill>
+              <a:srgbClr val="44507A"/>
+            </a:solidFill>
+            <a:prstDash val="solid"/>
+            <a:tailEnd type="triangle"/>
+          </a:ln>
+        </p:spPr>
+        <p:txBody>
+          <a:bodyPr/>
+          <a:lstStyle/>
+          <a:p>
+            <a:endParaRPr lang="en-IT"/>
+          </a:p>
+        </p:txBody>
+      </p:sp>
+      <p:sp>
+        <p:nvSpPr>
+          <p:cNvPr id="22" name="Shape 20"/>
+          <p:cNvSpPr/>
+          <p:nvPr/>
+        </p:nvSpPr>
+        <p:spPr>
+          <a:xfrm>
+            <a:off x="8101584" y="3135544"/>
+            <a:ext cx="1115568" cy="868680"/>
+          </a:xfrm>
+          <a:prstGeom prst="roundRect">
+            <a:avLst>
+              <a:gd name="adj" fmla="val 6316"/>
+            </a:avLst>
+          </a:prstGeom>
+          <a:solidFill>
+            <a:srgbClr val="141B33"/>
+          </a:solidFill>
+          <a:ln w="17780">
+            <a:solidFill>
+              <a:srgbClr val="E8B87F"/>
+            </a:solidFill>
+            <a:prstDash val="solid"/>
+          </a:ln>
+        </p:spPr>
+        <p:txBody>
+          <a:bodyPr/>
+          <a:lstStyle/>
+          <a:p>
+            <a:endParaRPr lang="en-IT"/>
+          </a:p>
+        </p:txBody>
+      </p:sp>
+      <p:sp>
+        <p:nvSpPr>
+          <p:cNvPr id="23" name="Text 21"/>
+          <p:cNvSpPr txBox="1"/>
+          <p:nvPr/>
+        </p:nvSpPr>
+        <p:spPr>
+          <a:xfrm>
+            <a:off x="8138160" y="3135544"/>
+            <a:ext cx="1042416" cy="868680"/>
+          </a:xfrm>
+          <a:prstGeom prst="rect">
+            <a:avLst/>
+          </a:prstGeom>
+          <a:noFill/>
+          <a:ln/>
+        </p:spPr>
+        <p:txBody>
+          <a:bodyPr wrap="square" lIns="0" tIns="0" rIns="0" bIns="0" rtlCol="0" anchor="ctr"/>
+          <a:lstStyle/>
+          <a:p>
+            <a:pPr marL="0" indent="0" algn="ctr">
+              <a:buNone/>
+            </a:pPr>
+            <a:r>
+              <a:rPr lang="en-US" sz="950" b="1" dirty="0" err="1">
+                <a:solidFill>
+                  <a:srgbClr val="E8B87F"/>
+                </a:solidFill>
+                <a:latin typeface="Calibri" pitchFamily="34" charset="0"/>
+                <a:ea typeface="Calibri" pitchFamily="34" charset="-122"/>
+                <a:cs typeface="Calibri" pitchFamily="34" charset="-120"/>
+              </a:rPr>
+              <a:t>Meditazione</a:t>
+            </a:r>
+            <a:endParaRPr lang="en-US" sz="950" dirty="0"/>
+          </a:p>
+        </p:txBody>
+      </p:sp>
+      <p:sp>
+        <p:nvSpPr>
+          <p:cNvPr id="24" name="Shape 22"/>
+          <p:cNvSpPr/>
+          <p:nvPr/>
+        </p:nvSpPr>
+        <p:spPr>
+          <a:xfrm>
+            <a:off x="9217152" y="3569884"/>
+            <a:ext cx="150876" cy="0"/>
+          </a:xfrm>
+          <a:prstGeom prst="line">
+            <a:avLst/>
+          </a:prstGeom>
+          <a:noFill/>
+          <a:ln w="16510">
+            <a:solidFill>
+              <a:srgbClr val="44507A"/>
+            </a:solidFill>
+            <a:prstDash val="solid"/>
+            <a:tailEnd type="triangle"/>
+          </a:ln>
+        </p:spPr>
+        <p:txBody>
+          <a:bodyPr/>
+          <a:lstStyle/>
+          <a:p>
+            <a:endParaRPr lang="en-IT"/>
+          </a:p>
+        </p:txBody>
+      </p:sp>
+      <p:sp>
+        <p:nvSpPr>
+          <p:cNvPr id="25" name="Shape 23"/>
+          <p:cNvSpPr/>
+          <p:nvPr/>
+        </p:nvSpPr>
+        <p:spPr>
+          <a:xfrm>
+            <a:off x="9368028" y="3135544"/>
+            <a:ext cx="1115568" cy="868680"/>
+          </a:xfrm>
+          <a:prstGeom prst="roundRect">
+            <a:avLst>
+              <a:gd name="adj" fmla="val 6316"/>
+            </a:avLst>
+          </a:prstGeom>
+          <a:solidFill>
+            <a:srgbClr val="141B33"/>
+          </a:solidFill>
+          <a:ln w="17780">
+            <a:solidFill>
+              <a:srgbClr val="5A7FB8"/>
+            </a:solidFill>
+            <a:prstDash val="solid"/>
+          </a:ln>
+        </p:spPr>
+        <p:txBody>
+          <a:bodyPr/>
+          <a:lstStyle/>
+          <a:p>
+            <a:endParaRPr lang="en-IT"/>
+          </a:p>
+        </p:txBody>
+      </p:sp>
+      <p:sp>
+        <p:nvSpPr>
+          <p:cNvPr id="26" name="Text 24"/>
+          <p:cNvSpPr txBox="1"/>
+          <p:nvPr/>
+        </p:nvSpPr>
+        <p:spPr>
+          <a:xfrm>
+            <a:off x="9404604" y="3135544"/>
+            <a:ext cx="1042416" cy="868680"/>
+          </a:xfrm>
+          <a:prstGeom prst="rect">
+            <a:avLst/>
+          </a:prstGeom>
+          <a:noFill/>
+          <a:ln/>
+        </p:spPr>
+        <p:txBody>
+          <a:bodyPr wrap="square" lIns="0" tIns="0" rIns="0" bIns="0" rtlCol="0" anchor="ctr"/>
+          <a:lstStyle/>
+          <a:p>
+            <a:pPr marL="0" indent="0" algn="ctr">
+              <a:buNone/>
+            </a:pPr>
+            <a:r>
+              <a:rPr lang="en-US" sz="950" b="1" dirty="0">
+                <a:solidFill>
+                  <a:srgbClr val="E8EEF7"/>
+                </a:solidFill>
+                <a:latin typeface="Calibri" pitchFamily="34" charset="0"/>
+                <a:ea typeface="Calibri" pitchFamily="34" charset="-122"/>
+                <a:cs typeface="Calibri" pitchFamily="34" charset="-120"/>
+              </a:rPr>
+              <a:t>Mandala</a:t>
+            </a:r>
+            <a:endParaRPr lang="en-US" sz="950" dirty="0"/>
+          </a:p>
+        </p:txBody>
+      </p:sp>
+      <p:sp>
+        <p:nvSpPr>
+          <p:cNvPr id="27" name="Shape 25"/>
+          <p:cNvSpPr/>
+          <p:nvPr/>
+        </p:nvSpPr>
+        <p:spPr>
+          <a:xfrm>
+            <a:off x="10483596" y="3569884"/>
+            <a:ext cx="150876" cy="0"/>
+          </a:xfrm>
+          <a:prstGeom prst="line">
+            <a:avLst/>
+          </a:prstGeom>
+          <a:noFill/>
+          <a:ln w="16510">
+            <a:solidFill>
+              <a:srgbClr val="44507A"/>
+            </a:solidFill>
+            <a:prstDash val="solid"/>
+            <a:tailEnd type="triangle"/>
+          </a:ln>
+        </p:spPr>
+        <p:txBody>
+          <a:bodyPr/>
+          <a:lstStyle/>
+          <a:p>
+            <a:endParaRPr lang="en-IT"/>
+          </a:p>
+        </p:txBody>
+      </p:sp>
+      <p:sp>
+        <p:nvSpPr>
+          <p:cNvPr id="28" name="Shape 26"/>
+          <p:cNvSpPr/>
+          <p:nvPr/>
+        </p:nvSpPr>
+        <p:spPr>
+          <a:xfrm>
+            <a:off x="10634472" y="3135544"/>
+            <a:ext cx="1115568" cy="868680"/>
+          </a:xfrm>
+          <a:prstGeom prst="roundRect">
+            <a:avLst>
+              <a:gd name="adj" fmla="val 6316"/>
+            </a:avLst>
+          </a:prstGeom>
+          <a:solidFill>
+            <a:srgbClr val="141B33"/>
+          </a:solidFill>
+          <a:ln w="17780">
+            <a:solidFill>
+              <a:srgbClr val="E8B87F"/>
+            </a:solidFill>
+            <a:prstDash val="solid"/>
+          </a:ln>
+        </p:spPr>
+        <p:txBody>
+          <a:bodyPr/>
+          <a:lstStyle/>
+          <a:p>
+            <a:endParaRPr lang="en-IT"/>
+          </a:p>
+        </p:txBody>
+      </p:sp>
+      <p:sp>
+        <p:nvSpPr>
+          <p:cNvPr id="29" name="Text 27"/>
+          <p:cNvSpPr txBox="1"/>
+          <p:nvPr/>
+        </p:nvSpPr>
+        <p:spPr>
+          <a:xfrm>
+            <a:off x="10671048" y="3135544"/>
+            <a:ext cx="1042416" cy="868680"/>
+          </a:xfrm>
+          <a:prstGeom prst="rect">
+            <a:avLst/>
+          </a:prstGeom>
+          <a:noFill/>
+          <a:ln/>
+        </p:spPr>
+        <p:txBody>
+          <a:bodyPr wrap="square" lIns="0" tIns="0" rIns="0" bIns="0" rtlCol="0" anchor="ctr"/>
+          <a:lstStyle/>
+          <a:p>
+            <a:pPr marL="0" indent="0" algn="ctr">
+              <a:buNone/>
+            </a:pPr>
+            <a:r>
+              <a:rPr lang="en-US" sz="950" b="1" dirty="0" err="1">
+                <a:solidFill>
+                  <a:srgbClr val="E8B87F"/>
+                </a:solidFill>
+                <a:latin typeface="Calibri" pitchFamily="34" charset="0"/>
+                <a:ea typeface="Calibri" pitchFamily="34" charset="-122"/>
+                <a:cs typeface="Calibri" pitchFamily="34" charset="-120"/>
+              </a:rPr>
+              <a:t>Distruzione</a:t>
+            </a:r>
+            <a:r>
+              <a:rPr lang="en-US" sz="950" b="1" dirty="0">
+                <a:solidFill>
+                  <a:srgbClr val="E8B87F"/>
+                </a:solidFill>
+                <a:latin typeface="Calibri" pitchFamily="34" charset="0"/>
+                <a:ea typeface="Calibri" pitchFamily="34" charset="-122"/>
+                <a:cs typeface="Calibri" pitchFamily="34" charset="-120"/>
+              </a:rPr>
+              <a:t> Mandala</a:t>
+            </a:r>
+            <a:endParaRPr lang="en-US" sz="950" dirty="0"/>
+          </a:p>
+        </p:txBody>
+      </p:sp>
+      <p:sp>
+        <p:nvSpPr>
+          <p:cNvPr id="30" name="Text 28"/>
+          <p:cNvSpPr txBox="1"/>
+          <p:nvPr/>
+        </p:nvSpPr>
+        <p:spPr>
+          <a:xfrm>
+            <a:off x="2315886" y="4388272"/>
+            <a:ext cx="1298448" cy="502920"/>
+          </a:xfrm>
+          <a:prstGeom prst="rect">
+            <a:avLst/>
+          </a:prstGeom>
+          <a:noFill/>
+          <a:ln/>
+        </p:spPr>
+        <p:txBody>
+          <a:bodyPr wrap="square" lIns="0" tIns="0" rIns="0" bIns="0" rtlCol="0" anchor="ctr"/>
+          <a:lstStyle/>
+          <a:p>
+            <a:pPr marL="0" indent="0" algn="ctr">
+              <a:buNone/>
+            </a:pPr>
+            <a:r>
+              <a:rPr lang="en-US" sz="900" b="1" dirty="0">
+                <a:solidFill>
+                  <a:srgbClr val="8FD9EC"/>
+                </a:solidFill>
+                <a:latin typeface="Calibri" pitchFamily="34" charset="0"/>
+                <a:ea typeface="Calibri" pitchFamily="34" charset="-122"/>
+                <a:cs typeface="Calibri" pitchFamily="34" charset="-120"/>
+              </a:rPr>
+              <a:t>occhi</a:t>
+            </a:r>
+            <a:endParaRPr lang="en-US" sz="900" dirty="0"/>
+          </a:p>
+          <a:p>
+            <a:pPr marL="0" indent="0" algn="ctr">
+              <a:buNone/>
+            </a:pPr>
+            <a:r>
+              <a:rPr lang="en-US" sz="900" b="1" dirty="0">
+                <a:solidFill>
+                  <a:srgbClr val="8FD9EC"/>
+                </a:solidFill>
+                <a:latin typeface="Calibri" pitchFamily="34" charset="0"/>
+                <a:ea typeface="Calibri" pitchFamily="34" charset="-122"/>
+                <a:cs typeface="Calibri" pitchFamily="34" charset="-120"/>
+              </a:rPr>
+              <a:t>CHIUSI</a:t>
+            </a:r>
+            <a:endParaRPr lang="en-US" sz="900" dirty="0"/>
+          </a:p>
+        </p:txBody>
+      </p:sp>
+      <p:sp>
+        <p:nvSpPr>
+          <p:cNvPr id="31" name="Shape 29"/>
+          <p:cNvSpPr/>
+          <p:nvPr/>
+        </p:nvSpPr>
+        <p:spPr>
+          <a:xfrm>
+            <a:off x="2965110" y="4077376"/>
+            <a:ext cx="0" cy="292608"/>
+          </a:xfrm>
+          <a:prstGeom prst="line">
+            <a:avLst/>
+          </a:prstGeom>
+          <a:noFill/>
+          <a:ln w="15240">
+            <a:solidFill>
+              <a:srgbClr val="8FD9EC"/>
+            </a:solidFill>
+            <a:prstDash val="solid"/>
+            <a:headEnd type="triangle"/>
+          </a:ln>
+        </p:spPr>
+        <p:txBody>
+          <a:bodyPr/>
+          <a:lstStyle/>
+          <a:p>
+            <a:endParaRPr lang="en-IT"/>
+          </a:p>
+        </p:txBody>
+      </p:sp>
+      <p:sp>
+        <p:nvSpPr>
+          <p:cNvPr id="32" name="Text 30"/>
+          <p:cNvSpPr txBox="1"/>
+          <p:nvPr/>
+        </p:nvSpPr>
+        <p:spPr>
+          <a:xfrm>
+            <a:off x="3582329" y="4388272"/>
+            <a:ext cx="1298448" cy="502920"/>
+          </a:xfrm>
+          <a:prstGeom prst="rect">
+            <a:avLst/>
+          </a:prstGeom>
+          <a:noFill/>
+          <a:ln/>
+        </p:spPr>
+        <p:txBody>
+          <a:bodyPr wrap="square" lIns="0" tIns="0" rIns="0" bIns="0" rtlCol="0" anchor="ctr"/>
+          <a:lstStyle/>
+          <a:p>
+            <a:pPr marL="0" indent="0" algn="ctr">
+              <a:buNone/>
+            </a:pPr>
+            <a:r>
+              <a:rPr lang="en-US" sz="900" b="1" dirty="0">
+                <a:solidFill>
+                  <a:srgbClr val="8FD9EC"/>
+                </a:solidFill>
+                <a:latin typeface="Calibri" pitchFamily="34" charset="0"/>
+                <a:ea typeface="Calibri" pitchFamily="34" charset="-122"/>
+                <a:cs typeface="Calibri" pitchFamily="34" charset="-120"/>
+              </a:rPr>
+              <a:t>occhi</a:t>
+            </a:r>
+            <a:endParaRPr lang="en-US" sz="900" dirty="0"/>
+          </a:p>
+          <a:p>
+            <a:pPr marL="0" indent="0" algn="ctr">
+              <a:buNone/>
+            </a:pPr>
+            <a:r>
+              <a:rPr lang="en-US" sz="900" b="1" dirty="0">
+                <a:solidFill>
+                  <a:srgbClr val="8FD9EC"/>
+                </a:solidFill>
+                <a:latin typeface="Calibri" pitchFamily="34" charset="0"/>
+                <a:ea typeface="Calibri" pitchFamily="34" charset="-122"/>
+                <a:cs typeface="Calibri" pitchFamily="34" charset="-120"/>
+              </a:rPr>
+              <a:t>APERTI</a:t>
+            </a:r>
+            <a:endParaRPr lang="en-US" sz="900" dirty="0"/>
+          </a:p>
+        </p:txBody>
+      </p:sp>
+      <p:sp>
+        <p:nvSpPr>
+          <p:cNvPr id="33" name="Shape 31"/>
+          <p:cNvSpPr/>
+          <p:nvPr/>
+        </p:nvSpPr>
+        <p:spPr>
+          <a:xfrm>
+            <a:off x="4231553" y="4077376"/>
+            <a:ext cx="0" cy="292608"/>
+          </a:xfrm>
+          <a:prstGeom prst="line">
+            <a:avLst/>
+          </a:prstGeom>
+          <a:noFill/>
+          <a:ln w="15240">
+            <a:solidFill>
+              <a:srgbClr val="8FD9EC"/>
+            </a:solidFill>
+            <a:prstDash val="solid"/>
+            <a:headEnd type="triangle"/>
+          </a:ln>
+        </p:spPr>
+        <p:txBody>
+          <a:bodyPr/>
+          <a:lstStyle/>
+          <a:p>
+            <a:endParaRPr lang="en-IT"/>
+          </a:p>
+        </p:txBody>
+      </p:sp>
+      <p:sp>
+        <p:nvSpPr>
+          <p:cNvPr id="34" name="Text 32"/>
+          <p:cNvSpPr txBox="1"/>
+          <p:nvPr/>
+        </p:nvSpPr>
+        <p:spPr>
+          <a:xfrm>
+            <a:off x="7402925" y="4388272"/>
+            <a:ext cx="1298448" cy="502920"/>
+          </a:xfrm>
+          <a:prstGeom prst="rect">
+            <a:avLst/>
+          </a:prstGeom>
+          <a:noFill/>
+          <a:ln/>
+        </p:spPr>
+        <p:txBody>
+          <a:bodyPr wrap="square" lIns="0" tIns="0" rIns="0" bIns="0" rtlCol="0" anchor="ctr"/>
+          <a:lstStyle/>
+          <a:p>
+            <a:pPr marL="0" indent="0" algn="ctr">
+              <a:buNone/>
+            </a:pPr>
+            <a:r>
+              <a:rPr lang="en-US" sz="900" b="1" dirty="0">
+                <a:solidFill>
+                  <a:srgbClr val="8FD9EC"/>
+                </a:solidFill>
+                <a:latin typeface="Calibri" pitchFamily="34" charset="0"/>
+                <a:ea typeface="Calibri" pitchFamily="34" charset="-122"/>
+                <a:cs typeface="Calibri" pitchFamily="34" charset="-120"/>
+              </a:rPr>
+              <a:t>occhi</a:t>
+            </a:r>
+            <a:endParaRPr lang="en-US" sz="900" dirty="0"/>
+          </a:p>
+          <a:p>
+            <a:pPr marL="0" indent="0" algn="ctr">
+              <a:buNone/>
+            </a:pPr>
+            <a:r>
+              <a:rPr lang="en-US" sz="900" b="1" dirty="0">
+                <a:solidFill>
+                  <a:srgbClr val="8FD9EC"/>
+                </a:solidFill>
+                <a:latin typeface="Calibri" pitchFamily="34" charset="0"/>
+                <a:ea typeface="Calibri" pitchFamily="34" charset="-122"/>
+                <a:cs typeface="Calibri" pitchFamily="34" charset="-120"/>
+              </a:rPr>
+              <a:t>CHIUSI</a:t>
+            </a:r>
+            <a:endParaRPr lang="en-US" sz="900" dirty="0"/>
+          </a:p>
+        </p:txBody>
+      </p:sp>
+      <p:sp>
+        <p:nvSpPr>
+          <p:cNvPr id="35" name="Shape 33"/>
+          <p:cNvSpPr/>
+          <p:nvPr/>
+        </p:nvSpPr>
+        <p:spPr>
+          <a:xfrm>
+            <a:off x="8052149" y="4077376"/>
+            <a:ext cx="0" cy="292608"/>
+          </a:xfrm>
+          <a:prstGeom prst="line">
+            <a:avLst/>
+          </a:prstGeom>
+          <a:noFill/>
+          <a:ln w="15240">
+            <a:solidFill>
+              <a:srgbClr val="8FD9EC"/>
+            </a:solidFill>
+            <a:prstDash val="solid"/>
+            <a:headEnd type="triangle"/>
+          </a:ln>
+        </p:spPr>
+        <p:txBody>
+          <a:bodyPr/>
+          <a:lstStyle/>
+          <a:p>
+            <a:endParaRPr lang="en-IT"/>
+          </a:p>
+        </p:txBody>
+      </p:sp>
+      <p:sp>
+        <p:nvSpPr>
+          <p:cNvPr id="36" name="Text 34"/>
+          <p:cNvSpPr txBox="1"/>
+          <p:nvPr/>
+        </p:nvSpPr>
+        <p:spPr>
+          <a:xfrm>
+            <a:off x="8669369" y="4388272"/>
+            <a:ext cx="1298448" cy="502920"/>
+          </a:xfrm>
+          <a:prstGeom prst="rect">
+            <a:avLst/>
+          </a:prstGeom>
+          <a:noFill/>
+          <a:ln/>
+        </p:spPr>
+        <p:txBody>
+          <a:bodyPr wrap="square" lIns="0" tIns="0" rIns="0" bIns="0" rtlCol="0" anchor="ctr"/>
+          <a:lstStyle/>
+          <a:p>
+            <a:pPr marL="0" indent="0" algn="ctr">
+              <a:buNone/>
+            </a:pPr>
+            <a:r>
+              <a:rPr lang="en-US" sz="900" b="1" dirty="0">
+                <a:solidFill>
+                  <a:srgbClr val="8FD9EC"/>
+                </a:solidFill>
+                <a:latin typeface="Calibri" pitchFamily="34" charset="0"/>
+                <a:ea typeface="Calibri" pitchFamily="34" charset="-122"/>
+                <a:cs typeface="Calibri" pitchFamily="34" charset="-120"/>
+              </a:rPr>
+              <a:t>occhi</a:t>
+            </a:r>
+            <a:endParaRPr lang="en-US" sz="900" dirty="0"/>
+          </a:p>
+          <a:p>
+            <a:pPr marL="0" indent="0" algn="ctr">
+              <a:buNone/>
+            </a:pPr>
+            <a:r>
+              <a:rPr lang="en-US" sz="900" b="1" dirty="0">
+                <a:solidFill>
+                  <a:srgbClr val="8FD9EC"/>
+                </a:solidFill>
+                <a:latin typeface="Calibri" pitchFamily="34" charset="0"/>
+                <a:ea typeface="Calibri" pitchFamily="34" charset="-122"/>
+                <a:cs typeface="Calibri" pitchFamily="34" charset="-120"/>
+              </a:rPr>
+              <a:t>APERTI</a:t>
+            </a:r>
+            <a:endParaRPr lang="en-US" sz="900" dirty="0"/>
+          </a:p>
+        </p:txBody>
+      </p:sp>
+      <p:sp>
+        <p:nvSpPr>
+          <p:cNvPr id="37" name="Shape 35"/>
+          <p:cNvSpPr/>
+          <p:nvPr/>
+        </p:nvSpPr>
+        <p:spPr>
+          <a:xfrm>
+            <a:off x="9318593" y="4077376"/>
+            <a:ext cx="0" cy="292608"/>
+          </a:xfrm>
+          <a:prstGeom prst="line">
+            <a:avLst/>
+          </a:prstGeom>
+          <a:noFill/>
+          <a:ln w="15240">
+            <a:solidFill>
+              <a:srgbClr val="8FD9EC"/>
+            </a:solidFill>
+            <a:prstDash val="solid"/>
+            <a:headEnd type="triangle"/>
+          </a:ln>
+        </p:spPr>
+        <p:txBody>
+          <a:bodyPr/>
+          <a:lstStyle/>
+          <a:p>
+            <a:endParaRPr lang="en-IT"/>
+          </a:p>
+        </p:txBody>
+      </p:sp>
+      <p:sp>
+        <p:nvSpPr>
+          <p:cNvPr id="38" name="Text 36"/>
+          <p:cNvSpPr txBox="1"/>
+          <p:nvPr/>
+        </p:nvSpPr>
+        <p:spPr>
+          <a:xfrm>
+            <a:off x="10543032" y="4388272"/>
+            <a:ext cx="1298448" cy="502920"/>
+          </a:xfrm>
+          <a:prstGeom prst="rect">
+            <a:avLst/>
+          </a:prstGeom>
+          <a:noFill/>
+          <a:ln/>
+        </p:spPr>
+        <p:txBody>
+          <a:bodyPr wrap="square" lIns="0" tIns="0" rIns="0" bIns="0" rtlCol="0" anchor="ctr"/>
+          <a:lstStyle/>
+          <a:p>
+            <a:pPr marL="0" indent="0" algn="ctr">
+              <a:buNone/>
+            </a:pPr>
+            <a:r>
+              <a:rPr lang="en-US" sz="900" b="1" dirty="0">
+                <a:solidFill>
+                  <a:srgbClr val="E8887F"/>
+                </a:solidFill>
+                <a:latin typeface="Calibri" pitchFamily="34" charset="0"/>
+                <a:ea typeface="Calibri" pitchFamily="34" charset="-122"/>
+                <a:cs typeface="Calibri" pitchFamily="34" charset="-120"/>
+              </a:rPr>
+              <a:t>movimento</a:t>
+            </a:r>
+            <a:endParaRPr lang="en-US" sz="900" dirty="0"/>
+          </a:p>
+          <a:p>
+            <a:pPr marL="0" indent="0" algn="ctr">
+              <a:buNone/>
+            </a:pPr>
+            <a:r>
+              <a:rPr lang="en-US" sz="900" b="1" dirty="0">
+                <a:solidFill>
+                  <a:srgbClr val="E8887F"/>
+                </a:solidFill>
+                <a:latin typeface="Calibri" pitchFamily="34" charset="0"/>
+                <a:ea typeface="Calibri" pitchFamily="34" charset="-122"/>
+                <a:cs typeface="Calibri" pitchFamily="34" charset="-120"/>
+              </a:rPr>
+              <a:t>del volto</a:t>
+            </a:r>
+            <a:endParaRPr lang="en-US" sz="900" dirty="0"/>
+          </a:p>
+        </p:txBody>
+      </p:sp>
+      <p:sp>
+        <p:nvSpPr>
+          <p:cNvPr id="39" name="Shape 37"/>
+          <p:cNvSpPr/>
+          <p:nvPr/>
+        </p:nvSpPr>
+        <p:spPr>
+          <a:xfrm>
+            <a:off x="11192256" y="4077376"/>
+            <a:ext cx="0" cy="292608"/>
+          </a:xfrm>
+          <a:prstGeom prst="line">
+            <a:avLst/>
+          </a:prstGeom>
+          <a:noFill/>
+          <a:ln w="15240">
+            <a:solidFill>
+              <a:srgbClr val="E8887F"/>
+            </a:solidFill>
+            <a:prstDash val="solid"/>
+            <a:headEnd type="triangle"/>
+          </a:ln>
+        </p:spPr>
+        <p:txBody>
+          <a:bodyPr/>
+          <a:lstStyle/>
+          <a:p>
+            <a:endParaRPr lang="en-IT"/>
+          </a:p>
+        </p:txBody>
+      </p:sp>
+      <p:sp>
+        <p:nvSpPr>
+          <p:cNvPr id="40" name="Text 38"/>
+          <p:cNvSpPr txBox="1"/>
+          <p:nvPr/>
+        </p:nvSpPr>
+        <p:spPr>
+          <a:xfrm>
+            <a:off x="91440" y="2568616"/>
+            <a:ext cx="1938528" cy="274320"/>
+          </a:xfrm>
+          <a:prstGeom prst="rect">
+            <a:avLst/>
+          </a:prstGeom>
+          <a:noFill/>
+          <a:ln/>
+        </p:spPr>
+        <p:txBody>
+          <a:bodyPr wrap="square" lIns="0" tIns="0" rIns="0" bIns="0" rtlCol="0" anchor="ctr"/>
+          <a:lstStyle/>
+          <a:p>
+            <a:pPr marL="0" indent="0" algn="ctr">
+              <a:buNone/>
+            </a:pPr>
+            <a:r>
+              <a:rPr lang="en-US" sz="850" i="1" dirty="0">
+                <a:solidFill>
+                  <a:srgbClr val="8A97B0"/>
+                </a:solidFill>
+                <a:latin typeface="Calibri" pitchFamily="34" charset="0"/>
+                <a:ea typeface="Calibri" pitchFamily="34" charset="-122"/>
+                <a:cs typeface="Calibri" pitchFamily="34" charset="-120"/>
+              </a:rPr>
+              <a:t>a tempo</a:t>
+            </a:r>
+            <a:endParaRPr lang="en-US" sz="850" dirty="0"/>
+          </a:p>
+        </p:txBody>
+      </p:sp>
+      <p:sp>
+        <p:nvSpPr>
+          <p:cNvPr id="41" name="Shape 39"/>
+          <p:cNvSpPr/>
+          <p:nvPr/>
+        </p:nvSpPr>
+        <p:spPr>
+          <a:xfrm>
+            <a:off x="1060704" y="2879512"/>
+            <a:ext cx="0" cy="237744"/>
+          </a:xfrm>
+          <a:prstGeom prst="line">
+            <a:avLst/>
+          </a:prstGeom>
+          <a:noFill/>
+          <a:ln w="13970">
+            <a:solidFill>
+              <a:srgbClr val="44507A"/>
+            </a:solidFill>
+            <a:prstDash val="solid"/>
+            <a:tailEnd type="triangle"/>
+          </a:ln>
+        </p:spPr>
+        <p:txBody>
+          <a:bodyPr/>
+          <a:lstStyle/>
+          <a:p>
+            <a:endParaRPr lang="en-IT"/>
+          </a:p>
+        </p:txBody>
+      </p:sp>
+      <p:sp>
+        <p:nvSpPr>
+          <p:cNvPr id="42" name="Text 40"/>
+          <p:cNvSpPr txBox="1"/>
+          <p:nvPr/>
+        </p:nvSpPr>
+        <p:spPr>
+          <a:xfrm>
+            <a:off x="3890772" y="2568616"/>
+            <a:ext cx="1938528" cy="274320"/>
+          </a:xfrm>
+          <a:prstGeom prst="rect">
+            <a:avLst/>
+          </a:prstGeom>
+          <a:noFill/>
+          <a:ln/>
+        </p:spPr>
+        <p:txBody>
+          <a:bodyPr wrap="square" lIns="0" tIns="0" rIns="0" bIns="0" rtlCol="0" anchor="ctr"/>
+          <a:lstStyle/>
+          <a:p>
+            <a:pPr marL="0" indent="0" algn="ctr">
+              <a:buNone/>
+            </a:pPr>
+            <a:r>
+              <a:rPr lang="en-US" sz="850" i="1" dirty="0">
+                <a:solidFill>
+                  <a:srgbClr val="8A97B0"/>
+                </a:solidFill>
+                <a:latin typeface="Calibri" pitchFamily="34" charset="0"/>
+                <a:ea typeface="Calibri" pitchFamily="34" charset="-122"/>
+                <a:cs typeface="Calibri" pitchFamily="34" charset="-120"/>
+              </a:rPr>
+              <a:t>quando Claude risponde</a:t>
+            </a:r>
+            <a:endParaRPr lang="en-US" sz="850" dirty="0"/>
+          </a:p>
+        </p:txBody>
+      </p:sp>
+      <p:sp>
+        <p:nvSpPr>
+          <p:cNvPr id="43" name="Shape 41"/>
+          <p:cNvSpPr/>
+          <p:nvPr/>
+        </p:nvSpPr>
+        <p:spPr>
+          <a:xfrm>
+            <a:off x="4860036" y="2879512"/>
+            <a:ext cx="0" cy="237744"/>
+          </a:xfrm>
+          <a:prstGeom prst="line">
+            <a:avLst/>
+          </a:prstGeom>
+          <a:noFill/>
+          <a:ln w="13970">
+            <a:solidFill>
+              <a:srgbClr val="44507A"/>
+            </a:solidFill>
+            <a:prstDash val="solid"/>
+            <a:tailEnd type="triangle"/>
+          </a:ln>
+        </p:spPr>
+        <p:txBody>
+          <a:bodyPr/>
+          <a:lstStyle/>
+          <a:p>
+            <a:endParaRPr lang="en-IT"/>
+          </a:p>
+        </p:txBody>
+      </p:sp>
+      <p:sp>
+        <p:nvSpPr>
+          <p:cNvPr id="44" name="Text 42"/>
+          <p:cNvSpPr txBox="1"/>
+          <p:nvPr/>
+        </p:nvSpPr>
+        <p:spPr>
+          <a:xfrm>
+            <a:off x="5157216" y="2568616"/>
+            <a:ext cx="1938528" cy="274320"/>
+          </a:xfrm>
+          <a:prstGeom prst="rect">
+            <a:avLst/>
+          </a:prstGeom>
+          <a:noFill/>
+          <a:ln/>
+        </p:spPr>
+        <p:txBody>
+          <a:bodyPr wrap="square" lIns="0" tIns="0" rIns="0" bIns="0" rtlCol="0" anchor="ctr"/>
+          <a:lstStyle/>
+          <a:p>
+            <a:pPr marL="0" indent="0" algn="ctr">
+              <a:buNone/>
+            </a:pPr>
+            <a:r>
+              <a:rPr lang="en-US" sz="850" i="1" dirty="0">
+                <a:solidFill>
+                  <a:srgbClr val="8A97B0"/>
+                </a:solidFill>
+                <a:latin typeface="Calibri" pitchFamily="34" charset="0"/>
+                <a:ea typeface="Calibri" pitchFamily="34" charset="-122"/>
+                <a:cs typeface="Calibri" pitchFamily="34" charset="-120"/>
+              </a:rPr>
+              <a:t>a tempo</a:t>
+            </a:r>
+            <a:endParaRPr lang="en-US" sz="850" dirty="0"/>
+          </a:p>
+        </p:txBody>
+      </p:sp>
+      <p:sp>
+        <p:nvSpPr>
+          <p:cNvPr id="45" name="Shape 43"/>
+          <p:cNvSpPr/>
+          <p:nvPr/>
+        </p:nvSpPr>
+        <p:spPr>
+          <a:xfrm>
+            <a:off x="6126480" y="2879512"/>
+            <a:ext cx="0" cy="237744"/>
+          </a:xfrm>
+          <a:prstGeom prst="line">
+            <a:avLst/>
+          </a:prstGeom>
+          <a:noFill/>
+          <a:ln w="13970">
+            <a:solidFill>
+              <a:srgbClr val="44507A"/>
+            </a:solidFill>
+            <a:prstDash val="solid"/>
+            <a:tailEnd type="triangle"/>
+          </a:ln>
+        </p:spPr>
+        <p:txBody>
+          <a:bodyPr/>
+          <a:lstStyle/>
+          <a:p>
+            <a:endParaRPr lang="en-IT"/>
+          </a:p>
+        </p:txBody>
+      </p:sp>
+      <p:sp>
+        <p:nvSpPr>
+          <p:cNvPr id="46" name="Text 44"/>
+          <p:cNvSpPr txBox="1"/>
+          <p:nvPr/>
+        </p:nvSpPr>
+        <p:spPr>
+          <a:xfrm>
+            <a:off x="8956548" y="2568616"/>
+            <a:ext cx="1938528" cy="274320"/>
+          </a:xfrm>
+          <a:prstGeom prst="rect">
+            <a:avLst/>
+          </a:prstGeom>
+          <a:noFill/>
+          <a:ln/>
+        </p:spPr>
+        <p:txBody>
+          <a:bodyPr wrap="square" lIns="0" tIns="0" rIns="0" bIns="0" rtlCol="0" anchor="ctr"/>
+          <a:lstStyle/>
+          <a:p>
+            <a:pPr marL="0" indent="0" algn="ctr">
+              <a:buNone/>
+            </a:pPr>
+            <a:r>
+              <a:rPr lang="en-US" sz="850" i="1" dirty="0">
+                <a:solidFill>
+                  <a:srgbClr val="8A97B0"/>
+                </a:solidFill>
+                <a:latin typeface="Calibri" pitchFamily="34" charset="0"/>
+                <a:ea typeface="Calibri" pitchFamily="34" charset="-122"/>
+                <a:cs typeface="Calibri" pitchFamily="34" charset="-120"/>
+              </a:rPr>
+              <a:t>a tempo</a:t>
+            </a:r>
+            <a:endParaRPr lang="en-US" sz="850" dirty="0"/>
+          </a:p>
+        </p:txBody>
+      </p:sp>
+      <p:sp>
+        <p:nvSpPr>
+          <p:cNvPr id="47" name="Shape 45"/>
+          <p:cNvSpPr/>
+          <p:nvPr/>
+        </p:nvSpPr>
+        <p:spPr>
+          <a:xfrm>
+            <a:off x="9925812" y="2879512"/>
+            <a:ext cx="0" cy="237744"/>
+          </a:xfrm>
+          <a:prstGeom prst="line">
+            <a:avLst/>
+          </a:prstGeom>
+          <a:noFill/>
+          <a:ln w="13970">
+            <a:solidFill>
+              <a:srgbClr val="44507A"/>
+            </a:solidFill>
+            <a:prstDash val="solid"/>
+            <a:tailEnd type="triangle"/>
+          </a:ln>
+        </p:spPr>
+        <p:txBody>
+          <a:bodyPr/>
+          <a:lstStyle/>
+          <a:p>
+            <a:endParaRPr lang="en-IT"/>
+          </a:p>
+        </p:txBody>
+      </p:sp>
+    </p:spTree>
+  </p:cSld>
+  <p:clrMapOvr>
+    <a:masterClrMapping/>
+  </p:clrMapOvr>
+</p:sld>
+</file>
+
+<file path=ppt/slides/slide12.xml><?xml version="1.0" encoding="utf-8"?>
+<p:sld xmlns:a="http://schemas.openxmlformats.org/drawingml/2006/main" xmlns:r="http://schemas.openxmlformats.org/officeDocument/2006/relationships" xmlns:p="http://schemas.openxmlformats.org/presentationml/2006/main">
+  <p:cSld name="Slide 9">
+    <p:bg>
+      <p:bgPr>
+        <a:solidFill>
+          <a:srgbClr val="0B1026"/>
+        </a:solidFill>
+        <a:effectLst/>
+      </p:bgPr>
+    </p:bg>
+    <p:spTree>
+      <p:nvGrpSpPr>
+        <p:cNvPr id="1" name=""/>
+        <p:cNvGrpSpPr/>
+        <p:nvPr/>
+      </p:nvGrpSpPr>
+      <p:grpSpPr>
+        <a:xfrm>
+          <a:off x="0" y="0"/>
+          <a:ext cx="0" cy="0"/>
+          <a:chOff x="0" y="0"/>
+          <a:chExt cx="0" cy="0"/>
+        </a:xfrm>
+      </p:grpSpPr>
+      <p:sp>
+        <p:nvSpPr>
+          <p:cNvPr id="2" name="Text 0"/>
+          <p:cNvSpPr txBox="1"/>
+          <p:nvPr/>
+        </p:nvSpPr>
+        <p:spPr>
+          <a:xfrm>
+            <a:off x="640080" y="384048"/>
+            <a:ext cx="10058400" cy="274320"/>
+          </a:xfrm>
+          <a:prstGeom prst="rect">
+            <a:avLst/>
+          </a:prstGeom>
+          <a:noFill/>
+          <a:ln/>
+        </p:spPr>
+        <p:txBody>
+          <a:bodyPr wrap="square" rtlCol="0" anchor="ctr"/>
+          <a:lstStyle/>
+          <a:p>
+            <a:pPr marL="0" indent="0">
+              <a:buNone/>
+            </a:pPr>
+            <a:r>
+              <a:rPr lang="en-US" sz="1200" b="1" kern="0" spc="200" dirty="0">
+                <a:solidFill>
+                  <a:srgbClr val="8FD9EC"/>
+                </a:solidFill>
+                <a:latin typeface="Calibri" pitchFamily="34" charset="0"/>
+                <a:ea typeface="Calibri" pitchFamily="34" charset="-122"/>
+                <a:cs typeface="Calibri" pitchFamily="34" charset="-120"/>
+              </a:rPr>
+              <a:t>AZIONE  ·  LE PARTICELLE</a:t>
+            </a:r>
+            <a:endParaRPr lang="en-US" sz="1200" dirty="0"/>
+          </a:p>
+        </p:txBody>
+      </p:sp>
+      <p:sp>
+        <p:nvSpPr>
+          <p:cNvPr id="3" name="Text 1"/>
+          <p:cNvSpPr txBox="1"/>
+          <p:nvPr/>
+        </p:nvSpPr>
+        <p:spPr>
+          <a:xfrm>
+            <a:off x="640080" y="685800"/>
+            <a:ext cx="10881360" cy="777240"/>
+          </a:xfrm>
+          <a:prstGeom prst="rect">
+            <a:avLst/>
+          </a:prstGeom>
+          <a:noFill/>
+          <a:ln/>
+        </p:spPr>
+        <p:txBody>
+          <a:bodyPr wrap="square" rtlCol="0" anchor="ctr"/>
+          <a:lstStyle/>
+          <a:p>
+            <a:pPr marL="0" indent="0">
+              <a:buNone/>
+            </a:pPr>
+            <a:r>
+              <a:rPr lang="en-US" sz="3400" b="1" dirty="0">
+                <a:solidFill>
+                  <a:srgbClr val="E8EEF7"/>
+                </a:solidFill>
+                <a:latin typeface="Cambria" pitchFamily="34" charset="0"/>
+                <a:ea typeface="Cambria" pitchFamily="34" charset="-122"/>
+                <a:cs typeface="Cambria" pitchFamily="34" charset="-120"/>
+              </a:rPr>
+              <a:t>13.664 </a:t>
+            </a:r>
+            <a:r>
+              <a:rPr lang="en-US" sz="3400" b="1" dirty="0" err="1">
+                <a:solidFill>
+                  <a:srgbClr val="E8EEF7"/>
+                </a:solidFill>
+                <a:latin typeface="Cambria" pitchFamily="34" charset="0"/>
+                <a:ea typeface="Cambria" pitchFamily="34" charset="-122"/>
+                <a:cs typeface="Cambria" pitchFamily="34" charset="-120"/>
+              </a:rPr>
+              <a:t>particelle</a:t>
+            </a:r>
+            <a:r>
+              <a:rPr lang="en-US" sz="3400" b="1" dirty="0">
+                <a:solidFill>
+                  <a:srgbClr val="E8EEF7"/>
+                </a:solidFill>
+                <a:latin typeface="Cambria" pitchFamily="34" charset="0"/>
+                <a:ea typeface="Cambria" pitchFamily="34" charset="-122"/>
+                <a:cs typeface="Cambria" pitchFamily="34" charset="-120"/>
+              </a:rPr>
+              <a:t> </a:t>
+            </a:r>
+            <a:r>
+              <a:rPr lang="en-US" sz="3400" b="1" dirty="0" err="1">
+                <a:solidFill>
+                  <a:srgbClr val="E8EEF7"/>
+                </a:solidFill>
+                <a:latin typeface="Cambria" pitchFamily="34" charset="0"/>
+                <a:ea typeface="Cambria" pitchFamily="34" charset="-122"/>
+                <a:cs typeface="Cambria" pitchFamily="34" charset="-120"/>
+              </a:rPr>
+              <a:t>reattive</a:t>
+            </a:r>
+            <a:endParaRPr lang="en-US" sz="3400" dirty="0"/>
+          </a:p>
+        </p:txBody>
+      </p:sp>
+      <p:sp>
+        <p:nvSpPr>
+          <p:cNvPr id="4" name="Text 2"/>
+          <p:cNvSpPr txBox="1"/>
+          <p:nvPr/>
+        </p:nvSpPr>
+        <p:spPr>
+          <a:xfrm>
+            <a:off x="640080" y="1782089"/>
+            <a:ext cx="10881360" cy="411480"/>
+          </a:xfrm>
+          <a:prstGeom prst="rect">
+            <a:avLst/>
+          </a:prstGeom>
+          <a:noFill/>
+          <a:ln/>
+        </p:spPr>
+        <p:txBody>
+          <a:bodyPr wrap="square" rtlCol="0" anchor="ctr"/>
+          <a:lstStyle/>
+          <a:p>
+            <a:pPr marL="0" indent="0">
+              <a:buNone/>
+            </a:pPr>
+            <a:r>
+              <a:rPr lang="en-US" sz="1250" i="1" dirty="0">
+                <a:solidFill>
+                  <a:srgbClr val="8FD9EC"/>
+                </a:solidFill>
+                <a:latin typeface="Calibri" pitchFamily="34" charset="0"/>
+                <a:ea typeface="Calibri" pitchFamily="34" charset="-122"/>
+                <a:cs typeface="Calibri" pitchFamily="34" charset="-120"/>
+              </a:rPr>
+              <a:t>“A particle system is a collection of many many minute particles that together represent a fuzzy object.”</a:t>
+            </a:r>
+            <a:r>
+              <a:rPr lang="en-US" sz="1250" dirty="0">
+                <a:solidFill>
+                  <a:srgbClr val="8A97B0"/>
+                </a:solidFill>
+                <a:latin typeface="Calibri" pitchFamily="34" charset="0"/>
+                <a:ea typeface="Calibri" pitchFamily="34" charset="-122"/>
+                <a:cs typeface="Calibri" pitchFamily="34" charset="-120"/>
+              </a:rPr>
+              <a:t>   —  W. T. Reeves, Lucasfilm, 1982</a:t>
+            </a:r>
+            <a:endParaRPr lang="en-US" sz="1250" dirty="0"/>
+          </a:p>
+        </p:txBody>
+      </p:sp>
+      <p:pic>
+        <p:nvPicPr>
+          <p:cNvPr id="5" name="Image 0" descr="/tmp/ppt/p_seek.png"/>
+          <p:cNvPicPr>
+            <a:picLocks noChangeAspect="1"/>
+          </p:cNvPicPr>
+          <p:nvPr/>
+        </p:nvPicPr>
+        <p:blipFill>
+          <a:blip r:embed="rId3"/>
+          <a:stretch>
+            <a:fillRect/>
+          </a:stretch>
+        </p:blipFill>
+        <p:spPr>
+          <a:xfrm>
+            <a:off x="886968" y="2503476"/>
+            <a:ext cx="2743200" cy="2212848"/>
+          </a:xfrm>
+          <a:prstGeom prst="rect">
+            <a:avLst/>
+          </a:prstGeom>
+        </p:spPr>
+      </p:pic>
+      <p:sp>
+        <p:nvSpPr>
+          <p:cNvPr id="6" name="Text 3"/>
+          <p:cNvSpPr txBox="1"/>
+          <p:nvPr/>
+        </p:nvSpPr>
+        <p:spPr>
+          <a:xfrm>
+            <a:off x="502920" y="4789476"/>
+            <a:ext cx="3502152" cy="329184"/>
+          </a:xfrm>
+          <a:prstGeom prst="rect">
+            <a:avLst/>
+          </a:prstGeom>
+          <a:noFill/>
+          <a:ln/>
+        </p:spPr>
+        <p:txBody>
+          <a:bodyPr wrap="square" lIns="0" tIns="0" rIns="0" bIns="0" rtlCol="0" anchor="ctr"/>
+          <a:lstStyle/>
+          <a:p>
+            <a:pPr marL="0" indent="0" algn="ctr">
+              <a:buNone/>
+            </a:pPr>
+            <a:r>
+              <a:rPr lang="en-US" sz="1400" b="1" dirty="0">
+                <a:solidFill>
+                  <a:srgbClr val="8FD9EC"/>
+                </a:solidFill>
+                <a:latin typeface="Calibri" pitchFamily="34" charset="0"/>
+                <a:ea typeface="Calibri" pitchFamily="34" charset="-122"/>
+                <a:cs typeface="Calibri" pitchFamily="34" charset="-120"/>
+              </a:rPr>
+              <a:t>SEEK</a:t>
+            </a:r>
+            <a:endParaRPr lang="en-US" sz="1400" dirty="0"/>
+          </a:p>
+        </p:txBody>
+      </p:sp>
+      <p:sp>
+        <p:nvSpPr>
+          <p:cNvPr id="7" name="Text 4"/>
+          <p:cNvSpPr txBox="1"/>
+          <p:nvPr/>
+        </p:nvSpPr>
+        <p:spPr>
+          <a:xfrm>
+            <a:off x="640080" y="5173524"/>
+            <a:ext cx="3227832" cy="914400"/>
+          </a:xfrm>
+          <a:prstGeom prst="rect">
+            <a:avLst/>
+          </a:prstGeom>
+          <a:noFill/>
+          <a:ln/>
+        </p:spPr>
+        <p:txBody>
+          <a:bodyPr wrap="square" lIns="0" tIns="0" rIns="0" bIns="0" rtlCol="0" anchor="ctr"/>
+          <a:lstStyle/>
+          <a:p>
+            <a:pPr marL="0" indent="0" algn="ctr">
+              <a:lnSpc>
+                <a:spcPct val="115000"/>
+              </a:lnSpc>
+              <a:buNone/>
+            </a:pPr>
+            <a:r>
+              <a:rPr lang="en-US" sz="1100" dirty="0">
+                <a:solidFill>
+                  <a:srgbClr val="E8EEF7"/>
+                </a:solidFill>
+                <a:latin typeface="Calibri" pitchFamily="34" charset="0"/>
+                <a:ea typeface="Calibri" pitchFamily="34" charset="-122"/>
+                <a:cs typeface="Calibri" pitchFamily="34" charset="-120"/>
+              </a:rPr>
+              <a:t>Ognuna insegue il suo posto con la propria inerzia: confronta dov'è con dove vorrebbe essere e applica una forza.</a:t>
+            </a:r>
+            <a:endParaRPr lang="en-US" sz="1100" dirty="0"/>
+          </a:p>
+        </p:txBody>
+      </p:sp>
+      <p:pic>
+        <p:nvPicPr>
+          <p:cNvPr id="8" name="Image 1" descr="/tmp/ppt/p_repulsione.png"/>
+          <p:cNvPicPr>
+            <a:picLocks noChangeAspect="1"/>
+          </p:cNvPicPr>
+          <p:nvPr/>
+        </p:nvPicPr>
+        <p:blipFill>
+          <a:blip r:embed="rId4"/>
+          <a:stretch>
+            <a:fillRect/>
+          </a:stretch>
+        </p:blipFill>
+        <p:spPr>
+          <a:xfrm>
+            <a:off x="4663440" y="2503476"/>
+            <a:ext cx="2743200" cy="2212848"/>
+          </a:xfrm>
+          <a:prstGeom prst="rect">
+            <a:avLst/>
+          </a:prstGeom>
+        </p:spPr>
+      </p:pic>
+      <p:sp>
+        <p:nvSpPr>
+          <p:cNvPr id="9" name="Text 5"/>
+          <p:cNvSpPr txBox="1"/>
+          <p:nvPr/>
+        </p:nvSpPr>
+        <p:spPr>
+          <a:xfrm>
+            <a:off x="4279392" y="4789476"/>
+            <a:ext cx="3502152" cy="329184"/>
+          </a:xfrm>
+          <a:prstGeom prst="rect">
+            <a:avLst/>
+          </a:prstGeom>
+          <a:noFill/>
+          <a:ln/>
+        </p:spPr>
+        <p:txBody>
+          <a:bodyPr wrap="square" lIns="0" tIns="0" rIns="0" bIns="0" rtlCol="0" anchor="ctr"/>
+          <a:lstStyle/>
+          <a:p>
+            <a:pPr marL="0" indent="0" algn="ctr">
+              <a:buNone/>
+            </a:pPr>
+            <a:r>
+              <a:rPr lang="en-US" sz="1400" b="1" dirty="0">
+                <a:solidFill>
+                  <a:srgbClr val="E8887F"/>
+                </a:solidFill>
+                <a:latin typeface="Calibri" pitchFamily="34" charset="0"/>
+                <a:ea typeface="Calibri" pitchFamily="34" charset="-122"/>
+                <a:cs typeface="Calibri" pitchFamily="34" charset="-120"/>
+              </a:rPr>
+              <a:t>REPULSIONE</a:t>
+            </a:r>
+            <a:endParaRPr lang="en-US" sz="1400" dirty="0"/>
+          </a:p>
+        </p:txBody>
+      </p:sp>
+      <p:sp>
+        <p:nvSpPr>
+          <p:cNvPr id="10" name="Text 6"/>
+          <p:cNvSpPr txBox="1"/>
+          <p:nvPr/>
+        </p:nvSpPr>
+        <p:spPr>
+          <a:xfrm>
+            <a:off x="4416552" y="5173524"/>
+            <a:ext cx="3227832" cy="914400"/>
+          </a:xfrm>
+          <a:prstGeom prst="rect">
+            <a:avLst/>
+          </a:prstGeom>
+          <a:noFill/>
+          <a:ln/>
+        </p:spPr>
+        <p:txBody>
+          <a:bodyPr wrap="square" lIns="0" tIns="0" rIns="0" bIns="0" rtlCol="0" anchor="ctr"/>
+          <a:lstStyle/>
+          <a:p>
+            <a:pPr marL="0" indent="0" algn="ctr">
+              <a:lnSpc>
+                <a:spcPct val="115000"/>
+              </a:lnSpc>
+              <a:buNone/>
+            </a:pPr>
+            <a:r>
+              <a:rPr lang="en-US" sz="1100" dirty="0">
+                <a:solidFill>
+                  <a:srgbClr val="E8EEF7"/>
+                </a:solidFill>
+                <a:latin typeface="Calibri" pitchFamily="34" charset="0"/>
+                <a:ea typeface="Calibri" pitchFamily="34" charset="-122"/>
+                <a:cs typeface="Calibri" pitchFamily="34" charset="-120"/>
+              </a:rPr>
+              <a:t>Il naso respinge ciò che gli passa vicino. La spinta cala col quadrato della distanza e si annulla sul bordo del raggio.</a:t>
+            </a:r>
+            <a:endParaRPr lang="en-US" sz="1100" dirty="0"/>
+          </a:p>
+        </p:txBody>
+      </p:sp>
+      <p:pic>
+        <p:nvPicPr>
+          <p:cNvPr id="11" name="Image 2" descr="/tmp/ppt/p_swarm.png"/>
+          <p:cNvPicPr>
+            <a:picLocks noChangeAspect="1"/>
+          </p:cNvPicPr>
+          <p:nvPr/>
+        </p:nvPicPr>
+        <p:blipFill>
+          <a:blip r:embed="rId5"/>
+          <a:stretch>
+            <a:fillRect/>
+          </a:stretch>
+        </p:blipFill>
+        <p:spPr>
+          <a:xfrm>
+            <a:off x="8439912" y="2503476"/>
+            <a:ext cx="2743200" cy="2212848"/>
+          </a:xfrm>
+          <a:prstGeom prst="rect">
+            <a:avLst/>
+          </a:prstGeom>
+        </p:spPr>
+      </p:pic>
+      <p:sp>
+        <p:nvSpPr>
+          <p:cNvPr id="12" name="Text 7"/>
+          <p:cNvSpPr txBox="1"/>
+          <p:nvPr/>
+        </p:nvSpPr>
+        <p:spPr>
+          <a:xfrm>
+            <a:off x="8055864" y="4789476"/>
+            <a:ext cx="3502152" cy="329184"/>
+          </a:xfrm>
+          <a:prstGeom prst="rect">
+            <a:avLst/>
+          </a:prstGeom>
+          <a:noFill/>
+          <a:ln/>
+        </p:spPr>
+        <p:txBody>
+          <a:bodyPr wrap="square" lIns="0" tIns="0" rIns="0" bIns="0" rtlCol="0" anchor="ctr"/>
+          <a:lstStyle/>
+          <a:p>
+            <a:pPr marL="0" indent="0" algn="ctr">
+              <a:buNone/>
+            </a:pPr>
+            <a:r>
+              <a:rPr lang="en-US" sz="1400" b="1" dirty="0">
+                <a:solidFill>
+                  <a:srgbClr val="5A7FB8"/>
+                </a:solidFill>
+                <a:latin typeface="Calibri" pitchFamily="34" charset="0"/>
+                <a:ea typeface="Calibri" pitchFamily="34" charset="-122"/>
+                <a:cs typeface="Calibri" pitchFamily="34" charset="-120"/>
+              </a:rPr>
+              <a:t>SWARM</a:t>
+            </a:r>
+            <a:endParaRPr lang="en-US" sz="1400" dirty="0"/>
+          </a:p>
+        </p:txBody>
+      </p:sp>
+      <p:sp>
+        <p:nvSpPr>
+          <p:cNvPr id="13" name="Text 8"/>
+          <p:cNvSpPr txBox="1"/>
+          <p:nvPr/>
+        </p:nvSpPr>
+        <p:spPr>
+          <a:xfrm>
+            <a:off x="8193024" y="5173524"/>
+            <a:ext cx="3227832" cy="914400"/>
+          </a:xfrm>
+          <a:prstGeom prst="rect">
+            <a:avLst/>
+          </a:prstGeom>
+          <a:noFill/>
+          <a:ln/>
+        </p:spPr>
+        <p:txBody>
+          <a:bodyPr wrap="square" lIns="0" tIns="0" rIns="0" bIns="0" rtlCol="0" anchor="ctr"/>
+          <a:lstStyle/>
+          <a:p>
+            <a:pPr marL="0" indent="0" algn="ctr">
+              <a:lnSpc>
+                <a:spcPct val="115000"/>
+              </a:lnSpc>
+              <a:buNone/>
+            </a:pPr>
+            <a:r>
+              <a:rPr lang="en-US" sz="1100" dirty="0">
+                <a:solidFill>
+                  <a:srgbClr val="E8EEF7"/>
+                </a:solidFill>
+                <a:latin typeface="Calibri" pitchFamily="34" charset="0"/>
+                <a:ea typeface="Calibri" pitchFamily="34" charset="-122"/>
+                <a:cs typeface="Calibri" pitchFamily="34" charset="-120"/>
+              </a:rPr>
+              <a:t>Nessuna interazione fra particelle: la forma emerge </a:t>
+            </a:r>
+            <a:r>
+              <a:rPr lang="en-US" sz="1100" dirty="0" err="1">
+                <a:solidFill>
+                  <a:srgbClr val="E8EEF7"/>
+                </a:solidFill>
+                <a:latin typeface="Calibri" pitchFamily="34" charset="0"/>
+                <a:ea typeface="Calibri" pitchFamily="34" charset="-122"/>
+                <a:cs typeface="Calibri" pitchFamily="34" charset="-120"/>
+              </a:rPr>
+              <a:t>dalla</a:t>
+            </a:r>
+            <a:r>
+              <a:rPr lang="en-US" sz="1100" dirty="0">
+                <a:solidFill>
+                  <a:srgbClr val="E8EEF7"/>
+                </a:solidFill>
+                <a:latin typeface="Calibri" pitchFamily="34" charset="0"/>
+                <a:ea typeface="Calibri" pitchFamily="34" charset="-122"/>
+                <a:cs typeface="Calibri" pitchFamily="34" charset="-120"/>
+              </a:rPr>
+              <a:t> somma di </a:t>
+            </a:r>
+            <a:r>
+              <a:rPr lang="en-US" sz="1100" dirty="0" err="1">
+                <a:solidFill>
+                  <a:srgbClr val="E8EEF7"/>
+                </a:solidFill>
+                <a:latin typeface="Calibri" pitchFamily="34" charset="0"/>
+                <a:ea typeface="Calibri" pitchFamily="34" charset="-122"/>
+                <a:cs typeface="Calibri" pitchFamily="34" charset="-120"/>
+              </a:rPr>
+              <a:t>queste</a:t>
+            </a:r>
+            <a:r>
+              <a:rPr lang="en-US" sz="1100" dirty="0">
+                <a:solidFill>
+                  <a:srgbClr val="E8EEF7"/>
+                </a:solidFill>
+                <a:latin typeface="Calibri" pitchFamily="34" charset="0"/>
+                <a:ea typeface="Calibri" pitchFamily="34" charset="-122"/>
+                <a:cs typeface="Calibri" pitchFamily="34" charset="-120"/>
+              </a:rPr>
+              <a:t>.</a:t>
+            </a:r>
+            <a:endParaRPr lang="en-US" sz="1100" dirty="0"/>
+          </a:p>
+        </p:txBody>
+      </p:sp>
+    </p:spTree>
+  </p:cSld>
+  <p:clrMapOvr>
+    <a:masterClrMapping/>
+  </p:clrMapOvr>
+</p:sld>
+</file>
+
+<file path=ppt/slides/slide13.xml><?xml version="1.0" encoding="utf-8"?>
+<p:sld xmlns:a="http://schemas.openxmlformats.org/drawingml/2006/main" xmlns:r="http://schemas.openxmlformats.org/officeDocument/2006/relationships" xmlns:p="http://schemas.openxmlformats.org/presentationml/2006/main">
   <p:cSld name="Slide 1">
     <p:bg>
       <p:bgPr>
@@ -3204,7 +6489,7 @@
 </p:sld>
 </file>
 
-<file path=ppt/slides/slide11.xml><?xml version="1.0" encoding="utf-8"?>
+<file path=ppt/slides/slide14.xml><?xml version="1.0" encoding="utf-8"?>
 <p:sld xmlns:a="http://schemas.openxmlformats.org/drawingml/2006/main" xmlns:r="http://schemas.openxmlformats.org/officeDocument/2006/relationships" xmlns:p="http://schemas.openxmlformats.org/presentationml/2006/main">
   <p:cSld name="Slide 2">
     <p:bg>
@@ -4438,7 +7723,7 @@
 </p:sld>
 </file>
 
-<file path=ppt/slides/slide12.xml><?xml version="1.0" encoding="utf-8"?>
+<file path=ppt/slides/slide15.xml><?xml version="1.0" encoding="utf-8"?>
 <p:sld xmlns:a="http://schemas.openxmlformats.org/drawingml/2006/main" xmlns:r="http://schemas.openxmlformats.org/officeDocument/2006/relationships" xmlns:p="http://schemas.openxmlformats.org/presentationml/2006/main">
   <p:cSld name="Slide 12">
     <p:bg>
@@ -5122,7 +8407,7 @@
 </p:sld>
 </file>
 
-<file path=ppt/slides/slide13.xml><?xml version="1.0" encoding="utf-8"?>
+<file path=ppt/slides/slide16.xml><?xml version="1.0" encoding="utf-8"?>
 <p:sld xmlns:a="http://schemas.openxmlformats.org/drawingml/2006/main" xmlns:r="http://schemas.openxmlformats.org/officeDocument/2006/relationships" xmlns:p="http://schemas.openxmlformats.org/presentationml/2006/main">
   <p:cSld name="Slide 13">
     <p:bg>
@@ -5860,7 +9145,7 @@
 </p:sld>
 </file>
 
-<file path=ppt/slides/slide14.xml><?xml version="1.0" encoding="utf-8"?>
+<file path=ppt/slides/slide17.xml><?xml version="1.0" encoding="utf-8"?>
 <p:sld xmlns:a="http://schemas.openxmlformats.org/drawingml/2006/main" xmlns:r="http://schemas.openxmlformats.org/officeDocument/2006/relationships" xmlns:p="http://schemas.openxmlformats.org/presentationml/2006/main">
   <p:cSld name="Slide 14">
     <p:bg>
@@ -6506,6 +9791,567 @@
 
 <file path=ppt/slides/slide2.xml><?xml version="1.0" encoding="utf-8"?>
 <p:sld xmlns:a="http://schemas.openxmlformats.org/drawingml/2006/main" xmlns:r="http://schemas.openxmlformats.org/officeDocument/2006/relationships" xmlns:p="http://schemas.openxmlformats.org/presentationml/2006/main">
+  <p:cSld name="Slide 1">
+    <p:bg>
+      <p:bgPr>
+        <a:solidFill>
+          <a:srgbClr val="0B1026"/>
+        </a:solidFill>
+        <a:effectLst/>
+      </p:bgPr>
+    </p:bg>
+    <p:spTree>
+      <p:nvGrpSpPr>
+        <p:cNvPr id="1" name=""/>
+        <p:cNvGrpSpPr/>
+        <p:nvPr/>
+      </p:nvGrpSpPr>
+      <p:grpSpPr>
+        <a:xfrm>
+          <a:off x="0" y="0"/>
+          <a:ext cx="0" cy="0"/>
+          <a:chOff x="0" y="0"/>
+          <a:chExt cx="0" cy="0"/>
+        </a:xfrm>
+      </p:grpSpPr>
+      <p:sp>
+        <p:nvSpPr>
+          <p:cNvPr id="2" name="Text 0"/>
+          <p:cNvSpPr txBox="1"/>
+          <p:nvPr/>
+        </p:nvSpPr>
+        <p:spPr>
+          <a:xfrm>
+            <a:off x="640080" y="384048"/>
+            <a:ext cx="10058400" cy="274320"/>
+          </a:xfrm>
+          <a:prstGeom prst="rect">
+            <a:avLst/>
+          </a:prstGeom>
+          <a:noFill/>
+          <a:ln/>
+        </p:spPr>
+        <p:txBody>
+          <a:bodyPr wrap="square" rtlCol="0" anchor="ctr"/>
+          <a:lstStyle/>
+          <a:p>
+            <a:pPr marL="0" indent="0">
+              <a:buNone/>
+            </a:pPr>
+            <a:r>
+              <a:rPr lang="en-US" sz="1200" b="1" kern="0" spc="200" dirty="0">
+                <a:solidFill>
+                  <a:srgbClr val="8FD9EC"/>
+                </a:solidFill>
+                <a:latin typeface="Calibri" pitchFamily="34" charset="0"/>
+                <a:ea typeface="Calibri" pitchFamily="34" charset="-122"/>
+                <a:cs typeface="Calibri" pitchFamily="34" charset="-120"/>
+              </a:rPr>
+              <a:t>CONTESTO</a:t>
+            </a:r>
+            <a:endParaRPr lang="en-US" sz="1200" dirty="0"/>
+          </a:p>
+        </p:txBody>
+      </p:sp>
+      <p:sp>
+        <p:nvSpPr>
+          <p:cNvPr id="3" name="Text 1"/>
+          <p:cNvSpPr txBox="1"/>
+          <p:nvPr/>
+        </p:nvSpPr>
+        <p:spPr>
+          <a:xfrm>
+            <a:off x="640080" y="685800"/>
+            <a:ext cx="10881360" cy="777240"/>
+          </a:xfrm>
+          <a:prstGeom prst="rect">
+            <a:avLst/>
+          </a:prstGeom>
+          <a:noFill/>
+          <a:ln/>
+        </p:spPr>
+        <p:txBody>
+          <a:bodyPr wrap="square" rtlCol="0" anchor="ctr"/>
+          <a:lstStyle/>
+          <a:p>
+            <a:pPr marL="0" indent="0">
+              <a:buNone/>
+            </a:pPr>
+            <a:r>
+              <a:rPr lang="en-US" sz="3400" b="1" dirty="0">
+                <a:solidFill>
+                  <a:srgbClr val="E8EEF7"/>
+                </a:solidFill>
+                <a:latin typeface="Cambria" pitchFamily="34" charset="0"/>
+                <a:ea typeface="Cambria" pitchFamily="34" charset="-122"/>
+                <a:cs typeface="Cambria" pitchFamily="34" charset="-120"/>
+              </a:rPr>
+              <a:t>Tre mondi che non si sono ancora incontrati</a:t>
+            </a:r>
+            <a:endParaRPr lang="en-US" sz="3400" dirty="0"/>
+          </a:p>
+        </p:txBody>
+      </p:sp>
+      <p:sp>
+        <p:nvSpPr>
+          <p:cNvPr id="4" name="Shape 2"/>
+          <p:cNvSpPr/>
+          <p:nvPr/>
+        </p:nvSpPr>
+        <p:spPr>
+          <a:xfrm>
+            <a:off x="640080" y="1783080"/>
+            <a:ext cx="3520440" cy="2514600"/>
+          </a:xfrm>
+          <a:prstGeom prst="roundRect">
+            <a:avLst>
+              <a:gd name="adj" fmla="val 1818"/>
+            </a:avLst>
+          </a:prstGeom>
+          <a:solidFill>
+            <a:srgbClr val="141B33"/>
+          </a:solidFill>
+          <a:ln w="19050">
+            <a:solidFill>
+              <a:srgbClr val="5A7FB8"/>
+            </a:solidFill>
+            <a:prstDash val="solid"/>
+          </a:ln>
+        </p:spPr>
+        <p:txBody>
+          <a:bodyPr/>
+          <a:lstStyle/>
+          <a:p>
+            <a:endParaRPr lang="en-IT"/>
+          </a:p>
+        </p:txBody>
+      </p:sp>
+      <p:sp>
+        <p:nvSpPr>
+          <p:cNvPr id="5" name="Text 3"/>
+          <p:cNvSpPr txBox="1"/>
+          <p:nvPr/>
+        </p:nvSpPr>
+        <p:spPr>
+          <a:xfrm>
+            <a:off x="896112" y="1993392"/>
+            <a:ext cx="3017520" cy="320040"/>
+          </a:xfrm>
+          <a:prstGeom prst="rect">
+            <a:avLst/>
+          </a:prstGeom>
+          <a:noFill/>
+          <a:ln/>
+        </p:spPr>
+        <p:txBody>
+          <a:bodyPr wrap="square" rtlCol="0" anchor="ctr"/>
+          <a:lstStyle/>
+          <a:p>
+            <a:pPr marL="0" indent="0">
+              <a:buNone/>
+            </a:pPr>
+            <a:r>
+              <a:rPr lang="en-US" sz="1400" b="1" dirty="0">
+                <a:solidFill>
+                  <a:srgbClr val="5A7FB8"/>
+                </a:solidFill>
+                <a:latin typeface="Calibri" pitchFamily="34" charset="0"/>
+                <a:ea typeface="Calibri" pitchFamily="34" charset="-122"/>
+                <a:cs typeface="Calibri" pitchFamily="34" charset="-120"/>
+              </a:rPr>
+              <a:t>La meditazione guidata</a:t>
+            </a:r>
+            <a:endParaRPr lang="en-US" sz="1400" dirty="0"/>
+          </a:p>
+        </p:txBody>
+      </p:sp>
+      <p:sp>
+        <p:nvSpPr>
+          <p:cNvPr id="6" name="Text 4"/>
+          <p:cNvSpPr txBox="1"/>
+          <p:nvPr/>
+        </p:nvSpPr>
+        <p:spPr>
+          <a:xfrm>
+            <a:off x="896112" y="2450592"/>
+            <a:ext cx="3017520" cy="1645920"/>
+          </a:xfrm>
+          <a:prstGeom prst="rect">
+            <a:avLst/>
+          </a:prstGeom>
+          <a:noFill/>
+          <a:ln/>
+        </p:spPr>
+        <p:txBody>
+          <a:bodyPr wrap="square" rtlCol="0" anchor="ctr"/>
+          <a:lstStyle/>
+          <a:p>
+            <a:pPr marL="0" indent="0">
+              <a:lnSpc>
+                <a:spcPct val="125000"/>
+              </a:lnSpc>
+              <a:buNone/>
+            </a:pPr>
+            <a:r>
+              <a:rPr lang="en-US" sz="1150" dirty="0">
+                <a:solidFill>
+                  <a:srgbClr val="E8EEF7"/>
+                </a:solidFill>
+                <a:latin typeface="Calibri" pitchFamily="34" charset="0"/>
+                <a:ea typeface="Calibri" pitchFamily="34" charset="-122"/>
+                <a:cs typeface="Calibri" pitchFamily="34" charset="-120"/>
+              </a:rPr>
+              <a:t>È diventata un prodotto di massa: contenuto registrato una volta e distribuito identico a milioni di persone. Scala benissimo — e non sa nulla di chi ha davanti.</a:t>
+            </a:r>
+            <a:endParaRPr lang="en-US" sz="1150" dirty="0"/>
+          </a:p>
+        </p:txBody>
+      </p:sp>
+      <p:sp>
+        <p:nvSpPr>
+          <p:cNvPr id="7" name="Shape 5"/>
+          <p:cNvSpPr/>
+          <p:nvPr/>
+        </p:nvSpPr>
+        <p:spPr>
+          <a:xfrm>
+            <a:off x="4325112" y="1783080"/>
+            <a:ext cx="3520440" cy="2514600"/>
+          </a:xfrm>
+          <a:prstGeom prst="roundRect">
+            <a:avLst>
+              <a:gd name="adj" fmla="val 1818"/>
+            </a:avLst>
+          </a:prstGeom>
+          <a:solidFill>
+            <a:srgbClr val="141B33"/>
+          </a:solidFill>
+          <a:ln w="19050">
+            <a:solidFill>
+              <a:srgbClr val="C9A0DC"/>
+            </a:solidFill>
+            <a:prstDash val="solid"/>
+          </a:ln>
+        </p:spPr>
+        <p:txBody>
+          <a:bodyPr/>
+          <a:lstStyle/>
+          <a:p>
+            <a:endParaRPr lang="en-IT"/>
+          </a:p>
+        </p:txBody>
+      </p:sp>
+      <p:sp>
+        <p:nvSpPr>
+          <p:cNvPr id="8" name="Text 6"/>
+          <p:cNvSpPr txBox="1"/>
+          <p:nvPr/>
+        </p:nvSpPr>
+        <p:spPr>
+          <a:xfrm>
+            <a:off x="4581144" y="1993392"/>
+            <a:ext cx="3017520" cy="320040"/>
+          </a:xfrm>
+          <a:prstGeom prst="rect">
+            <a:avLst/>
+          </a:prstGeom>
+          <a:noFill/>
+          <a:ln/>
+        </p:spPr>
+        <p:txBody>
+          <a:bodyPr wrap="square" rtlCol="0" anchor="ctr"/>
+          <a:lstStyle/>
+          <a:p>
+            <a:pPr marL="0" indent="0">
+              <a:buNone/>
+            </a:pPr>
+            <a:r>
+              <a:rPr lang="en-US" sz="1400" b="1" dirty="0">
+                <a:solidFill>
+                  <a:srgbClr val="C9A0DC"/>
+                </a:solidFill>
+                <a:latin typeface="Calibri" pitchFamily="34" charset="0"/>
+                <a:ea typeface="Calibri" pitchFamily="34" charset="-122"/>
+                <a:cs typeface="Calibri" pitchFamily="34" charset="-120"/>
+              </a:rPr>
+              <a:t>L'arte interattiva</a:t>
+            </a:r>
+            <a:endParaRPr lang="en-US" sz="1400" dirty="0"/>
+          </a:p>
+        </p:txBody>
+      </p:sp>
+      <p:sp>
+        <p:nvSpPr>
+          <p:cNvPr id="9" name="Text 7"/>
+          <p:cNvSpPr txBox="1"/>
+          <p:nvPr/>
+        </p:nvSpPr>
+        <p:spPr>
+          <a:xfrm>
+            <a:off x="4581144" y="2450592"/>
+            <a:ext cx="3017520" cy="1645920"/>
+          </a:xfrm>
+          <a:prstGeom prst="rect">
+            <a:avLst/>
+          </a:prstGeom>
+          <a:noFill/>
+          <a:ln/>
+        </p:spPr>
+        <p:txBody>
+          <a:bodyPr wrap="square" rtlCol="0" anchor="ctr"/>
+          <a:lstStyle/>
+          <a:p>
+            <a:pPr marL="0" indent="0">
+              <a:lnSpc>
+                <a:spcPct val="125000"/>
+              </a:lnSpc>
+              <a:buNone/>
+            </a:pPr>
+            <a:r>
+              <a:rPr lang="en-US" sz="1150" dirty="0">
+                <a:solidFill>
+                  <a:srgbClr val="E8EEF7"/>
+                </a:solidFill>
+                <a:latin typeface="Calibri" pitchFamily="34" charset="0"/>
+                <a:ea typeface="Calibri" pitchFamily="34" charset="-122"/>
+                <a:cs typeface="Calibri" pitchFamily="34" charset="-120"/>
+              </a:rPr>
+              <a:t>Lavora sul corpo da decenni: ambienti che rispondono al respiro, alla presenza, al battito. Reagiscono a come stai, non a che cosa ti pesa.</a:t>
+            </a:r>
+            <a:endParaRPr lang="en-US" sz="1150" dirty="0"/>
+          </a:p>
+        </p:txBody>
+      </p:sp>
+      <p:sp>
+        <p:nvSpPr>
+          <p:cNvPr id="10" name="Shape 8"/>
+          <p:cNvSpPr/>
+          <p:nvPr/>
+        </p:nvSpPr>
+        <p:spPr>
+          <a:xfrm>
+            <a:off x="8010144" y="1783080"/>
+            <a:ext cx="3520440" cy="2514600"/>
+          </a:xfrm>
+          <a:prstGeom prst="roundRect">
+            <a:avLst>
+              <a:gd name="adj" fmla="val 1818"/>
+            </a:avLst>
+          </a:prstGeom>
+          <a:solidFill>
+            <a:srgbClr val="141B33"/>
+          </a:solidFill>
+          <a:ln w="19050">
+            <a:solidFill>
+              <a:srgbClr val="E8B87F"/>
+            </a:solidFill>
+            <a:prstDash val="solid"/>
+          </a:ln>
+        </p:spPr>
+        <p:txBody>
+          <a:bodyPr/>
+          <a:lstStyle/>
+          <a:p>
+            <a:endParaRPr lang="en-IT"/>
+          </a:p>
+        </p:txBody>
+      </p:sp>
+      <p:sp>
+        <p:nvSpPr>
+          <p:cNvPr id="11" name="Text 9"/>
+          <p:cNvSpPr txBox="1"/>
+          <p:nvPr/>
+        </p:nvSpPr>
+        <p:spPr>
+          <a:xfrm>
+            <a:off x="8266176" y="1993392"/>
+            <a:ext cx="3017520" cy="320040"/>
+          </a:xfrm>
+          <a:prstGeom prst="rect">
+            <a:avLst/>
+          </a:prstGeom>
+          <a:noFill/>
+          <a:ln/>
+        </p:spPr>
+        <p:txBody>
+          <a:bodyPr wrap="square" rtlCol="0" anchor="ctr"/>
+          <a:lstStyle/>
+          <a:p>
+            <a:pPr marL="0" indent="0">
+              <a:buNone/>
+            </a:pPr>
+            <a:r>
+              <a:rPr lang="en-US" sz="1400" b="1" dirty="0">
+                <a:solidFill>
+                  <a:srgbClr val="E8B87F"/>
+                </a:solidFill>
+                <a:latin typeface="Calibri" pitchFamily="34" charset="0"/>
+                <a:ea typeface="Calibri" pitchFamily="34" charset="-122"/>
+                <a:cs typeface="Calibri" pitchFamily="34" charset="-120"/>
+              </a:rPr>
+              <a:t>La generazione in tempo reale</a:t>
+            </a:r>
+            <a:endParaRPr lang="en-US" sz="1400" dirty="0"/>
+          </a:p>
+        </p:txBody>
+      </p:sp>
+      <p:sp>
+        <p:nvSpPr>
+          <p:cNvPr id="12" name="Text 10"/>
+          <p:cNvSpPr txBox="1"/>
+          <p:nvPr/>
+        </p:nvSpPr>
+        <p:spPr>
+          <a:xfrm>
+            <a:off x="8266176" y="2450592"/>
+            <a:ext cx="3017520" cy="1645920"/>
+          </a:xfrm>
+          <a:prstGeom prst="rect">
+            <a:avLst/>
+          </a:prstGeom>
+          <a:noFill/>
+          <a:ln/>
+        </p:spPr>
+        <p:txBody>
+          <a:bodyPr wrap="square" rtlCol="0" anchor="ctr"/>
+          <a:lstStyle/>
+          <a:p>
+            <a:pPr marL="0" indent="0">
+              <a:lnSpc>
+                <a:spcPct val="125000"/>
+              </a:lnSpc>
+              <a:buNone/>
+            </a:pPr>
+            <a:r>
+              <a:rPr lang="en-US" sz="1150" dirty="0">
+                <a:solidFill>
+                  <a:srgbClr val="E8EEF7"/>
+                </a:solidFill>
+                <a:latin typeface="Calibri" pitchFamily="34" charset="0"/>
+                <a:ea typeface="Calibri" pitchFamily="34" charset="-122"/>
+                <a:cs typeface="Calibri" pitchFamily="34" charset="-120"/>
+              </a:rPr>
+              <a:t>Da poco è alla portata di un portatile: trascrizione in locale, modelli linguistici, sintesi musicale. Contenuto personale in pochi secondi, senza studio di registrazione.</a:t>
+            </a:r>
+            <a:endParaRPr lang="en-US" sz="1150" dirty="0"/>
+          </a:p>
+        </p:txBody>
+      </p:sp>
+      <p:sp>
+        <p:nvSpPr>
+          <p:cNvPr id="13" name="Shape 11"/>
+          <p:cNvSpPr/>
+          <p:nvPr/>
+        </p:nvSpPr>
+        <p:spPr>
+          <a:xfrm>
+            <a:off x="640080" y="4709160"/>
+            <a:ext cx="10908792" cy="0"/>
+          </a:xfrm>
+          <a:prstGeom prst="line">
+            <a:avLst/>
+          </a:prstGeom>
+          <a:noFill/>
+          <a:ln w="12700">
+            <a:solidFill>
+              <a:srgbClr val="2A3550"/>
+            </a:solidFill>
+            <a:prstDash val="solid"/>
+          </a:ln>
+        </p:spPr>
+        <p:txBody>
+          <a:bodyPr/>
+          <a:lstStyle/>
+          <a:p>
+            <a:endParaRPr lang="en-IT"/>
+          </a:p>
+        </p:txBody>
+      </p:sp>
+      <p:sp>
+        <p:nvSpPr>
+          <p:cNvPr id="14" name="Text 12"/>
+          <p:cNvSpPr txBox="1"/>
+          <p:nvPr/>
+        </p:nvSpPr>
+        <p:spPr>
+          <a:xfrm>
+            <a:off x="640080" y="4983480"/>
+            <a:ext cx="10908792" cy="1005840"/>
+          </a:xfrm>
+          <a:prstGeom prst="rect">
+            <a:avLst/>
+          </a:prstGeom>
+          <a:noFill/>
+          <a:ln/>
+        </p:spPr>
+        <p:txBody>
+          <a:bodyPr wrap="square" rtlCol="0" anchor="ctr"/>
+          <a:lstStyle/>
+          <a:p>
+            <a:pPr marL="0" indent="0">
+              <a:lnSpc>
+                <a:spcPct val="130000"/>
+              </a:lnSpc>
+              <a:buNone/>
+            </a:pPr>
+            <a:r>
+              <a:rPr lang="en-US" sz="1500" b="1" dirty="0">
+                <a:solidFill>
+                  <a:srgbClr val="8FD9EC"/>
+                </a:solidFill>
+                <a:latin typeface="Calibri" pitchFamily="34" charset="0"/>
+                <a:ea typeface="Calibri" pitchFamily="34" charset="-122"/>
+                <a:cs typeface="Calibri" pitchFamily="34" charset="-120"/>
+              </a:rPr>
+              <a:t>IN-Motion sta nell'intersezione. </a:t>
+            </a:r>
+            <a:r>
+              <a:rPr lang="en-US" sz="1500" dirty="0">
+                <a:solidFill>
+                  <a:srgbClr val="E8EEF7"/>
+                </a:solidFill>
+                <a:latin typeface="Calibri" pitchFamily="34" charset="0"/>
+                <a:ea typeface="Calibri" pitchFamily="34" charset="-122"/>
+                <a:cs typeface="Calibri" pitchFamily="34" charset="-120"/>
+              </a:rPr>
+              <a:t>Un'esperienza in cui il contenuto — le parole su cui mediti, la musica che le accompagna, l'immagine che ti porti via — nasce da ciò che </a:t>
+            </a:r>
+            <a:r>
+              <a:rPr lang="en-US" sz="1500" i="1" dirty="0">
+                <a:solidFill>
+                  <a:srgbClr val="E8EEF7"/>
+                </a:solidFill>
+                <a:latin typeface="Calibri" pitchFamily="34" charset="0"/>
+                <a:ea typeface="Calibri" pitchFamily="34" charset="-122"/>
+                <a:cs typeface="Calibri" pitchFamily="34" charset="-120"/>
+              </a:rPr>
+              <a:t>questa</a:t>
+            </a:r>
+            <a:r>
+              <a:rPr lang="en-US" sz="1500" dirty="0">
+                <a:solidFill>
+                  <a:srgbClr val="E8EEF7"/>
+                </a:solidFill>
+                <a:latin typeface="Calibri" pitchFamily="34" charset="0"/>
+                <a:ea typeface="Calibri" pitchFamily="34" charset="-122"/>
+                <a:cs typeface="Calibri" pitchFamily="34" charset="-120"/>
+              </a:rPr>
+              <a:t> persona ha appena raccontato, E DALLA SUA ESPRESSIONE FACCIALE?</a:t>
+            </a:r>
+            <a:endParaRPr lang="en-US" sz="1500" dirty="0"/>
+          </a:p>
+        </p:txBody>
+      </p:sp>
+    </p:spTree>
+  </p:cSld>
+  <p:clrMapOvr>
+    <a:masterClrMapping/>
+  </p:clrMapOvr>
+</p:sld>
+</file>
+
+<file path=ppt/slides/slide3.xml><?xml version="1.0" encoding="utf-8"?>
+<p:sld xmlns:a="http://schemas.openxmlformats.org/drawingml/2006/main" xmlns:r="http://schemas.openxmlformats.org/officeDocument/2006/relationships" xmlns:p="http://schemas.openxmlformats.org/presentationml/2006/main">
   <p:cSld name="Slide 2">
     <p:bg>
       <p:bgPr>
@@ -6562,7 +10408,7 @@
                 <a:ea typeface="Calibri" pitchFamily="34" charset="-122"/>
                 <a:cs typeface="Calibri" pitchFamily="34" charset="-120"/>
               </a:rPr>
-              <a:t>IL PROGETTO</a:t>
+              <a:t>MOTIVAZIONE</a:t>
             </a:r>
             <a:endParaRPr lang="en-US" sz="1200" dirty="0"/>
           </a:p>
@@ -6601,46 +10447,100 @@
                 <a:ea typeface="Cambria" pitchFamily="34" charset="-122"/>
                 <a:cs typeface="Cambria" pitchFamily="34" charset="-120"/>
               </a:rPr>
-              <a:t>Perché un mandala</a:t>
+              <a:t>Tre cose che non tornano</a:t>
             </a:r>
             <a:endParaRPr lang="en-US" sz="3400" dirty="0"/>
           </a:p>
         </p:txBody>
       </p:sp>
-      <p:pic>
-        <p:nvPicPr>
-          <p:cNvPr id="4" name="Image 0" descr="/tmp/ppt/mandala_ambra.png"/>
-          <p:cNvPicPr>
-            <a:picLocks noChangeAspect="1"/>
-          </p:cNvPicPr>
-          <p:nvPr/>
-        </p:nvPicPr>
-        <p:blipFill>
-          <a:blip r:embed="rId3"/>
-          <a:stretch>
-            <a:fillRect/>
-          </a:stretch>
-        </p:blipFill>
-        <p:spPr>
-          <a:xfrm>
-            <a:off x="8138160" y="1600200"/>
-            <a:ext cx="3566160" cy="3566160"/>
-          </a:xfrm>
-          <a:prstGeom prst="rect">
-            <a:avLst/>
-          </a:prstGeom>
-        </p:spPr>
-      </p:pic>
-      <p:sp>
-        <p:nvSpPr>
-          <p:cNvPr id="5" name="Text 2"/>
-          <p:cNvSpPr txBox="1"/>
-          <p:nvPr/>
-        </p:nvSpPr>
-        <p:spPr>
-          <a:xfrm>
-            <a:off x="640080" y="1783080"/>
-            <a:ext cx="7040880" cy="2194560"/>
+      <p:sp>
+        <p:nvSpPr>
+          <p:cNvPr id="4" name="Text 2"/>
+          <p:cNvSpPr txBox="1"/>
+          <p:nvPr/>
+        </p:nvSpPr>
+        <p:spPr>
+          <a:xfrm>
+            <a:off x="640080" y="1627632"/>
+            <a:ext cx="5029200" cy="274320"/>
+          </a:xfrm>
+          <a:prstGeom prst="rect">
+            <a:avLst/>
+          </a:prstGeom>
+          <a:noFill/>
+          <a:ln/>
+        </p:spPr>
+        <p:txBody>
+          <a:bodyPr wrap="square" rtlCol="0" anchor="ctr"/>
+          <a:lstStyle/>
+          <a:p>
+            <a:pPr marL="0" indent="0">
+              <a:buNone/>
+            </a:pPr>
+            <a:r>
+              <a:rPr lang="en-US" sz="1100" b="1" kern="0" spc="150" dirty="0">
+                <a:solidFill>
+                  <a:srgbClr val="E8887F"/>
+                </a:solidFill>
+                <a:latin typeface="Calibri" pitchFamily="34" charset="0"/>
+                <a:ea typeface="Calibri" pitchFamily="34" charset="-122"/>
+                <a:cs typeface="Calibri" pitchFamily="34" charset="-120"/>
+              </a:rPr>
+              <a:t>IL PROBLEMA</a:t>
+            </a:r>
+            <a:endParaRPr lang="en-US" sz="1100" dirty="0"/>
+          </a:p>
+        </p:txBody>
+      </p:sp>
+      <p:sp>
+        <p:nvSpPr>
+          <p:cNvPr id="5" name="Text 3"/>
+          <p:cNvSpPr txBox="1"/>
+          <p:nvPr/>
+        </p:nvSpPr>
+        <p:spPr>
+          <a:xfrm>
+            <a:off x="6400800" y="1627632"/>
+            <a:ext cx="5120640" cy="274320"/>
+          </a:xfrm>
+          <a:prstGeom prst="rect">
+            <a:avLst/>
+          </a:prstGeom>
+          <a:noFill/>
+          <a:ln/>
+        </p:spPr>
+        <p:txBody>
+          <a:bodyPr wrap="square" rtlCol="0" anchor="ctr"/>
+          <a:lstStyle/>
+          <a:p>
+            <a:pPr marL="0" indent="0">
+              <a:buNone/>
+            </a:pPr>
+            <a:r>
+              <a:rPr lang="en-US" sz="1100" b="1" kern="0" spc="150" dirty="0">
+                <a:solidFill>
+                  <a:srgbClr val="8FD9EC"/>
+                </a:solidFill>
+                <a:latin typeface="Calibri" pitchFamily="34" charset="0"/>
+                <a:ea typeface="Calibri" pitchFamily="34" charset="-122"/>
+                <a:cs typeface="Calibri" pitchFamily="34" charset="-120"/>
+              </a:rPr>
+              <a:t>LA NOSTRA RISPOSTA</a:t>
+            </a:r>
+            <a:endParaRPr lang="en-US" sz="1100" dirty="0"/>
+          </a:p>
+        </p:txBody>
+      </p:sp>
+      <p:sp>
+        <p:nvSpPr>
+          <p:cNvPr id="6" name="Text 4"/>
+          <p:cNvSpPr txBox="1"/>
+          <p:nvPr/>
+        </p:nvSpPr>
+        <p:spPr>
+          <a:xfrm>
+            <a:off x="640080" y="1993392"/>
+            <a:ext cx="5029200" cy="457200"/>
           </a:xfrm>
           <a:prstGeom prst="rect">
             <a:avLst/>
@@ -6654,111 +10554,44 @@
           <a:p>
             <a:pPr marL="0" indent="0">
               <a:lnSpc>
-                <a:spcPct val="130000"/>
+                <a:spcPct val="110000"/>
               </a:lnSpc>
               <a:buNone/>
             </a:pPr>
             <a:r>
-              <a:rPr lang="en-US" sz="1400" b="1" dirty="0">
-                <a:solidFill>
-                  <a:srgbClr val="E8B87F"/>
-                </a:solidFill>
-                <a:latin typeface="Calibri" pitchFamily="34" charset="0"/>
-                <a:ea typeface="Calibri" pitchFamily="34" charset="-122"/>
-                <a:cs typeface="Calibri" pitchFamily="34" charset="-120"/>
-              </a:rPr>
-              <a:t>Mandala</a:t>
-            </a:r>
-            <a:r>
-              <a:rPr lang="en-US" sz="1400" dirty="0">
-                <a:solidFill>
-                  <a:srgbClr val="E8EEF7"/>
-                </a:solidFill>
-                <a:latin typeface="Calibri" pitchFamily="34" charset="0"/>
-                <a:ea typeface="Calibri" pitchFamily="34" charset="-122"/>
-                <a:cs typeface="Calibri" pitchFamily="34" charset="-120"/>
-              </a:rPr>
-              <a:t> in sanscrito è “cerchio”, e per estensione “mondo”. Una lettura più profonda lo rende </a:t>
-            </a:r>
-            <a:r>
-              <a:rPr lang="en-US" sz="1400" i="1" dirty="0">
-                <a:solidFill>
-                  <a:srgbClr val="8FD9EC"/>
-                </a:solidFill>
-                <a:latin typeface="Calibri" pitchFamily="34" charset="0"/>
-                <a:ea typeface="Calibri" pitchFamily="34" charset="-122"/>
-                <a:cs typeface="Calibri" pitchFamily="34" charset="-120"/>
-              </a:rPr>
-              <a:t>contenitore dell'essenza</a:t>
-            </a:r>
-            <a:r>
-              <a:rPr lang="en-US" sz="1400" dirty="0">
-                <a:solidFill>
-                  <a:srgbClr val="E8EEF7"/>
-                </a:solidFill>
-                <a:latin typeface="Calibri" pitchFamily="34" charset="0"/>
-                <a:ea typeface="Calibri" pitchFamily="34" charset="-122"/>
-                <a:cs typeface="Calibri" pitchFamily="34" charset="-120"/>
-              </a:rPr>
-              <a:t>. Non è un ornamento: è una mappa in cui si entra mentalmente e si procede verso il centro, per poi essere distrutto alla fine. L'insegnamento è che l'attaccamento anche a ciò che è bellissimo produce sofferenza.</a:t>
-            </a:r>
-            <a:endParaRPr lang="en-US" sz="1400" dirty="0"/>
-          </a:p>
-        </p:txBody>
-      </p:sp>
-      <p:sp>
-        <p:nvSpPr>
-          <p:cNvPr id="6" name="Shape 3"/>
-          <p:cNvSpPr/>
-          <p:nvPr/>
-        </p:nvSpPr>
-        <p:spPr>
-          <a:xfrm>
-            <a:off x="640080" y="4434840"/>
-            <a:ext cx="7040880" cy="1371600"/>
-          </a:xfrm>
-          <a:prstGeom prst="roundRect">
-            <a:avLst>
-              <a:gd name="adj" fmla="val 4000"/>
-            </a:avLst>
-          </a:prstGeom>
-          <a:solidFill>
-            <a:srgbClr val="141B33"/>
-          </a:solidFill>
-          <a:ln w="16510">
-            <a:solidFill>
-              <a:srgbClr val="E8B87F"/>
-            </a:solidFill>
-            <a:prstDash val="solid"/>
-          </a:ln>
-        </p:spPr>
-        <p:txBody>
-          <a:bodyPr/>
-          <a:lstStyle/>
-          <a:p>
-            <a:endParaRPr lang="en-IT"/>
-          </a:p>
-        </p:txBody>
-      </p:sp>
-      <p:sp>
-        <p:nvSpPr>
-          <p:cNvPr id="7" name="Text 4"/>
-          <p:cNvSpPr txBox="1"/>
-          <p:nvPr/>
-        </p:nvSpPr>
-        <p:spPr>
-          <a:xfrm>
-            <a:off x="914400" y="4617720"/>
-            <a:ext cx="6492240" cy="1005840"/>
-          </a:xfrm>
-          <a:prstGeom prst="rect">
-            <a:avLst/>
-          </a:prstGeom>
-          <a:noFill/>
-          <a:ln/>
-        </p:spPr>
-        <p:txBody>
-          <a:bodyPr wrap="square" lIns="0" tIns="0" rIns="0" bIns="0" rtlCol="0" anchor="ctr"/>
+              <a:rPr lang="en-US" sz="1300" b="1" dirty="0">
+                <a:solidFill>
+                  <a:srgbClr val="E8887F"/>
+                </a:solidFill>
+                <a:latin typeface="Calibri" pitchFamily="34" charset="0"/>
+                <a:ea typeface="Calibri" pitchFamily="34" charset="-122"/>
+                <a:cs typeface="Calibri" pitchFamily="34" charset="-120"/>
+              </a:rPr>
+              <a:t>Il contenuto è uguale per tutti</a:t>
+            </a:r>
+            <a:endParaRPr lang="en-US" sz="1300" dirty="0"/>
+          </a:p>
+        </p:txBody>
+      </p:sp>
+      <p:sp>
+        <p:nvSpPr>
+          <p:cNvPr id="7" name="Text 5"/>
+          <p:cNvSpPr txBox="1"/>
+          <p:nvPr/>
+        </p:nvSpPr>
+        <p:spPr>
+          <a:xfrm>
+            <a:off x="640080" y="2496312"/>
+            <a:ext cx="5029200" cy="777240"/>
+          </a:xfrm>
+          <a:prstGeom prst="rect">
+            <a:avLst/>
+          </a:prstGeom>
+          <a:noFill/>
+          <a:ln/>
+        </p:spPr>
+        <p:txBody>
+          <a:bodyPr wrap="square" rtlCol="0" anchor="ctr"/>
           <a:lstStyle/>
           <a:p>
             <a:pPr marL="0" indent="0">
@@ -6768,17 +10601,413 @@
               <a:buNone/>
             </a:pPr>
             <a:r>
-              <a:rPr lang="en-US" sz="1400" i="1" dirty="0">
-                <a:solidFill>
-                  <a:srgbClr val="E8B87F"/>
-                </a:solidFill>
-                <a:latin typeface="Calibri" pitchFamily="34" charset="0"/>
-                <a:ea typeface="Calibri" pitchFamily="34" charset="-122"/>
-                <a:cs typeface="Calibri" pitchFamily="34" charset="-120"/>
-              </a:rPr>
-              <a:t>Il progetto cerca di fare lo stesso percorso: il tuo volto si scompone, diventa parole, poi mandala. E alla fine sei tu a doverlo lasciare andare, muovendo la testa.</a:t>
-            </a:r>
-            <a:endParaRPr lang="en-US" sz="1400" dirty="0"/>
+              <a:rPr lang="en-US" sz="1150" dirty="0">
+                <a:solidFill>
+                  <a:srgbClr val="8A97B0"/>
+                </a:solidFill>
+                <a:latin typeface="Calibri" pitchFamily="34" charset="0"/>
+                <a:ea typeface="Calibri" pitchFamily="34" charset="-122"/>
+                <a:cs typeface="Calibri" pitchFamily="34" charset="-120"/>
+              </a:rPr>
+              <a:t>Una meditazione registrata non sa se domani hai un esame, o se hai appena litigato con qualcuno.</a:t>
+            </a:r>
+            <a:endParaRPr lang="en-US" sz="1150" dirty="0"/>
+          </a:p>
+        </p:txBody>
+      </p:sp>
+      <p:sp>
+        <p:nvSpPr>
+          <p:cNvPr id="8" name="Shape 6"/>
+          <p:cNvSpPr/>
+          <p:nvPr/>
+        </p:nvSpPr>
+        <p:spPr>
+          <a:xfrm>
+            <a:off x="6309360" y="1938528"/>
+            <a:ext cx="5239512" cy="1325880"/>
+          </a:xfrm>
+          <a:prstGeom prst="roundRect">
+            <a:avLst>
+              <a:gd name="adj" fmla="val 3448"/>
+            </a:avLst>
+          </a:prstGeom>
+          <a:solidFill>
+            <a:srgbClr val="141B33"/>
+          </a:solidFill>
+          <a:ln w="19050">
+            <a:solidFill>
+              <a:srgbClr val="8FD9EC"/>
+            </a:solidFill>
+            <a:prstDash val="solid"/>
+          </a:ln>
+        </p:spPr>
+        <p:txBody>
+          <a:bodyPr/>
+          <a:lstStyle/>
+          <a:p>
+            <a:endParaRPr lang="en-IT"/>
+          </a:p>
+        </p:txBody>
+      </p:sp>
+      <p:sp>
+        <p:nvSpPr>
+          <p:cNvPr id="9" name="Text 7"/>
+          <p:cNvSpPr txBox="1"/>
+          <p:nvPr/>
+        </p:nvSpPr>
+        <p:spPr>
+          <a:xfrm>
+            <a:off x="6537960" y="2121408"/>
+            <a:ext cx="4800600" cy="1005840"/>
+          </a:xfrm>
+          <a:prstGeom prst="rect">
+            <a:avLst/>
+          </a:prstGeom>
+          <a:noFill/>
+          <a:ln/>
+        </p:spPr>
+        <p:txBody>
+          <a:bodyPr wrap="square" rtlCol="0" anchor="ctr"/>
+          <a:lstStyle/>
+          <a:p>
+            <a:pPr marL="0" indent="0">
+              <a:lnSpc>
+                <a:spcPct val="125000"/>
+              </a:lnSpc>
+              <a:buNone/>
+            </a:pPr>
+            <a:r>
+              <a:rPr lang="en-US" sz="1250" dirty="0">
+                <a:solidFill>
+                  <a:srgbClr val="E8EEF7"/>
+                </a:solidFill>
+                <a:latin typeface="Calibri" pitchFamily="34" charset="0"/>
+                <a:ea typeface="Calibri" pitchFamily="34" charset="-122"/>
+                <a:cs typeface="Calibri" pitchFamily="34" charset="-120"/>
+              </a:rPr>
+              <a:t>Il racconto diventa il testo, la musica e la forma. Due sessioni non producono mai la stessa cosa.</a:t>
+            </a:r>
+            <a:endParaRPr lang="en-US" sz="1250" dirty="0"/>
+          </a:p>
+        </p:txBody>
+      </p:sp>
+      <p:sp>
+        <p:nvSpPr>
+          <p:cNvPr id="10" name="Text 8"/>
+          <p:cNvSpPr txBox="1"/>
+          <p:nvPr/>
+        </p:nvSpPr>
+        <p:spPr>
+          <a:xfrm>
+            <a:off x="640080" y="3474720"/>
+            <a:ext cx="5029200" cy="457200"/>
+          </a:xfrm>
+          <a:prstGeom prst="rect">
+            <a:avLst/>
+          </a:prstGeom>
+          <a:noFill/>
+          <a:ln/>
+        </p:spPr>
+        <p:txBody>
+          <a:bodyPr wrap="square" rtlCol="0" anchor="ctr"/>
+          <a:lstStyle/>
+          <a:p>
+            <a:pPr marL="0" indent="0">
+              <a:lnSpc>
+                <a:spcPct val="110000"/>
+              </a:lnSpc>
+              <a:buNone/>
+            </a:pPr>
+            <a:r>
+              <a:rPr lang="en-US" sz="1300" b="1" dirty="0">
+                <a:solidFill>
+                  <a:srgbClr val="E8887F"/>
+                </a:solidFill>
+                <a:latin typeface="Calibri" pitchFamily="34" charset="0"/>
+                <a:ea typeface="Calibri" pitchFamily="34" charset="-122"/>
+                <a:cs typeface="Calibri" pitchFamily="34" charset="-120"/>
+              </a:rPr>
+              <a:t>L'interfaccia chiede l'attenzione che vorrebbe farti ritirare</a:t>
+            </a:r>
+            <a:endParaRPr lang="en-US" sz="1300" dirty="0"/>
+          </a:p>
+        </p:txBody>
+      </p:sp>
+      <p:sp>
+        <p:nvSpPr>
+          <p:cNvPr id="11" name="Text 9"/>
+          <p:cNvSpPr txBox="1"/>
+          <p:nvPr/>
+        </p:nvSpPr>
+        <p:spPr>
+          <a:xfrm>
+            <a:off x="640080" y="3977640"/>
+            <a:ext cx="5029200" cy="777240"/>
+          </a:xfrm>
+          <a:prstGeom prst="rect">
+            <a:avLst/>
+          </a:prstGeom>
+          <a:noFill/>
+          <a:ln/>
+        </p:spPr>
+        <p:txBody>
+          <a:bodyPr wrap="square" rtlCol="0" anchor="ctr"/>
+          <a:lstStyle/>
+          <a:p>
+            <a:pPr marL="0" indent="0">
+              <a:lnSpc>
+                <a:spcPct val="125000"/>
+              </a:lnSpc>
+              <a:buNone/>
+            </a:pPr>
+            <a:r>
+              <a:rPr lang="en-US" sz="1150" dirty="0">
+                <a:solidFill>
+                  <a:srgbClr val="8A97B0"/>
+                </a:solidFill>
+                <a:latin typeface="Calibri" pitchFamily="34" charset="0"/>
+                <a:ea typeface="Calibri" pitchFamily="34" charset="-122"/>
+                <a:cs typeface="Calibri" pitchFamily="34" charset="-120"/>
+              </a:rPr>
+              <a:t>Per meditare devi prima prendere il telefono, sbloccarlo, scegliere, premere play. Il gesto contraddice lo scopo.</a:t>
+            </a:r>
+            <a:endParaRPr lang="en-US" sz="1150" dirty="0"/>
+          </a:p>
+        </p:txBody>
+      </p:sp>
+      <p:sp>
+        <p:nvSpPr>
+          <p:cNvPr id="12" name="Shape 10"/>
+          <p:cNvSpPr/>
+          <p:nvPr/>
+        </p:nvSpPr>
+        <p:spPr>
+          <a:xfrm>
+            <a:off x="6309360" y="3419856"/>
+            <a:ext cx="5239512" cy="1325880"/>
+          </a:xfrm>
+          <a:prstGeom prst="roundRect">
+            <a:avLst>
+              <a:gd name="adj" fmla="val 3448"/>
+            </a:avLst>
+          </a:prstGeom>
+          <a:solidFill>
+            <a:srgbClr val="141B33"/>
+          </a:solidFill>
+          <a:ln w="19050">
+            <a:solidFill>
+              <a:srgbClr val="8FD9EC"/>
+            </a:solidFill>
+            <a:prstDash val="solid"/>
+          </a:ln>
+        </p:spPr>
+        <p:txBody>
+          <a:bodyPr/>
+          <a:lstStyle/>
+          <a:p>
+            <a:endParaRPr lang="en-IT"/>
+          </a:p>
+        </p:txBody>
+      </p:sp>
+      <p:sp>
+        <p:nvSpPr>
+          <p:cNvPr id="13" name="Text 11"/>
+          <p:cNvSpPr txBox="1"/>
+          <p:nvPr/>
+        </p:nvSpPr>
+        <p:spPr>
+          <a:xfrm>
+            <a:off x="6537960" y="3602736"/>
+            <a:ext cx="4800600" cy="1005840"/>
+          </a:xfrm>
+          <a:prstGeom prst="rect">
+            <a:avLst/>
+          </a:prstGeom>
+          <a:noFill/>
+          <a:ln/>
+        </p:spPr>
+        <p:txBody>
+          <a:bodyPr wrap="square" rtlCol="0" anchor="ctr"/>
+          <a:lstStyle/>
+          <a:p>
+            <a:pPr marL="0" indent="0">
+              <a:lnSpc>
+                <a:spcPct val="125000"/>
+              </a:lnSpc>
+              <a:buNone/>
+            </a:pPr>
+            <a:r>
+              <a:rPr lang="en-US" sz="1250" dirty="0">
+                <a:solidFill>
+                  <a:srgbClr val="E8EEF7"/>
+                </a:solidFill>
+                <a:latin typeface="Calibri" pitchFamily="34" charset="0"/>
+                <a:ea typeface="Calibri" pitchFamily="34" charset="-122"/>
+                <a:cs typeface="Calibri" pitchFamily="34" charset="-120"/>
+              </a:rPr>
+              <a:t>L'unico comando sono le palpebre. Niente tastiera, niente tocco, nessuno schermo da consultare.</a:t>
+            </a:r>
+            <a:endParaRPr lang="en-US" sz="1250" dirty="0"/>
+          </a:p>
+        </p:txBody>
+      </p:sp>
+      <p:sp>
+        <p:nvSpPr>
+          <p:cNvPr id="14" name="Text 12"/>
+          <p:cNvSpPr txBox="1"/>
+          <p:nvPr/>
+        </p:nvSpPr>
+        <p:spPr>
+          <a:xfrm>
+            <a:off x="640080" y="4956048"/>
+            <a:ext cx="5029200" cy="457200"/>
+          </a:xfrm>
+          <a:prstGeom prst="rect">
+            <a:avLst/>
+          </a:prstGeom>
+          <a:noFill/>
+          <a:ln/>
+        </p:spPr>
+        <p:txBody>
+          <a:bodyPr wrap="square" rtlCol="0" anchor="ctr"/>
+          <a:lstStyle/>
+          <a:p>
+            <a:pPr marL="0" indent="0">
+              <a:lnSpc>
+                <a:spcPct val="110000"/>
+              </a:lnSpc>
+              <a:buNone/>
+            </a:pPr>
+            <a:r>
+              <a:rPr lang="en-US" sz="1300" b="1" dirty="0">
+                <a:solidFill>
+                  <a:srgbClr val="E8887F"/>
+                </a:solidFill>
+                <a:latin typeface="Calibri" pitchFamily="34" charset="0"/>
+                <a:ea typeface="Calibri" pitchFamily="34" charset="-122"/>
+                <a:cs typeface="Calibri" pitchFamily="34" charset="-120"/>
+              </a:rPr>
+              <a:t>Non resta niente</a:t>
+            </a:r>
+            <a:endParaRPr lang="en-US" sz="1300" dirty="0"/>
+          </a:p>
+        </p:txBody>
+      </p:sp>
+      <p:sp>
+        <p:nvSpPr>
+          <p:cNvPr id="15" name="Text 13"/>
+          <p:cNvSpPr txBox="1"/>
+          <p:nvPr/>
+        </p:nvSpPr>
+        <p:spPr>
+          <a:xfrm>
+            <a:off x="640080" y="5458968"/>
+            <a:ext cx="5029200" cy="777240"/>
+          </a:xfrm>
+          <a:prstGeom prst="rect">
+            <a:avLst/>
+          </a:prstGeom>
+          <a:noFill/>
+          <a:ln/>
+        </p:spPr>
+        <p:txBody>
+          <a:bodyPr wrap="square" rtlCol="0" anchor="ctr"/>
+          <a:lstStyle/>
+          <a:p>
+            <a:pPr marL="0" indent="0">
+              <a:lnSpc>
+                <a:spcPct val="125000"/>
+              </a:lnSpc>
+              <a:buNone/>
+            </a:pPr>
+            <a:r>
+              <a:rPr lang="en-US" sz="1150" dirty="0">
+                <a:solidFill>
+                  <a:srgbClr val="8A97B0"/>
+                </a:solidFill>
+                <a:latin typeface="Calibri" pitchFamily="34" charset="0"/>
+                <a:ea typeface="Calibri" pitchFamily="34" charset="-122"/>
+                <a:cs typeface="Calibri" pitchFamily="34" charset="-120"/>
+              </a:rPr>
+              <a:t>La sessione finisce, l'applicazione si chiude, e il tempo passato non ha lasciato traccia.</a:t>
+            </a:r>
+            <a:endParaRPr lang="en-US" sz="1150" dirty="0"/>
+          </a:p>
+        </p:txBody>
+      </p:sp>
+      <p:sp>
+        <p:nvSpPr>
+          <p:cNvPr id="16" name="Shape 14"/>
+          <p:cNvSpPr/>
+          <p:nvPr/>
+        </p:nvSpPr>
+        <p:spPr>
+          <a:xfrm>
+            <a:off x="6309360" y="4901184"/>
+            <a:ext cx="5239512" cy="1325880"/>
+          </a:xfrm>
+          <a:prstGeom prst="roundRect">
+            <a:avLst>
+              <a:gd name="adj" fmla="val 3448"/>
+            </a:avLst>
+          </a:prstGeom>
+          <a:solidFill>
+            <a:srgbClr val="141B33"/>
+          </a:solidFill>
+          <a:ln w="19050">
+            <a:solidFill>
+              <a:srgbClr val="8FD9EC"/>
+            </a:solidFill>
+            <a:prstDash val="solid"/>
+          </a:ln>
+        </p:spPr>
+        <p:txBody>
+          <a:bodyPr/>
+          <a:lstStyle/>
+          <a:p>
+            <a:endParaRPr lang="en-IT"/>
+          </a:p>
+        </p:txBody>
+      </p:sp>
+      <p:sp>
+        <p:nvSpPr>
+          <p:cNvPr id="17" name="Text 15"/>
+          <p:cNvSpPr txBox="1"/>
+          <p:nvPr/>
+        </p:nvSpPr>
+        <p:spPr>
+          <a:xfrm>
+            <a:off x="6537960" y="5084064"/>
+            <a:ext cx="4800600" cy="1005840"/>
+          </a:xfrm>
+          <a:prstGeom prst="rect">
+            <a:avLst/>
+          </a:prstGeom>
+          <a:noFill/>
+          <a:ln/>
+        </p:spPr>
+        <p:txBody>
+          <a:bodyPr wrap="square" rtlCol="0" anchor="ctr"/>
+          <a:lstStyle/>
+          <a:p>
+            <a:pPr marL="0" indent="0">
+              <a:lnSpc>
+                <a:spcPct val="125000"/>
+              </a:lnSpc>
+              <a:buNone/>
+            </a:pPr>
+            <a:r>
+              <a:rPr lang="en-US" sz="1250" dirty="0">
+                <a:solidFill>
+                  <a:srgbClr val="E8EEF7"/>
+                </a:solidFill>
+                <a:latin typeface="Calibri" pitchFamily="34" charset="0"/>
+                <a:ea typeface="Calibri" pitchFamily="34" charset="-122"/>
+                <a:cs typeface="Calibri" pitchFamily="34" charset="-120"/>
+              </a:rPr>
+              <a:t>Resta un mandala che esiste solo perché ci sei passato tu. E che devi comunque lasciare andare.</a:t>
+            </a:r>
+            <a:endParaRPr lang="en-US" sz="1250" dirty="0"/>
           </a:p>
         </p:txBody>
       </p:sp>
@@ -6790,7 +11019,7 @@
 </p:sld>
 </file>
 
-<file path=ppt/slides/slide3.xml><?xml version="1.0" encoding="utf-8"?>
+<file path=ppt/slides/slide4.xml><?xml version="1.0" encoding="utf-8"?>
 <p:sld xmlns:a="http://schemas.openxmlformats.org/drawingml/2006/main" xmlns:r="http://schemas.openxmlformats.org/officeDocument/2006/relationships" xmlns:p="http://schemas.openxmlformats.org/presentationml/2006/main">
   <p:cSld name="Slide 3">
     <p:bg>
@@ -6848,6 +11077,1607 @@
                 <a:ea typeface="Calibri" pitchFamily="34" charset="-122"/>
                 <a:cs typeface="Calibri" pitchFamily="34" charset="-120"/>
               </a:rPr>
+              <a:t>CONCEPT</a:t>
+            </a:r>
+            <a:endParaRPr lang="en-US" sz="1200" dirty="0"/>
+          </a:p>
+        </p:txBody>
+      </p:sp>
+      <p:sp>
+        <p:nvSpPr>
+          <p:cNvPr id="3" name="Text 1"/>
+          <p:cNvSpPr txBox="1"/>
+          <p:nvPr/>
+        </p:nvSpPr>
+        <p:spPr>
+          <a:xfrm>
+            <a:off x="640080" y="685800"/>
+            <a:ext cx="10881360" cy="777240"/>
+          </a:xfrm>
+          <a:prstGeom prst="rect">
+            <a:avLst/>
+          </a:prstGeom>
+          <a:noFill/>
+          <a:ln/>
+        </p:spPr>
+        <p:txBody>
+          <a:bodyPr wrap="square" rtlCol="0" anchor="ctr"/>
+          <a:lstStyle/>
+          <a:p>
+            <a:pPr marL="0" indent="0">
+              <a:buNone/>
+            </a:pPr>
+            <a:r>
+              <a:rPr lang="en-US" sz="3400" b="1" dirty="0">
+                <a:solidFill>
+                  <a:srgbClr val="E8EEF7"/>
+                </a:solidFill>
+                <a:latin typeface="Cambria" pitchFamily="34" charset="0"/>
+                <a:ea typeface="Cambria" pitchFamily="34" charset="-122"/>
+                <a:cs typeface="Cambria" pitchFamily="34" charset="-120"/>
+              </a:rPr>
+              <a:t>L'esperienza, da chi la vive</a:t>
+            </a:r>
+            <a:endParaRPr lang="en-US" sz="3400" dirty="0"/>
+          </a:p>
+        </p:txBody>
+      </p:sp>
+      <p:sp>
+        <p:nvSpPr>
+          <p:cNvPr id="4" name="Text 2"/>
+          <p:cNvSpPr txBox="1"/>
+          <p:nvPr/>
+        </p:nvSpPr>
+        <p:spPr>
+          <a:xfrm>
+            <a:off x="640080" y="1554480"/>
+            <a:ext cx="10908792" cy="621792"/>
+          </a:xfrm>
+          <a:prstGeom prst="rect">
+            <a:avLst/>
+          </a:prstGeom>
+          <a:noFill/>
+          <a:ln/>
+        </p:spPr>
+        <p:txBody>
+          <a:bodyPr wrap="square" rtlCol="0" anchor="ctr"/>
+          <a:lstStyle/>
+          <a:p>
+            <a:pPr marL="0" indent="0">
+              <a:lnSpc>
+                <a:spcPct val="125000"/>
+              </a:lnSpc>
+              <a:buNone/>
+            </a:pPr>
+            <a:r>
+              <a:rPr lang="en-US" sz="1350" dirty="0">
+                <a:solidFill>
+                  <a:srgbClr val="E8EEF7"/>
+                </a:solidFill>
+                <a:latin typeface="Calibri" pitchFamily="34" charset="0"/>
+                <a:ea typeface="Calibri" pitchFamily="34" charset="-122"/>
+                <a:cs typeface="Calibri" pitchFamily="34" charset="-120"/>
+              </a:rPr>
+              <a:t>Nessuna istruzione, nessun pulsante. Il sistema aspetta, e interpreta l'unica cosa che una persona che medita fa comunque: aprire e chiudere gli occhi.</a:t>
+            </a:r>
+            <a:endParaRPr lang="en-US" sz="1350" dirty="0"/>
+          </a:p>
+        </p:txBody>
+      </p:sp>
+      <p:sp>
+        <p:nvSpPr>
+          <p:cNvPr id="5" name="Shape 3"/>
+          <p:cNvSpPr/>
+          <p:nvPr/>
+        </p:nvSpPr>
+        <p:spPr>
+          <a:xfrm>
+            <a:off x="640080" y="2286000"/>
+            <a:ext cx="1664208" cy="2331720"/>
+          </a:xfrm>
+          <a:prstGeom prst="roundRect">
+            <a:avLst>
+              <a:gd name="adj" fmla="val 2747"/>
+            </a:avLst>
+          </a:prstGeom>
+          <a:solidFill>
+            <a:srgbClr val="141B33"/>
+          </a:solidFill>
+          <a:ln w="19050">
+            <a:solidFill>
+              <a:srgbClr val="8FD9EC"/>
+            </a:solidFill>
+            <a:prstDash val="solid"/>
+          </a:ln>
+        </p:spPr>
+        <p:txBody>
+          <a:bodyPr/>
+          <a:lstStyle/>
+          <a:p>
+            <a:endParaRPr lang="en-IT"/>
+          </a:p>
+        </p:txBody>
+      </p:sp>
+      <p:sp>
+        <p:nvSpPr>
+          <p:cNvPr id="6" name="Text 4"/>
+          <p:cNvSpPr txBox="1"/>
+          <p:nvPr/>
+        </p:nvSpPr>
+        <p:spPr>
+          <a:xfrm>
+            <a:off x="658368" y="2450592"/>
+            <a:ext cx="1627632" cy="228600"/>
+          </a:xfrm>
+          <a:prstGeom prst="rect">
+            <a:avLst/>
+          </a:prstGeom>
+          <a:noFill/>
+          <a:ln/>
+        </p:spPr>
+        <p:txBody>
+          <a:bodyPr wrap="square" lIns="0" tIns="0" rIns="0" bIns="0" rtlCol="0" anchor="ctr"/>
+          <a:lstStyle/>
+          <a:p>
+            <a:pPr marL="0" indent="0" algn="ctr">
+              <a:buNone/>
+            </a:pPr>
+            <a:r>
+              <a:rPr lang="en-US" sz="800" b="1" kern="0" spc="100" dirty="0">
+                <a:solidFill>
+                  <a:srgbClr val="8FD9EC"/>
+                </a:solidFill>
+                <a:latin typeface="Calibri" pitchFamily="34" charset="0"/>
+                <a:ea typeface="Calibri" pitchFamily="34" charset="-122"/>
+                <a:cs typeface="Calibri" pitchFamily="34" charset="-120"/>
+              </a:rPr>
+              <a:t>OCCHI APERTI</a:t>
+            </a:r>
+            <a:endParaRPr lang="en-US" sz="800" dirty="0"/>
+          </a:p>
+        </p:txBody>
+      </p:sp>
+      <p:sp>
+        <p:nvSpPr>
+          <p:cNvPr id="7" name="Text 5"/>
+          <p:cNvSpPr txBox="1"/>
+          <p:nvPr/>
+        </p:nvSpPr>
+        <p:spPr>
+          <a:xfrm>
+            <a:off x="658368" y="2761488"/>
+            <a:ext cx="1627632" cy="320040"/>
+          </a:xfrm>
+          <a:prstGeom prst="rect">
+            <a:avLst/>
+          </a:prstGeom>
+          <a:noFill/>
+          <a:ln/>
+        </p:spPr>
+        <p:txBody>
+          <a:bodyPr wrap="square" lIns="0" tIns="0" rIns="0" bIns="0" rtlCol="0" anchor="ctr"/>
+          <a:lstStyle/>
+          <a:p>
+            <a:pPr marL="0" indent="0" algn="ctr">
+              <a:buNone/>
+            </a:pPr>
+            <a:r>
+              <a:rPr lang="en-US" sz="1600" b="1" dirty="0">
+                <a:solidFill>
+                  <a:srgbClr val="E8EEF7"/>
+                </a:solidFill>
+                <a:latin typeface="Cambria" pitchFamily="34" charset="0"/>
+                <a:ea typeface="Cambria" pitchFamily="34" charset="-122"/>
+                <a:cs typeface="Cambria" pitchFamily="34" charset="-120"/>
+              </a:rPr>
+              <a:t>Ti vede</a:t>
+            </a:r>
+            <a:endParaRPr lang="en-US" sz="1600" dirty="0"/>
+          </a:p>
+        </p:txBody>
+      </p:sp>
+      <p:sp>
+        <p:nvSpPr>
+          <p:cNvPr id="8" name="Text 6"/>
+          <p:cNvSpPr txBox="1"/>
+          <p:nvPr/>
+        </p:nvSpPr>
+        <p:spPr>
+          <a:xfrm>
+            <a:off x="749808" y="3200400"/>
+            <a:ext cx="1444752" cy="1280160"/>
+          </a:xfrm>
+          <a:prstGeom prst="rect">
+            <a:avLst/>
+          </a:prstGeom>
+          <a:noFill/>
+          <a:ln/>
+        </p:spPr>
+        <p:txBody>
+          <a:bodyPr wrap="square" lIns="0" tIns="0" rIns="0" bIns="0" rtlCol="0" anchor="ctr"/>
+          <a:lstStyle/>
+          <a:p>
+            <a:pPr marL="0" indent="0" algn="ctr">
+              <a:lnSpc>
+                <a:spcPct val="120000"/>
+              </a:lnSpc>
+              <a:buNone/>
+            </a:pPr>
+            <a:r>
+              <a:rPr lang="en-US" sz="950" dirty="0">
+                <a:solidFill>
+                  <a:srgbClr val="8A97B0"/>
+                </a:solidFill>
+                <a:latin typeface="Calibri" pitchFamily="34" charset="0"/>
+                <a:ea typeface="Calibri" pitchFamily="34" charset="-122"/>
+                <a:cs typeface="Calibri" pitchFamily="34" charset="-120"/>
+              </a:rPr>
+              <a:t>le particelle prendono la forma del tuo volto</a:t>
+            </a:r>
+            <a:endParaRPr lang="en-US" sz="950" dirty="0"/>
+          </a:p>
+        </p:txBody>
+      </p:sp>
+      <p:sp>
+        <p:nvSpPr>
+          <p:cNvPr id="9" name="Shape 7"/>
+          <p:cNvSpPr/>
+          <p:nvPr/>
+        </p:nvSpPr>
+        <p:spPr>
+          <a:xfrm>
+            <a:off x="2322576" y="3451860"/>
+            <a:ext cx="146304" cy="0"/>
+          </a:xfrm>
+          <a:prstGeom prst="line">
+            <a:avLst/>
+          </a:prstGeom>
+          <a:noFill/>
+          <a:ln w="19050">
+            <a:solidFill>
+              <a:srgbClr val="2A3550"/>
+            </a:solidFill>
+            <a:prstDash val="solid"/>
+            <a:tailEnd type="triangle"/>
+          </a:ln>
+        </p:spPr>
+        <p:txBody>
+          <a:bodyPr/>
+          <a:lstStyle/>
+          <a:p>
+            <a:endParaRPr lang="en-IT"/>
+          </a:p>
+        </p:txBody>
+      </p:sp>
+      <p:sp>
+        <p:nvSpPr>
+          <p:cNvPr id="10" name="Shape 8"/>
+          <p:cNvSpPr/>
+          <p:nvPr/>
+        </p:nvSpPr>
+        <p:spPr>
+          <a:xfrm>
+            <a:off x="2487168" y="2286000"/>
+            <a:ext cx="1664208" cy="2331720"/>
+          </a:xfrm>
+          <a:prstGeom prst="roundRect">
+            <a:avLst>
+              <a:gd name="adj" fmla="val 2747"/>
+            </a:avLst>
+          </a:prstGeom>
+          <a:solidFill>
+            <a:srgbClr val="141B33"/>
+          </a:solidFill>
+          <a:ln w="19050">
+            <a:solidFill>
+              <a:srgbClr val="C9A0DC"/>
+            </a:solidFill>
+            <a:prstDash val="solid"/>
+          </a:ln>
+        </p:spPr>
+        <p:txBody>
+          <a:bodyPr/>
+          <a:lstStyle/>
+          <a:p>
+            <a:endParaRPr lang="en-IT"/>
+          </a:p>
+        </p:txBody>
+      </p:sp>
+      <p:sp>
+        <p:nvSpPr>
+          <p:cNvPr id="11" name="Text 9"/>
+          <p:cNvSpPr txBox="1"/>
+          <p:nvPr/>
+        </p:nvSpPr>
+        <p:spPr>
+          <a:xfrm>
+            <a:off x="2505456" y="2450592"/>
+            <a:ext cx="1627632" cy="228600"/>
+          </a:xfrm>
+          <a:prstGeom prst="rect">
+            <a:avLst/>
+          </a:prstGeom>
+          <a:noFill/>
+          <a:ln/>
+        </p:spPr>
+        <p:txBody>
+          <a:bodyPr wrap="square" lIns="0" tIns="0" rIns="0" bIns="0" rtlCol="0" anchor="ctr"/>
+          <a:lstStyle/>
+          <a:p>
+            <a:pPr marL="0" indent="0" algn="ctr">
+              <a:buNone/>
+            </a:pPr>
+            <a:r>
+              <a:rPr lang="en-US" sz="800" b="1" kern="0" spc="100" dirty="0">
+                <a:solidFill>
+                  <a:srgbClr val="C9A0DC"/>
+                </a:solidFill>
+                <a:latin typeface="Calibri" pitchFamily="34" charset="0"/>
+                <a:ea typeface="Calibri" pitchFamily="34" charset="-122"/>
+                <a:cs typeface="Calibri" pitchFamily="34" charset="-120"/>
+              </a:rPr>
+              <a:t>OCCHI CHIUSI</a:t>
+            </a:r>
+            <a:endParaRPr lang="en-US" sz="800" dirty="0"/>
+          </a:p>
+        </p:txBody>
+      </p:sp>
+      <p:sp>
+        <p:nvSpPr>
+          <p:cNvPr id="12" name="Text 10"/>
+          <p:cNvSpPr txBox="1"/>
+          <p:nvPr/>
+        </p:nvSpPr>
+        <p:spPr>
+          <a:xfrm>
+            <a:off x="2505456" y="2761488"/>
+            <a:ext cx="1627632" cy="320040"/>
+          </a:xfrm>
+          <a:prstGeom prst="rect">
+            <a:avLst/>
+          </a:prstGeom>
+          <a:noFill/>
+          <a:ln/>
+        </p:spPr>
+        <p:txBody>
+          <a:bodyPr wrap="square" lIns="0" tIns="0" rIns="0" bIns="0" rtlCol="0" anchor="ctr"/>
+          <a:lstStyle/>
+          <a:p>
+            <a:pPr marL="0" indent="0" algn="ctr">
+              <a:buNone/>
+            </a:pPr>
+            <a:r>
+              <a:rPr lang="en-US" sz="1600" b="1" dirty="0">
+                <a:solidFill>
+                  <a:srgbClr val="E8EEF7"/>
+                </a:solidFill>
+                <a:latin typeface="Cambria" pitchFamily="34" charset="0"/>
+                <a:ea typeface="Cambria" pitchFamily="34" charset="-122"/>
+                <a:cs typeface="Cambria" pitchFamily="34" charset="-120"/>
+              </a:rPr>
+              <a:t>Racconti</a:t>
+            </a:r>
+            <a:endParaRPr lang="en-US" sz="1600" dirty="0"/>
+          </a:p>
+        </p:txBody>
+      </p:sp>
+      <p:sp>
+        <p:nvSpPr>
+          <p:cNvPr id="13" name="Text 11"/>
+          <p:cNvSpPr txBox="1"/>
+          <p:nvPr/>
+        </p:nvSpPr>
+        <p:spPr>
+          <a:xfrm>
+            <a:off x="2596896" y="3200400"/>
+            <a:ext cx="1444752" cy="1280160"/>
+          </a:xfrm>
+          <a:prstGeom prst="rect">
+            <a:avLst/>
+          </a:prstGeom>
+          <a:noFill/>
+          <a:ln/>
+        </p:spPr>
+        <p:txBody>
+          <a:bodyPr wrap="square" lIns="0" tIns="0" rIns="0" bIns="0" rtlCol="0" anchor="ctr"/>
+          <a:lstStyle/>
+          <a:p>
+            <a:pPr marL="0" indent="0" algn="ctr">
+              <a:lnSpc>
+                <a:spcPct val="120000"/>
+              </a:lnSpc>
+              <a:buNone/>
+            </a:pPr>
+            <a:r>
+              <a:rPr lang="en-US" sz="950" dirty="0">
+                <a:solidFill>
+                  <a:srgbClr val="8A97B0"/>
+                </a:solidFill>
+                <a:latin typeface="Calibri" pitchFamily="34" charset="0"/>
+                <a:ea typeface="Calibri" pitchFamily="34" charset="-122"/>
+                <a:cs typeface="Calibri" pitchFamily="34" charset="-120"/>
+              </a:rPr>
+              <a:t>a voce, quello che vuoi. Nessuna domanda, nessun modulo</a:t>
+            </a:r>
+            <a:endParaRPr lang="en-US" sz="950" dirty="0"/>
+          </a:p>
+        </p:txBody>
+      </p:sp>
+      <p:sp>
+        <p:nvSpPr>
+          <p:cNvPr id="14" name="Shape 12"/>
+          <p:cNvSpPr/>
+          <p:nvPr/>
+        </p:nvSpPr>
+        <p:spPr>
+          <a:xfrm>
+            <a:off x="4169664" y="3451860"/>
+            <a:ext cx="146304" cy="0"/>
+          </a:xfrm>
+          <a:prstGeom prst="line">
+            <a:avLst/>
+          </a:prstGeom>
+          <a:noFill/>
+          <a:ln w="19050">
+            <a:solidFill>
+              <a:srgbClr val="2A3550"/>
+            </a:solidFill>
+            <a:prstDash val="solid"/>
+            <a:tailEnd type="triangle"/>
+          </a:ln>
+        </p:spPr>
+        <p:txBody>
+          <a:bodyPr/>
+          <a:lstStyle/>
+          <a:p>
+            <a:endParaRPr lang="en-IT"/>
+          </a:p>
+        </p:txBody>
+      </p:sp>
+      <p:sp>
+        <p:nvSpPr>
+          <p:cNvPr id="15" name="Shape 13"/>
+          <p:cNvSpPr/>
+          <p:nvPr/>
+        </p:nvSpPr>
+        <p:spPr>
+          <a:xfrm>
+            <a:off x="4334256" y="2286000"/>
+            <a:ext cx="1664208" cy="2331720"/>
+          </a:xfrm>
+          <a:prstGeom prst="roundRect">
+            <a:avLst>
+              <a:gd name="adj" fmla="val 2747"/>
+            </a:avLst>
+          </a:prstGeom>
+          <a:solidFill>
+            <a:srgbClr val="141B33"/>
+          </a:solidFill>
+          <a:ln w="19050">
+            <a:solidFill>
+              <a:srgbClr val="8FD9EC"/>
+            </a:solidFill>
+            <a:prstDash val="solid"/>
+          </a:ln>
+        </p:spPr>
+        <p:txBody>
+          <a:bodyPr/>
+          <a:lstStyle/>
+          <a:p>
+            <a:endParaRPr lang="en-IT"/>
+          </a:p>
+        </p:txBody>
+      </p:sp>
+      <p:sp>
+        <p:nvSpPr>
+          <p:cNvPr id="16" name="Text 14"/>
+          <p:cNvSpPr txBox="1"/>
+          <p:nvPr/>
+        </p:nvSpPr>
+        <p:spPr>
+          <a:xfrm>
+            <a:off x="4352544" y="2450592"/>
+            <a:ext cx="1627632" cy="228600"/>
+          </a:xfrm>
+          <a:prstGeom prst="rect">
+            <a:avLst/>
+          </a:prstGeom>
+          <a:noFill/>
+          <a:ln/>
+        </p:spPr>
+        <p:txBody>
+          <a:bodyPr wrap="square" lIns="0" tIns="0" rIns="0" bIns="0" rtlCol="0" anchor="ctr"/>
+          <a:lstStyle/>
+          <a:p>
+            <a:pPr marL="0" indent="0" algn="ctr">
+              <a:buNone/>
+            </a:pPr>
+            <a:r>
+              <a:rPr lang="en-US" sz="800" b="1" kern="0" spc="100" dirty="0">
+                <a:solidFill>
+                  <a:srgbClr val="8FD9EC"/>
+                </a:solidFill>
+                <a:latin typeface="Calibri" pitchFamily="34" charset="0"/>
+                <a:ea typeface="Calibri" pitchFamily="34" charset="-122"/>
+                <a:cs typeface="Calibri" pitchFamily="34" charset="-120"/>
+              </a:rPr>
+              <a:t>OCCHI APERTI</a:t>
+            </a:r>
+            <a:endParaRPr lang="en-US" sz="800" dirty="0"/>
+          </a:p>
+        </p:txBody>
+      </p:sp>
+      <p:sp>
+        <p:nvSpPr>
+          <p:cNvPr id="17" name="Text 15"/>
+          <p:cNvSpPr txBox="1"/>
+          <p:nvPr/>
+        </p:nvSpPr>
+        <p:spPr>
+          <a:xfrm>
+            <a:off x="4352544" y="2761488"/>
+            <a:ext cx="1627632" cy="320040"/>
+          </a:xfrm>
+          <a:prstGeom prst="rect">
+            <a:avLst/>
+          </a:prstGeom>
+          <a:noFill/>
+          <a:ln/>
+        </p:spPr>
+        <p:txBody>
+          <a:bodyPr wrap="square" lIns="0" tIns="0" rIns="0" bIns="0" rtlCol="0" anchor="ctr"/>
+          <a:lstStyle/>
+          <a:p>
+            <a:pPr marL="0" indent="0" algn="ctr">
+              <a:buNone/>
+            </a:pPr>
+            <a:r>
+              <a:rPr lang="en-US" sz="1600" b="1" dirty="0">
+                <a:solidFill>
+                  <a:srgbClr val="E8EEF7"/>
+                </a:solidFill>
+                <a:latin typeface="Cambria" pitchFamily="34" charset="0"/>
+                <a:ea typeface="Cambria" pitchFamily="34" charset="-122"/>
+                <a:cs typeface="Cambria" pitchFamily="34" charset="-120"/>
+              </a:rPr>
+              <a:t>Leggi</a:t>
+            </a:r>
+            <a:endParaRPr lang="en-US" sz="1600" dirty="0"/>
+          </a:p>
+        </p:txBody>
+      </p:sp>
+      <p:sp>
+        <p:nvSpPr>
+          <p:cNvPr id="18" name="Text 16"/>
+          <p:cNvSpPr txBox="1"/>
+          <p:nvPr/>
+        </p:nvSpPr>
+        <p:spPr>
+          <a:xfrm>
+            <a:off x="4443984" y="3200400"/>
+            <a:ext cx="1444752" cy="1280160"/>
+          </a:xfrm>
+          <a:prstGeom prst="rect">
+            <a:avLst/>
+          </a:prstGeom>
+          <a:noFill/>
+          <a:ln/>
+        </p:spPr>
+        <p:txBody>
+          <a:bodyPr wrap="square" lIns="0" tIns="0" rIns="0" bIns="0" rtlCol="0" anchor="ctr"/>
+          <a:lstStyle/>
+          <a:p>
+            <a:pPr marL="0" indent="0" algn="ctr">
+              <a:lnSpc>
+                <a:spcPct val="120000"/>
+              </a:lnSpc>
+              <a:buNone/>
+            </a:pPr>
+            <a:r>
+              <a:rPr lang="en-US" sz="950" dirty="0">
+                <a:solidFill>
+                  <a:srgbClr val="8A97B0"/>
+                </a:solidFill>
+                <a:latin typeface="Calibri" pitchFamily="34" charset="0"/>
+                <a:ea typeface="Calibri" pitchFamily="34" charset="-122"/>
+                <a:cs typeface="Calibri" pitchFamily="34" charset="-120"/>
+              </a:rPr>
+              <a:t>le frasi scritte per te da ciò che hai detto</a:t>
+            </a:r>
+            <a:endParaRPr lang="en-US" sz="950" dirty="0"/>
+          </a:p>
+        </p:txBody>
+      </p:sp>
+      <p:sp>
+        <p:nvSpPr>
+          <p:cNvPr id="19" name="Shape 17"/>
+          <p:cNvSpPr/>
+          <p:nvPr/>
+        </p:nvSpPr>
+        <p:spPr>
+          <a:xfrm>
+            <a:off x="6016752" y="3451860"/>
+            <a:ext cx="146304" cy="0"/>
+          </a:xfrm>
+          <a:prstGeom prst="line">
+            <a:avLst/>
+          </a:prstGeom>
+          <a:noFill/>
+          <a:ln w="19050">
+            <a:solidFill>
+              <a:srgbClr val="2A3550"/>
+            </a:solidFill>
+            <a:prstDash val="solid"/>
+            <a:tailEnd type="triangle"/>
+          </a:ln>
+        </p:spPr>
+        <p:txBody>
+          <a:bodyPr/>
+          <a:lstStyle/>
+          <a:p>
+            <a:endParaRPr lang="en-IT"/>
+          </a:p>
+        </p:txBody>
+      </p:sp>
+      <p:sp>
+        <p:nvSpPr>
+          <p:cNvPr id="20" name="Shape 18"/>
+          <p:cNvSpPr/>
+          <p:nvPr/>
+        </p:nvSpPr>
+        <p:spPr>
+          <a:xfrm>
+            <a:off x="6181344" y="2286000"/>
+            <a:ext cx="1664208" cy="2331720"/>
+          </a:xfrm>
+          <a:prstGeom prst="roundRect">
+            <a:avLst>
+              <a:gd name="adj" fmla="val 2747"/>
+            </a:avLst>
+          </a:prstGeom>
+          <a:solidFill>
+            <a:srgbClr val="141B33"/>
+          </a:solidFill>
+          <a:ln w="19050">
+            <a:solidFill>
+              <a:srgbClr val="C9A0DC"/>
+            </a:solidFill>
+            <a:prstDash val="solid"/>
+          </a:ln>
+        </p:spPr>
+        <p:txBody>
+          <a:bodyPr/>
+          <a:lstStyle/>
+          <a:p>
+            <a:endParaRPr lang="en-IT"/>
+          </a:p>
+        </p:txBody>
+      </p:sp>
+      <p:sp>
+        <p:nvSpPr>
+          <p:cNvPr id="21" name="Text 19"/>
+          <p:cNvSpPr txBox="1"/>
+          <p:nvPr/>
+        </p:nvSpPr>
+        <p:spPr>
+          <a:xfrm>
+            <a:off x="6199632" y="2450592"/>
+            <a:ext cx="1627632" cy="228600"/>
+          </a:xfrm>
+          <a:prstGeom prst="rect">
+            <a:avLst/>
+          </a:prstGeom>
+          <a:noFill/>
+          <a:ln/>
+        </p:spPr>
+        <p:txBody>
+          <a:bodyPr wrap="square" lIns="0" tIns="0" rIns="0" bIns="0" rtlCol="0" anchor="ctr"/>
+          <a:lstStyle/>
+          <a:p>
+            <a:pPr marL="0" indent="0" algn="ctr">
+              <a:buNone/>
+            </a:pPr>
+            <a:r>
+              <a:rPr lang="en-US" sz="800" b="1" kern="0" spc="100" dirty="0">
+                <a:solidFill>
+                  <a:srgbClr val="C9A0DC"/>
+                </a:solidFill>
+                <a:latin typeface="Calibri" pitchFamily="34" charset="0"/>
+                <a:ea typeface="Calibri" pitchFamily="34" charset="-122"/>
+                <a:cs typeface="Calibri" pitchFamily="34" charset="-120"/>
+              </a:rPr>
+              <a:t>OCCHI CHIUSI</a:t>
+            </a:r>
+            <a:endParaRPr lang="en-US" sz="800" dirty="0"/>
+          </a:p>
+        </p:txBody>
+      </p:sp>
+      <p:sp>
+        <p:nvSpPr>
+          <p:cNvPr id="22" name="Text 20"/>
+          <p:cNvSpPr txBox="1"/>
+          <p:nvPr/>
+        </p:nvSpPr>
+        <p:spPr>
+          <a:xfrm>
+            <a:off x="6199632" y="2761488"/>
+            <a:ext cx="1627632" cy="320040"/>
+          </a:xfrm>
+          <a:prstGeom prst="rect">
+            <a:avLst/>
+          </a:prstGeom>
+          <a:noFill/>
+          <a:ln/>
+        </p:spPr>
+        <p:txBody>
+          <a:bodyPr wrap="square" lIns="0" tIns="0" rIns="0" bIns="0" rtlCol="0" anchor="ctr"/>
+          <a:lstStyle/>
+          <a:p>
+            <a:pPr marL="0" indent="0" algn="ctr">
+              <a:buNone/>
+            </a:pPr>
+            <a:r>
+              <a:rPr lang="en-US" sz="1600" b="1" dirty="0">
+                <a:solidFill>
+                  <a:srgbClr val="E8EEF7"/>
+                </a:solidFill>
+                <a:latin typeface="Cambria" pitchFamily="34" charset="0"/>
+                <a:ea typeface="Cambria" pitchFamily="34" charset="-122"/>
+                <a:cs typeface="Cambria" pitchFamily="34" charset="-120"/>
+              </a:rPr>
+              <a:t>Mediti</a:t>
+            </a:r>
+            <a:endParaRPr lang="en-US" sz="1600" dirty="0"/>
+          </a:p>
+        </p:txBody>
+      </p:sp>
+      <p:sp>
+        <p:nvSpPr>
+          <p:cNvPr id="23" name="Text 21"/>
+          <p:cNvSpPr txBox="1"/>
+          <p:nvPr/>
+        </p:nvSpPr>
+        <p:spPr>
+          <a:xfrm>
+            <a:off x="6291072" y="3200400"/>
+            <a:ext cx="1444752" cy="1280160"/>
+          </a:xfrm>
+          <a:prstGeom prst="rect">
+            <a:avLst/>
+          </a:prstGeom>
+          <a:noFill/>
+          <a:ln/>
+        </p:spPr>
+        <p:txBody>
+          <a:bodyPr wrap="square" lIns="0" tIns="0" rIns="0" bIns="0" rtlCol="0" anchor="ctr"/>
+          <a:lstStyle/>
+          <a:p>
+            <a:pPr marL="0" indent="0" algn="ctr">
+              <a:lnSpc>
+                <a:spcPct val="120000"/>
+              </a:lnSpc>
+              <a:buNone/>
+            </a:pPr>
+            <a:r>
+              <a:rPr lang="en-US" sz="950" dirty="0">
+                <a:solidFill>
+                  <a:srgbClr val="8A97B0"/>
+                </a:solidFill>
+                <a:latin typeface="Calibri" pitchFamily="34" charset="0"/>
+                <a:ea typeface="Calibri" pitchFamily="34" charset="-122"/>
+                <a:cs typeface="Calibri" pitchFamily="34" charset="-120"/>
+              </a:rPr>
+              <a:t>per quanto vuoi. Il tempo che passi qui conta</a:t>
+            </a:r>
+            <a:endParaRPr lang="en-US" sz="950" dirty="0"/>
+          </a:p>
+        </p:txBody>
+      </p:sp>
+      <p:sp>
+        <p:nvSpPr>
+          <p:cNvPr id="24" name="Shape 22"/>
+          <p:cNvSpPr/>
+          <p:nvPr/>
+        </p:nvSpPr>
+        <p:spPr>
+          <a:xfrm>
+            <a:off x="7863840" y="3451860"/>
+            <a:ext cx="146304" cy="0"/>
+          </a:xfrm>
+          <a:prstGeom prst="line">
+            <a:avLst/>
+          </a:prstGeom>
+          <a:noFill/>
+          <a:ln w="19050">
+            <a:solidFill>
+              <a:srgbClr val="2A3550"/>
+            </a:solidFill>
+            <a:prstDash val="solid"/>
+            <a:tailEnd type="triangle"/>
+          </a:ln>
+        </p:spPr>
+        <p:txBody>
+          <a:bodyPr/>
+          <a:lstStyle/>
+          <a:p>
+            <a:endParaRPr lang="en-IT"/>
+          </a:p>
+        </p:txBody>
+      </p:sp>
+      <p:sp>
+        <p:nvSpPr>
+          <p:cNvPr id="25" name="Shape 23"/>
+          <p:cNvSpPr/>
+          <p:nvPr/>
+        </p:nvSpPr>
+        <p:spPr>
+          <a:xfrm>
+            <a:off x="8028432" y="2286000"/>
+            <a:ext cx="1664208" cy="2331720"/>
+          </a:xfrm>
+          <a:prstGeom prst="roundRect">
+            <a:avLst>
+              <a:gd name="adj" fmla="val 2747"/>
+            </a:avLst>
+          </a:prstGeom>
+          <a:solidFill>
+            <a:srgbClr val="141B33"/>
+          </a:solidFill>
+          <a:ln w="19050">
+            <a:solidFill>
+              <a:srgbClr val="8FD9EC"/>
+            </a:solidFill>
+            <a:prstDash val="solid"/>
+          </a:ln>
+        </p:spPr>
+        <p:txBody>
+          <a:bodyPr/>
+          <a:lstStyle/>
+          <a:p>
+            <a:endParaRPr lang="en-IT"/>
+          </a:p>
+        </p:txBody>
+      </p:sp>
+      <p:sp>
+        <p:nvSpPr>
+          <p:cNvPr id="26" name="Text 24"/>
+          <p:cNvSpPr txBox="1"/>
+          <p:nvPr/>
+        </p:nvSpPr>
+        <p:spPr>
+          <a:xfrm>
+            <a:off x="8046720" y="2450592"/>
+            <a:ext cx="1627632" cy="228600"/>
+          </a:xfrm>
+          <a:prstGeom prst="rect">
+            <a:avLst/>
+          </a:prstGeom>
+          <a:noFill/>
+          <a:ln/>
+        </p:spPr>
+        <p:txBody>
+          <a:bodyPr wrap="square" lIns="0" tIns="0" rIns="0" bIns="0" rtlCol="0" anchor="ctr"/>
+          <a:lstStyle/>
+          <a:p>
+            <a:pPr marL="0" indent="0" algn="ctr">
+              <a:buNone/>
+            </a:pPr>
+            <a:r>
+              <a:rPr lang="en-US" sz="800" b="1" kern="0" spc="100" dirty="0">
+                <a:solidFill>
+                  <a:srgbClr val="8FD9EC"/>
+                </a:solidFill>
+                <a:latin typeface="Calibri" pitchFamily="34" charset="0"/>
+                <a:ea typeface="Calibri" pitchFamily="34" charset="-122"/>
+                <a:cs typeface="Calibri" pitchFamily="34" charset="-120"/>
+              </a:rPr>
+              <a:t>OCCHI APERTI</a:t>
+            </a:r>
+            <a:endParaRPr lang="en-US" sz="800" dirty="0"/>
+          </a:p>
+        </p:txBody>
+      </p:sp>
+      <p:sp>
+        <p:nvSpPr>
+          <p:cNvPr id="27" name="Text 25"/>
+          <p:cNvSpPr txBox="1"/>
+          <p:nvPr/>
+        </p:nvSpPr>
+        <p:spPr>
+          <a:xfrm>
+            <a:off x="8046720" y="2761488"/>
+            <a:ext cx="1627632" cy="320040"/>
+          </a:xfrm>
+          <a:prstGeom prst="rect">
+            <a:avLst/>
+          </a:prstGeom>
+          <a:noFill/>
+          <a:ln/>
+        </p:spPr>
+        <p:txBody>
+          <a:bodyPr wrap="square" lIns="0" tIns="0" rIns="0" bIns="0" rtlCol="0" anchor="ctr"/>
+          <a:lstStyle/>
+          <a:p>
+            <a:pPr marL="0" indent="0" algn="ctr">
+              <a:buNone/>
+            </a:pPr>
+            <a:r>
+              <a:rPr lang="en-US" sz="1600" b="1" dirty="0">
+                <a:solidFill>
+                  <a:srgbClr val="E8EEF7"/>
+                </a:solidFill>
+                <a:latin typeface="Cambria" pitchFamily="34" charset="0"/>
+                <a:ea typeface="Cambria" pitchFamily="34" charset="-122"/>
+                <a:cs typeface="Cambria" pitchFamily="34" charset="-120"/>
+              </a:rPr>
+              <a:t>Appare</a:t>
+            </a:r>
+            <a:endParaRPr lang="en-US" sz="1600" dirty="0"/>
+          </a:p>
+        </p:txBody>
+      </p:sp>
+      <p:sp>
+        <p:nvSpPr>
+          <p:cNvPr id="28" name="Text 26"/>
+          <p:cNvSpPr txBox="1"/>
+          <p:nvPr/>
+        </p:nvSpPr>
+        <p:spPr>
+          <a:xfrm>
+            <a:off x="8138160" y="3200400"/>
+            <a:ext cx="1444752" cy="1280160"/>
+          </a:xfrm>
+          <a:prstGeom prst="rect">
+            <a:avLst/>
+          </a:prstGeom>
+          <a:noFill/>
+          <a:ln/>
+        </p:spPr>
+        <p:txBody>
+          <a:bodyPr wrap="square" lIns="0" tIns="0" rIns="0" bIns="0" rtlCol="0" anchor="ctr"/>
+          <a:lstStyle/>
+          <a:p>
+            <a:pPr marL="0" indent="0" algn="ctr">
+              <a:lnSpc>
+                <a:spcPct val="120000"/>
+              </a:lnSpc>
+              <a:buNone/>
+            </a:pPr>
+            <a:r>
+              <a:rPr lang="en-US" sz="950" dirty="0">
+                <a:solidFill>
+                  <a:srgbClr val="8A97B0"/>
+                </a:solidFill>
+                <a:latin typeface="Calibri" pitchFamily="34" charset="0"/>
+                <a:ea typeface="Calibri" pitchFamily="34" charset="-122"/>
+                <a:cs typeface="Calibri" pitchFamily="34" charset="-120"/>
+              </a:rPr>
+              <a:t>il mandala della tua sessione, che nessun altro avrà</a:t>
+            </a:r>
+            <a:endParaRPr lang="en-US" sz="950" dirty="0"/>
+          </a:p>
+        </p:txBody>
+      </p:sp>
+      <p:sp>
+        <p:nvSpPr>
+          <p:cNvPr id="29" name="Shape 27"/>
+          <p:cNvSpPr/>
+          <p:nvPr/>
+        </p:nvSpPr>
+        <p:spPr>
+          <a:xfrm>
+            <a:off x="9710928" y="3451860"/>
+            <a:ext cx="146304" cy="0"/>
+          </a:xfrm>
+          <a:prstGeom prst="line">
+            <a:avLst/>
+          </a:prstGeom>
+          <a:noFill/>
+          <a:ln w="19050">
+            <a:solidFill>
+              <a:srgbClr val="2A3550"/>
+            </a:solidFill>
+            <a:prstDash val="solid"/>
+            <a:tailEnd type="triangle"/>
+          </a:ln>
+        </p:spPr>
+        <p:txBody>
+          <a:bodyPr/>
+          <a:lstStyle/>
+          <a:p>
+            <a:endParaRPr lang="en-IT"/>
+          </a:p>
+        </p:txBody>
+      </p:sp>
+      <p:sp>
+        <p:nvSpPr>
+          <p:cNvPr id="30" name="Shape 28"/>
+          <p:cNvSpPr/>
+          <p:nvPr/>
+        </p:nvSpPr>
+        <p:spPr>
+          <a:xfrm>
+            <a:off x="9875520" y="2286000"/>
+            <a:ext cx="1664208" cy="2331720"/>
+          </a:xfrm>
+          <a:prstGeom prst="roundRect">
+            <a:avLst>
+              <a:gd name="adj" fmla="val 2747"/>
+            </a:avLst>
+          </a:prstGeom>
+          <a:solidFill>
+            <a:srgbClr val="141B33"/>
+          </a:solidFill>
+          <a:ln w="19050">
+            <a:solidFill>
+              <a:srgbClr val="E8B87F"/>
+            </a:solidFill>
+            <a:prstDash val="solid"/>
+          </a:ln>
+        </p:spPr>
+        <p:txBody>
+          <a:bodyPr/>
+          <a:lstStyle/>
+          <a:p>
+            <a:endParaRPr lang="en-IT"/>
+          </a:p>
+        </p:txBody>
+      </p:sp>
+      <p:sp>
+        <p:nvSpPr>
+          <p:cNvPr id="31" name="Text 29"/>
+          <p:cNvSpPr txBox="1"/>
+          <p:nvPr/>
+        </p:nvSpPr>
+        <p:spPr>
+          <a:xfrm>
+            <a:off x="9893808" y="2450592"/>
+            <a:ext cx="1627632" cy="228600"/>
+          </a:xfrm>
+          <a:prstGeom prst="rect">
+            <a:avLst/>
+          </a:prstGeom>
+          <a:noFill/>
+          <a:ln/>
+        </p:spPr>
+        <p:txBody>
+          <a:bodyPr wrap="square" lIns="0" tIns="0" rIns="0" bIns="0" rtlCol="0" anchor="ctr"/>
+          <a:lstStyle/>
+          <a:p>
+            <a:pPr marL="0" indent="0" algn="ctr">
+              <a:buNone/>
+            </a:pPr>
+            <a:r>
+              <a:rPr lang="en-US" sz="800" b="1" kern="0" spc="100" dirty="0">
+                <a:solidFill>
+                  <a:srgbClr val="E8B87F"/>
+                </a:solidFill>
+                <a:latin typeface="Calibri" pitchFamily="34" charset="0"/>
+                <a:ea typeface="Calibri" pitchFamily="34" charset="-122"/>
+                <a:cs typeface="Calibri" pitchFamily="34" charset="-120"/>
+              </a:rPr>
+              <a:t>IL GESTO</a:t>
+            </a:r>
+            <a:endParaRPr lang="en-US" sz="800" dirty="0"/>
+          </a:p>
+        </p:txBody>
+      </p:sp>
+      <p:sp>
+        <p:nvSpPr>
+          <p:cNvPr id="32" name="Text 30"/>
+          <p:cNvSpPr txBox="1"/>
+          <p:nvPr/>
+        </p:nvSpPr>
+        <p:spPr>
+          <a:xfrm>
+            <a:off x="9893808" y="2761488"/>
+            <a:ext cx="1627632" cy="320040"/>
+          </a:xfrm>
+          <a:prstGeom prst="rect">
+            <a:avLst/>
+          </a:prstGeom>
+          <a:noFill/>
+          <a:ln/>
+        </p:spPr>
+        <p:txBody>
+          <a:bodyPr wrap="square" lIns="0" tIns="0" rIns="0" bIns="0" rtlCol="0" anchor="ctr"/>
+          <a:lstStyle/>
+          <a:p>
+            <a:pPr marL="0" indent="0" algn="ctr">
+              <a:buNone/>
+            </a:pPr>
+            <a:r>
+              <a:rPr lang="en-US" sz="1600" b="1" dirty="0">
+                <a:solidFill>
+                  <a:srgbClr val="E8EEF7"/>
+                </a:solidFill>
+                <a:latin typeface="Cambria" pitchFamily="34" charset="0"/>
+                <a:ea typeface="Cambria" pitchFamily="34" charset="-122"/>
+                <a:cs typeface="Cambria" pitchFamily="34" charset="-120"/>
+              </a:rPr>
+              <a:t>Lo disperdi</a:t>
+            </a:r>
+            <a:endParaRPr lang="en-US" sz="1600" dirty="0"/>
+          </a:p>
+        </p:txBody>
+      </p:sp>
+      <p:sp>
+        <p:nvSpPr>
+          <p:cNvPr id="33" name="Text 31"/>
+          <p:cNvSpPr txBox="1"/>
+          <p:nvPr/>
+        </p:nvSpPr>
+        <p:spPr>
+          <a:xfrm>
+            <a:off x="9985248" y="3200400"/>
+            <a:ext cx="1444752" cy="1280160"/>
+          </a:xfrm>
+          <a:prstGeom prst="rect">
+            <a:avLst/>
+          </a:prstGeom>
+          <a:noFill/>
+          <a:ln/>
+        </p:spPr>
+        <p:txBody>
+          <a:bodyPr wrap="square" lIns="0" tIns="0" rIns="0" bIns="0" rtlCol="0" anchor="ctr"/>
+          <a:lstStyle/>
+          <a:p>
+            <a:pPr marL="0" indent="0" algn="ctr">
+              <a:lnSpc>
+                <a:spcPct val="120000"/>
+              </a:lnSpc>
+              <a:buNone/>
+            </a:pPr>
+            <a:r>
+              <a:rPr lang="en-US" sz="950" dirty="0">
+                <a:solidFill>
+                  <a:srgbClr val="8A97B0"/>
+                </a:solidFill>
+                <a:latin typeface="Calibri" pitchFamily="34" charset="0"/>
+                <a:ea typeface="Calibri" pitchFamily="34" charset="-122"/>
+                <a:cs typeface="Calibri" pitchFamily="34" charset="-120"/>
+              </a:rPr>
+              <a:t>muovendo il volto. Le particelle non tornano indietro</a:t>
+            </a:r>
+            <a:endParaRPr lang="en-US" sz="950" dirty="0"/>
+          </a:p>
+        </p:txBody>
+      </p:sp>
+      <p:sp>
+        <p:nvSpPr>
+          <p:cNvPr id="34" name="Shape 32"/>
+          <p:cNvSpPr/>
+          <p:nvPr/>
+        </p:nvSpPr>
+        <p:spPr>
+          <a:xfrm>
+            <a:off x="640080" y="4983480"/>
+            <a:ext cx="10908792" cy="0"/>
+          </a:xfrm>
+          <a:prstGeom prst="line">
+            <a:avLst/>
+          </a:prstGeom>
+          <a:noFill/>
+          <a:ln w="12700">
+            <a:solidFill>
+              <a:srgbClr val="2A3550"/>
+            </a:solidFill>
+            <a:prstDash val="solid"/>
+          </a:ln>
+        </p:spPr>
+        <p:txBody>
+          <a:bodyPr/>
+          <a:lstStyle/>
+          <a:p>
+            <a:endParaRPr lang="en-IT"/>
+          </a:p>
+        </p:txBody>
+      </p:sp>
+      <p:sp>
+        <p:nvSpPr>
+          <p:cNvPr id="35" name="Text 33"/>
+          <p:cNvSpPr txBox="1"/>
+          <p:nvPr/>
+        </p:nvSpPr>
+        <p:spPr>
+          <a:xfrm>
+            <a:off x="640080" y="5230368"/>
+            <a:ext cx="10908792" cy="1005840"/>
+          </a:xfrm>
+          <a:prstGeom prst="rect">
+            <a:avLst/>
+          </a:prstGeom>
+          <a:noFill/>
+          <a:ln/>
+        </p:spPr>
+        <p:txBody>
+          <a:bodyPr wrap="square" rtlCol="0" anchor="ctr"/>
+          <a:lstStyle/>
+          <a:p>
+            <a:pPr marL="0" indent="0">
+              <a:lnSpc>
+                <a:spcPct val="130000"/>
+              </a:lnSpc>
+              <a:buNone/>
+            </a:pPr>
+            <a:r>
+              <a:rPr lang="en-US" sz="1300" b="1" dirty="0">
+                <a:solidFill>
+                  <a:srgbClr val="E8B87F"/>
+                </a:solidFill>
+                <a:latin typeface="Calibri" pitchFamily="34" charset="0"/>
+                <a:ea typeface="Calibri" pitchFamily="34" charset="-122"/>
+                <a:cs typeface="Calibri" pitchFamily="34" charset="-120"/>
+              </a:rPr>
+              <a:t>Due secondi. </a:t>
+            </a:r>
+            <a:r>
+              <a:rPr lang="en-US" sz="1300" dirty="0">
+                <a:solidFill>
+                  <a:srgbClr val="E8EEF7"/>
+                </a:solidFill>
+                <a:latin typeface="Calibri" pitchFamily="34" charset="0"/>
+                <a:ea typeface="Calibri" pitchFamily="34" charset="-122"/>
+                <a:cs typeface="Calibri" pitchFamily="34" charset="-120"/>
+              </a:rPr>
+              <a:t>Tanto vanno tenuti gli occhi perché il cambiamento conti: sotto quella soglia è un battito di ciglia, non una scelta. E poiché a occhi chiusi lo schermo non esiste, ogni passaggio viene confermato da un suono — una campana grave quando chiudi, una quinta sopra quando riapri.</a:t>
+            </a:r>
+            <a:endParaRPr lang="en-US" sz="1300" dirty="0"/>
+          </a:p>
+        </p:txBody>
+      </p:sp>
+    </p:spTree>
+  </p:cSld>
+  <p:clrMapOvr>
+    <a:masterClrMapping/>
+  </p:clrMapOvr>
+</p:sld>
+</file>
+
+<file path=ppt/slides/slide5.xml><?xml version="1.0" encoding="utf-8"?>
+<p:sld xmlns:a="http://schemas.openxmlformats.org/drawingml/2006/main" xmlns:r="http://schemas.openxmlformats.org/officeDocument/2006/relationships" xmlns:p="http://schemas.openxmlformats.org/presentationml/2006/main">
+  <p:cSld name="Slide 2">
+    <p:bg>
+      <p:bgPr>
+        <a:solidFill>
+          <a:srgbClr val="0B1026"/>
+        </a:solidFill>
+        <a:effectLst/>
+      </p:bgPr>
+    </p:bg>
+    <p:spTree>
+      <p:nvGrpSpPr>
+        <p:cNvPr id="1" name=""/>
+        <p:cNvGrpSpPr/>
+        <p:nvPr/>
+      </p:nvGrpSpPr>
+      <p:grpSpPr>
+        <a:xfrm>
+          <a:off x="0" y="0"/>
+          <a:ext cx="0" cy="0"/>
+          <a:chOff x="0" y="0"/>
+          <a:chExt cx="0" cy="0"/>
+        </a:xfrm>
+      </p:grpSpPr>
+      <p:sp>
+        <p:nvSpPr>
+          <p:cNvPr id="2" name="Text 0"/>
+          <p:cNvSpPr txBox="1"/>
+          <p:nvPr/>
+        </p:nvSpPr>
+        <p:spPr>
+          <a:xfrm>
+            <a:off x="640080" y="384048"/>
+            <a:ext cx="10058400" cy="274320"/>
+          </a:xfrm>
+          <a:prstGeom prst="rect">
+            <a:avLst/>
+          </a:prstGeom>
+          <a:noFill/>
+          <a:ln/>
+        </p:spPr>
+        <p:txBody>
+          <a:bodyPr wrap="square" rtlCol="0" anchor="ctr"/>
+          <a:lstStyle/>
+          <a:p>
+            <a:pPr marL="0" indent="0">
+              <a:buNone/>
+            </a:pPr>
+            <a:r>
+              <a:rPr lang="en-US" sz="1200" b="1" kern="0" spc="200" dirty="0">
+                <a:solidFill>
+                  <a:srgbClr val="8FD9EC"/>
+                </a:solidFill>
+                <a:latin typeface="Calibri" pitchFamily="34" charset="0"/>
+                <a:ea typeface="Calibri" pitchFamily="34" charset="-122"/>
+                <a:cs typeface="Calibri" pitchFamily="34" charset="-120"/>
+              </a:rPr>
+              <a:t>IL PROGETTO</a:t>
+            </a:r>
+            <a:endParaRPr lang="en-US" sz="1200" dirty="0"/>
+          </a:p>
+        </p:txBody>
+      </p:sp>
+      <p:sp>
+        <p:nvSpPr>
+          <p:cNvPr id="3" name="Text 1"/>
+          <p:cNvSpPr txBox="1"/>
+          <p:nvPr/>
+        </p:nvSpPr>
+        <p:spPr>
+          <a:xfrm>
+            <a:off x="640080" y="685800"/>
+            <a:ext cx="10881360" cy="777240"/>
+          </a:xfrm>
+          <a:prstGeom prst="rect">
+            <a:avLst/>
+          </a:prstGeom>
+          <a:noFill/>
+          <a:ln/>
+        </p:spPr>
+        <p:txBody>
+          <a:bodyPr wrap="square" rtlCol="0" anchor="ctr"/>
+          <a:lstStyle/>
+          <a:p>
+            <a:pPr marL="0" indent="0">
+              <a:buNone/>
+            </a:pPr>
+            <a:r>
+              <a:rPr lang="en-US" sz="3400" b="1" dirty="0">
+                <a:solidFill>
+                  <a:srgbClr val="E8EEF7"/>
+                </a:solidFill>
+                <a:latin typeface="Cambria" pitchFamily="34" charset="0"/>
+                <a:ea typeface="Cambria" pitchFamily="34" charset="-122"/>
+                <a:cs typeface="Cambria" pitchFamily="34" charset="-120"/>
+              </a:rPr>
+              <a:t>Perché un mandala</a:t>
+            </a:r>
+            <a:endParaRPr lang="en-US" sz="3400" dirty="0"/>
+          </a:p>
+        </p:txBody>
+      </p:sp>
+      <p:pic>
+        <p:nvPicPr>
+          <p:cNvPr id="4" name="Image 0" descr="/tmp/ppt/mandala_ambra.png"/>
+          <p:cNvPicPr>
+            <a:picLocks noChangeAspect="1"/>
+          </p:cNvPicPr>
+          <p:nvPr/>
+        </p:nvPicPr>
+        <p:blipFill>
+          <a:blip r:embed="rId3"/>
+          <a:stretch>
+            <a:fillRect/>
+          </a:stretch>
+        </p:blipFill>
+        <p:spPr>
+          <a:xfrm>
+            <a:off x="8138160" y="1600200"/>
+            <a:ext cx="3566160" cy="3566160"/>
+          </a:xfrm>
+          <a:prstGeom prst="rect">
+            <a:avLst/>
+          </a:prstGeom>
+        </p:spPr>
+      </p:pic>
+      <p:sp>
+        <p:nvSpPr>
+          <p:cNvPr id="5" name="Text 2"/>
+          <p:cNvSpPr txBox="1"/>
+          <p:nvPr/>
+        </p:nvSpPr>
+        <p:spPr>
+          <a:xfrm>
+            <a:off x="640080" y="1783080"/>
+            <a:ext cx="7040880" cy="2194560"/>
+          </a:xfrm>
+          <a:prstGeom prst="rect">
+            <a:avLst/>
+          </a:prstGeom>
+          <a:noFill/>
+          <a:ln/>
+        </p:spPr>
+        <p:txBody>
+          <a:bodyPr wrap="square" rtlCol="0" anchor="ctr"/>
+          <a:lstStyle/>
+          <a:p>
+            <a:pPr marL="0" indent="0">
+              <a:lnSpc>
+                <a:spcPct val="130000"/>
+              </a:lnSpc>
+              <a:buNone/>
+            </a:pPr>
+            <a:r>
+              <a:rPr lang="en-US" sz="1400" b="1" dirty="0">
+                <a:solidFill>
+                  <a:srgbClr val="E8B87F"/>
+                </a:solidFill>
+                <a:latin typeface="Calibri" pitchFamily="34" charset="0"/>
+                <a:ea typeface="Calibri" pitchFamily="34" charset="-122"/>
+                <a:cs typeface="Calibri" pitchFamily="34" charset="-120"/>
+              </a:rPr>
+              <a:t>Mandala</a:t>
+            </a:r>
+            <a:r>
+              <a:rPr lang="en-US" sz="1400" dirty="0">
+                <a:solidFill>
+                  <a:srgbClr val="E8EEF7"/>
+                </a:solidFill>
+                <a:latin typeface="Calibri" pitchFamily="34" charset="0"/>
+                <a:ea typeface="Calibri" pitchFamily="34" charset="-122"/>
+                <a:cs typeface="Calibri" pitchFamily="34" charset="-120"/>
+              </a:rPr>
+              <a:t> in sanscrito è “cerchio”, e per estensione “mondo”. Una lettura più profonda lo rende </a:t>
+            </a:r>
+            <a:r>
+              <a:rPr lang="en-US" sz="1400" i="1" dirty="0">
+                <a:solidFill>
+                  <a:srgbClr val="8FD9EC"/>
+                </a:solidFill>
+                <a:latin typeface="Calibri" pitchFamily="34" charset="0"/>
+                <a:ea typeface="Calibri" pitchFamily="34" charset="-122"/>
+                <a:cs typeface="Calibri" pitchFamily="34" charset="-120"/>
+              </a:rPr>
+              <a:t>contenitore dell'essenza</a:t>
+            </a:r>
+            <a:r>
+              <a:rPr lang="en-US" sz="1400" dirty="0">
+                <a:solidFill>
+                  <a:srgbClr val="E8EEF7"/>
+                </a:solidFill>
+                <a:latin typeface="Calibri" pitchFamily="34" charset="0"/>
+                <a:ea typeface="Calibri" pitchFamily="34" charset="-122"/>
+                <a:cs typeface="Calibri" pitchFamily="34" charset="-120"/>
+              </a:rPr>
+              <a:t>. Non è un ornamento: è una mappa in cui si entra mentalmente e si procede verso il centro, per poi essere distrutto alla fine. L'insegnamento è che l'attaccamento anche a ciò che è bellissimo produce sofferenza.</a:t>
+            </a:r>
+            <a:endParaRPr lang="en-US" sz="1400" dirty="0"/>
+          </a:p>
+        </p:txBody>
+      </p:sp>
+      <p:sp>
+        <p:nvSpPr>
+          <p:cNvPr id="6" name="Shape 3"/>
+          <p:cNvSpPr/>
+          <p:nvPr/>
+        </p:nvSpPr>
+        <p:spPr>
+          <a:xfrm>
+            <a:off x="640080" y="4434840"/>
+            <a:ext cx="7040880" cy="1371600"/>
+          </a:xfrm>
+          <a:prstGeom prst="roundRect">
+            <a:avLst>
+              <a:gd name="adj" fmla="val 4000"/>
+            </a:avLst>
+          </a:prstGeom>
+          <a:solidFill>
+            <a:srgbClr val="141B33"/>
+          </a:solidFill>
+          <a:ln w="16510">
+            <a:solidFill>
+              <a:srgbClr val="E8B87F"/>
+            </a:solidFill>
+            <a:prstDash val="solid"/>
+          </a:ln>
+        </p:spPr>
+        <p:txBody>
+          <a:bodyPr/>
+          <a:lstStyle/>
+          <a:p>
+            <a:endParaRPr lang="en-IT"/>
+          </a:p>
+        </p:txBody>
+      </p:sp>
+      <p:sp>
+        <p:nvSpPr>
+          <p:cNvPr id="7" name="Text 4"/>
+          <p:cNvSpPr txBox="1"/>
+          <p:nvPr/>
+        </p:nvSpPr>
+        <p:spPr>
+          <a:xfrm>
+            <a:off x="914400" y="4617720"/>
+            <a:ext cx="6492240" cy="1005840"/>
+          </a:xfrm>
+          <a:prstGeom prst="rect">
+            <a:avLst/>
+          </a:prstGeom>
+          <a:noFill/>
+          <a:ln/>
+        </p:spPr>
+        <p:txBody>
+          <a:bodyPr wrap="square" lIns="0" tIns="0" rIns="0" bIns="0" rtlCol="0" anchor="ctr"/>
+          <a:lstStyle/>
+          <a:p>
+            <a:pPr marL="0" indent="0">
+              <a:lnSpc>
+                <a:spcPct val="125000"/>
+              </a:lnSpc>
+              <a:buNone/>
+            </a:pPr>
+            <a:r>
+              <a:rPr lang="en-US" sz="1400" i="1" dirty="0">
+                <a:solidFill>
+                  <a:srgbClr val="E8B87F"/>
+                </a:solidFill>
+                <a:latin typeface="Calibri" pitchFamily="34" charset="0"/>
+                <a:ea typeface="Calibri" pitchFamily="34" charset="-122"/>
+                <a:cs typeface="Calibri" pitchFamily="34" charset="-120"/>
+              </a:rPr>
+              <a:t>Il progetto cerca di fare lo stesso percorso: il tuo volto si scompone, diventa parole, poi mandala. E alla fine sei tu a doverlo lasciare andare, muovendo la testa.</a:t>
+            </a:r>
+            <a:endParaRPr lang="en-US" sz="1400" dirty="0"/>
+          </a:p>
+        </p:txBody>
+      </p:sp>
+    </p:spTree>
+  </p:cSld>
+  <p:clrMapOvr>
+    <a:masterClrMapping/>
+  </p:clrMapOvr>
+</p:sld>
+</file>
+
+<file path=ppt/slides/slide6.xml><?xml version="1.0" encoding="utf-8"?>
+<p:sld xmlns:a="http://schemas.openxmlformats.org/drawingml/2006/main" xmlns:r="http://schemas.openxmlformats.org/officeDocument/2006/relationships" xmlns:p="http://schemas.openxmlformats.org/presentationml/2006/main">
+  <p:cSld name="Slide 3">
+    <p:bg>
+      <p:bgPr>
+        <a:solidFill>
+          <a:srgbClr val="0B1026"/>
+        </a:solidFill>
+        <a:effectLst/>
+      </p:bgPr>
+    </p:bg>
+    <p:spTree>
+      <p:nvGrpSpPr>
+        <p:cNvPr id="1" name=""/>
+        <p:cNvGrpSpPr/>
+        <p:nvPr/>
+      </p:nvGrpSpPr>
+      <p:grpSpPr>
+        <a:xfrm>
+          <a:off x="0" y="0"/>
+          <a:ext cx="0" cy="0"/>
+          <a:chOff x="0" y="0"/>
+          <a:chExt cx="0" cy="0"/>
+        </a:xfrm>
+      </p:grpSpPr>
+      <p:sp>
+        <p:nvSpPr>
+          <p:cNvPr id="2" name="Text 0"/>
+          <p:cNvSpPr txBox="1"/>
+          <p:nvPr/>
+        </p:nvSpPr>
+        <p:spPr>
+          <a:xfrm>
+            <a:off x="640080" y="384048"/>
+            <a:ext cx="10058400" cy="274320"/>
+          </a:xfrm>
+          <a:prstGeom prst="rect">
+            <a:avLst/>
+          </a:prstGeom>
+          <a:noFill/>
+          <a:ln/>
+        </p:spPr>
+        <p:txBody>
+          <a:bodyPr wrap="square" rtlCol="0" anchor="ctr"/>
+          <a:lstStyle/>
+          <a:p>
+            <a:pPr marL="0" indent="0">
+              <a:buNone/>
+            </a:pPr>
+            <a:r>
+              <a:rPr lang="en-US" sz="1200" b="1" kern="0" spc="200" dirty="0">
+                <a:solidFill>
+                  <a:srgbClr val="8FD9EC"/>
+                </a:solidFill>
+                <a:latin typeface="Calibri" pitchFamily="34" charset="0"/>
+                <a:ea typeface="Calibri" pitchFamily="34" charset="-122"/>
+                <a:cs typeface="Calibri" pitchFamily="34" charset="-120"/>
+              </a:rPr>
               <a:t>IL PROGETTO</a:t>
             </a:r>
             <a:endParaRPr lang="en-US" sz="1200" dirty="0"/>
@@ -7349,7 +13179,7 @@
 </p:sld>
 </file>
 
-<file path=ppt/slides/slide4.xml><?xml version="1.0" encoding="utf-8"?>
+<file path=ppt/slides/slide7.xml><?xml version="1.0" encoding="utf-8"?>
 <p:sld xmlns:a="http://schemas.openxmlformats.org/drawingml/2006/main" xmlns:r="http://schemas.openxmlformats.org/officeDocument/2006/relationships" xmlns:p="http://schemas.openxmlformats.org/presentationml/2006/main">
   <p:cSld name="Slide 4">
     <p:bg>
@@ -8493,7 +14323,7 @@
 </p:sld>
 </file>
 
-<file path=ppt/slides/slide5.xml><?xml version="1.0" encoding="utf-8"?>
+<file path=ppt/slides/slide8.xml><?xml version="1.0" encoding="utf-8"?>
 <p:sld xmlns:a="http://schemas.openxmlformats.org/drawingml/2006/main" xmlns:r="http://schemas.openxmlformats.org/officeDocument/2006/relationships" xmlns:p="http://schemas.openxmlformats.org/presentationml/2006/main">
   <p:cSld name="Slide 5">
     <p:bg>
@@ -10803,7 +16633,7 @@
                 <a:ea typeface="Calibri" pitchFamily="34" charset="-122"/>
                 <a:cs typeface="Calibri" pitchFamily="34" charset="-120"/>
               </a:rPr>
-              <a:t>IL PROGETTO</a:t>
+              <a:t>SOLUZIONE TECNICA</a:t>
             </a:r>
             <a:endParaRPr lang="en-US" sz="1200" dirty="0"/>
           </a:p>
@@ -10939,7 +16769,7 @@
 </p:sld>
 </file>
 
-<file path=ppt/slides/slide6.xml><?xml version="1.0" encoding="utf-8"?>
+<file path=ppt/slides/slide9.xml><?xml version="1.0" encoding="utf-8"?>
 <p:sld xmlns:a="http://schemas.openxmlformats.org/drawingml/2006/main" xmlns:r="http://schemas.openxmlformats.org/officeDocument/2006/relationships" xmlns:p="http://schemas.openxmlformats.org/presentationml/2006/main">
   <p:cSld name="Slide 6">
     <p:bg>
@@ -12336,3027 +18166,6 @@
               <a:t>rapporto di apertura</a:t>
             </a:r>
             <a:endParaRPr lang="en-US" sz="950" dirty="0"/>
-          </a:p>
-        </p:txBody>
-      </p:sp>
-    </p:spTree>
-  </p:cSld>
-  <p:clrMapOvr>
-    <a:masterClrMapping/>
-  </p:clrMapOvr>
-</p:sld>
-</file>
-
-<file path=ppt/slides/slide7.xml><?xml version="1.0" encoding="utf-8"?>
-<p:sld xmlns:a="http://schemas.openxmlformats.org/drawingml/2006/main" xmlns:r="http://schemas.openxmlformats.org/officeDocument/2006/relationships" xmlns:p="http://schemas.openxmlformats.org/presentationml/2006/main">
-  <p:cSld name="Slide 7">
-    <p:bg>
-      <p:bgPr>
-        <a:solidFill>
-          <a:srgbClr val="0B1026"/>
-        </a:solidFill>
-        <a:effectLst/>
-      </p:bgPr>
-    </p:bg>
-    <p:spTree>
-      <p:nvGrpSpPr>
-        <p:cNvPr id="1" name=""/>
-        <p:cNvGrpSpPr/>
-        <p:nvPr/>
-      </p:nvGrpSpPr>
-      <p:grpSpPr>
-        <a:xfrm>
-          <a:off x="0" y="0"/>
-          <a:ext cx="0" cy="0"/>
-          <a:chOff x="0" y="0"/>
-          <a:chExt cx="0" cy="0"/>
-        </a:xfrm>
-      </p:grpSpPr>
-      <p:sp>
-        <p:nvSpPr>
-          <p:cNvPr id="2" name="Text 0"/>
-          <p:cNvSpPr txBox="1"/>
-          <p:nvPr/>
-        </p:nvSpPr>
-        <p:spPr>
-          <a:xfrm>
-            <a:off x="640080" y="384048"/>
-            <a:ext cx="10058400" cy="274320"/>
-          </a:xfrm>
-          <a:prstGeom prst="rect">
-            <a:avLst/>
-          </a:prstGeom>
-          <a:noFill/>
-          <a:ln/>
-        </p:spPr>
-        <p:txBody>
-          <a:bodyPr wrap="square" rtlCol="0" anchor="ctr"/>
-          <a:lstStyle/>
-          <a:p>
-            <a:pPr marL="0" indent="0">
-              <a:buNone/>
-            </a:pPr>
-            <a:r>
-              <a:rPr lang="en-US" sz="1200" b="1" kern="0" spc="200" dirty="0">
-                <a:solidFill>
-                  <a:srgbClr val="8FD9EC"/>
-                </a:solidFill>
-                <a:latin typeface="Calibri" pitchFamily="34" charset="0"/>
-                <a:ea typeface="Calibri" pitchFamily="34" charset="-122"/>
-                <a:cs typeface="Calibri" pitchFamily="34" charset="-120"/>
-              </a:rPr>
-              <a:t>PERCEZIONE</a:t>
-            </a:r>
-            <a:endParaRPr lang="en-US" sz="1200" dirty="0"/>
-          </a:p>
-        </p:txBody>
-      </p:sp>
-      <p:sp>
-        <p:nvSpPr>
-          <p:cNvPr id="3" name="Text 1"/>
-          <p:cNvSpPr txBox="1"/>
-          <p:nvPr/>
-        </p:nvSpPr>
-        <p:spPr>
-          <a:xfrm>
-            <a:off x="6050280" y="813522"/>
-            <a:ext cx="5257800" cy="777240"/>
-          </a:xfrm>
-          <a:prstGeom prst="rect">
-            <a:avLst/>
-          </a:prstGeom>
-          <a:noFill/>
-          <a:ln/>
-        </p:spPr>
-        <p:txBody>
-          <a:bodyPr wrap="square" rtlCol="0" anchor="ctr"/>
-          <a:lstStyle/>
-          <a:p>
-            <a:pPr marL="0" indent="0">
-              <a:buNone/>
-            </a:pPr>
-            <a:r>
-              <a:rPr lang="en-US" sz="3400" b="1" dirty="0" err="1">
-                <a:solidFill>
-                  <a:srgbClr val="E8EEF7"/>
-                </a:solidFill>
-                <a:latin typeface="Cambria" pitchFamily="34" charset="0"/>
-                <a:ea typeface="Cambria" pitchFamily="34" charset="-122"/>
-                <a:cs typeface="Cambria" pitchFamily="34" charset="-120"/>
-              </a:rPr>
-              <a:t>Dispersione</a:t>
-            </a:r>
-            <a:r>
-              <a:rPr lang="en-US" sz="3400" b="1" dirty="0">
-                <a:solidFill>
-                  <a:srgbClr val="E8EEF7"/>
-                </a:solidFill>
-                <a:latin typeface="Cambria" pitchFamily="34" charset="0"/>
-                <a:ea typeface="Cambria" pitchFamily="34" charset="-122"/>
-                <a:cs typeface="Cambria" pitchFamily="34" charset="-120"/>
-              </a:rPr>
-              <a:t> Mandala</a:t>
-            </a:r>
-            <a:endParaRPr lang="en-US" sz="3400" dirty="0"/>
-          </a:p>
-        </p:txBody>
-      </p:sp>
-      <p:sp>
-        <p:nvSpPr>
-          <p:cNvPr id="4" name="Shape 2"/>
-          <p:cNvSpPr/>
-          <p:nvPr/>
-        </p:nvSpPr>
-        <p:spPr>
-          <a:xfrm>
-            <a:off x="640080" y="1737360"/>
-            <a:ext cx="5257800" cy="2148840"/>
-          </a:xfrm>
-          <a:prstGeom prst="roundRect">
-            <a:avLst>
-              <a:gd name="adj" fmla="val 2553"/>
-            </a:avLst>
-          </a:prstGeom>
-          <a:solidFill>
-            <a:srgbClr val="141B33"/>
-          </a:solidFill>
-          <a:ln w="16510">
-            <a:solidFill>
-              <a:srgbClr val="8FD9EC"/>
-            </a:solidFill>
-            <a:prstDash val="solid"/>
-          </a:ln>
-        </p:spPr>
-        <p:txBody>
-          <a:bodyPr/>
-          <a:lstStyle/>
-          <a:p>
-            <a:endParaRPr lang="en-IT"/>
-          </a:p>
-        </p:txBody>
-      </p:sp>
-      <p:sp>
-        <p:nvSpPr>
-          <p:cNvPr id="5" name="Text 3"/>
-          <p:cNvSpPr txBox="1"/>
-          <p:nvPr/>
-        </p:nvSpPr>
-        <p:spPr>
-          <a:xfrm>
-            <a:off x="896112" y="1938528"/>
-            <a:ext cx="4800600" cy="310896"/>
-          </a:xfrm>
-          <a:prstGeom prst="rect">
-            <a:avLst/>
-          </a:prstGeom>
-          <a:noFill/>
-          <a:ln/>
-        </p:spPr>
-        <p:txBody>
-          <a:bodyPr wrap="square" lIns="0" tIns="0" rIns="0" bIns="0" rtlCol="0" anchor="ctr"/>
-          <a:lstStyle/>
-          <a:p>
-            <a:pPr marL="0" indent="0">
-              <a:buNone/>
-            </a:pPr>
-            <a:r>
-              <a:rPr lang="en-US" sz="1400" b="1" dirty="0">
-                <a:solidFill>
-                  <a:srgbClr val="8FD9EC"/>
-                </a:solidFill>
-                <a:latin typeface="Calibri" pitchFamily="34" charset="0"/>
-                <a:ea typeface="Calibri" pitchFamily="34" charset="-122"/>
-                <a:cs typeface="Calibri" pitchFamily="34" charset="-120"/>
-              </a:rPr>
-              <a:t>ascolto.py  ·  la voce </a:t>
-            </a:r>
-            <a:r>
-              <a:rPr lang="en-US" sz="1400" b="1" dirty="0" err="1">
-                <a:solidFill>
-                  <a:srgbClr val="8FD9EC"/>
-                </a:solidFill>
-                <a:latin typeface="Calibri" pitchFamily="34" charset="0"/>
-                <a:ea typeface="Calibri" pitchFamily="34" charset="-122"/>
-                <a:cs typeface="Calibri" pitchFamily="34" charset="-120"/>
-              </a:rPr>
-              <a:t>dell’utente</a:t>
-            </a:r>
-            <a:endParaRPr lang="en-US" sz="1400" dirty="0"/>
-          </a:p>
-        </p:txBody>
-      </p:sp>
-      <p:sp>
-        <p:nvSpPr>
-          <p:cNvPr id="6" name="Text 4"/>
-          <p:cNvSpPr txBox="1"/>
-          <p:nvPr/>
-        </p:nvSpPr>
-        <p:spPr>
-          <a:xfrm>
-            <a:off x="896112" y="2304288"/>
-            <a:ext cx="4800600" cy="1371600"/>
-          </a:xfrm>
-          <a:prstGeom prst="rect">
-            <a:avLst/>
-          </a:prstGeom>
-          <a:noFill/>
-          <a:ln/>
-        </p:spPr>
-        <p:txBody>
-          <a:bodyPr wrap="square" lIns="0" tIns="0" rIns="0" bIns="0" rtlCol="0" anchor="ctr"/>
-          <a:lstStyle/>
-          <a:p>
-            <a:pPr marL="0" indent="0">
-              <a:lnSpc>
-                <a:spcPct val="115000"/>
-              </a:lnSpc>
-              <a:buNone/>
-            </a:pPr>
-            <a:r>
-              <a:rPr lang="en-US" sz="1200" dirty="0">
-                <a:solidFill>
-                  <a:srgbClr val="E8EEF7"/>
-                </a:solidFill>
-                <a:latin typeface="Calibri" pitchFamily="34" charset="0"/>
-                <a:ea typeface="Calibri" pitchFamily="34" charset="-122"/>
-                <a:cs typeface="Calibri" pitchFamily="34" charset="-120"/>
-              </a:rPr>
-              <a:t>Whisper gira in locale, modello small, int8 su CPU. La registrazione parte quando gli occhi si chiudono e finisce quando si riaprono. L'audio non esce mai dal computer: esce solo la trascrizione.</a:t>
-            </a:r>
-            <a:endParaRPr lang="en-US" sz="1200" dirty="0"/>
-          </a:p>
-        </p:txBody>
-      </p:sp>
-      <p:sp>
-        <p:nvSpPr>
-          <p:cNvPr id="7" name="Shape 5"/>
-          <p:cNvSpPr/>
-          <p:nvPr/>
-        </p:nvSpPr>
-        <p:spPr>
-          <a:xfrm>
-            <a:off x="6172200" y="1737360"/>
-            <a:ext cx="5257800" cy="2148840"/>
-          </a:xfrm>
-          <a:prstGeom prst="roundRect">
-            <a:avLst>
-              <a:gd name="adj" fmla="val 2553"/>
-            </a:avLst>
-          </a:prstGeom>
-          <a:solidFill>
-            <a:srgbClr val="141B33"/>
-          </a:solidFill>
-          <a:ln w="16510">
-            <a:solidFill>
-              <a:srgbClr val="8FD9EC"/>
-            </a:solidFill>
-            <a:prstDash val="solid"/>
-          </a:ln>
-        </p:spPr>
-        <p:txBody>
-          <a:bodyPr/>
-          <a:lstStyle/>
-          <a:p>
-            <a:endParaRPr lang="en-IT"/>
-          </a:p>
-        </p:txBody>
-      </p:sp>
-      <p:sp>
-        <p:nvSpPr>
-          <p:cNvPr id="8" name="Text 6"/>
-          <p:cNvSpPr txBox="1"/>
-          <p:nvPr/>
-        </p:nvSpPr>
-        <p:spPr>
-          <a:xfrm>
-            <a:off x="6428232" y="1938528"/>
-            <a:ext cx="4800600" cy="310896"/>
-          </a:xfrm>
-          <a:prstGeom prst="rect">
-            <a:avLst/>
-          </a:prstGeom>
-          <a:noFill/>
-          <a:ln/>
-        </p:spPr>
-        <p:txBody>
-          <a:bodyPr wrap="square" lIns="0" tIns="0" rIns="0" bIns="0" rtlCol="0" anchor="ctr"/>
-          <a:lstStyle/>
-          <a:p>
-            <a:pPr marL="0" indent="0">
-              <a:buNone/>
-            </a:pPr>
-            <a:r>
-              <a:rPr lang="en-US" sz="1400" b="1" dirty="0">
-                <a:solidFill>
-                  <a:srgbClr val="8FD9EC"/>
-                </a:solidFill>
-                <a:latin typeface="Calibri" pitchFamily="34" charset="0"/>
-                <a:ea typeface="Calibri" pitchFamily="34" charset="-122"/>
-                <a:cs typeface="Calibri" pitchFamily="34" charset="-120"/>
-              </a:rPr>
-              <a:t>movimento.py  ·  </a:t>
-            </a:r>
-            <a:r>
-              <a:rPr lang="en-US" sz="1400" b="1" dirty="0" err="1">
-                <a:solidFill>
-                  <a:srgbClr val="8FD9EC"/>
-                </a:solidFill>
-                <a:latin typeface="Calibri" pitchFamily="34" charset="0"/>
-                <a:ea typeface="Calibri" pitchFamily="34" charset="-122"/>
-                <a:cs typeface="Calibri" pitchFamily="34" charset="-120"/>
-              </a:rPr>
-              <a:t>gesto</a:t>
-            </a:r>
-            <a:r>
-              <a:rPr lang="en-US" sz="1400" b="1" dirty="0">
-                <a:solidFill>
-                  <a:srgbClr val="8FD9EC"/>
-                </a:solidFill>
-                <a:latin typeface="Calibri" pitchFamily="34" charset="0"/>
-                <a:ea typeface="Calibri" pitchFamily="34" charset="-122"/>
-                <a:cs typeface="Calibri" pitchFamily="34" charset="-120"/>
-              </a:rPr>
-              <a:t> per </a:t>
-            </a:r>
-            <a:r>
-              <a:rPr lang="en-US" sz="1400" b="1" dirty="0" err="1">
-                <a:solidFill>
-                  <a:srgbClr val="8FD9EC"/>
-                </a:solidFill>
-                <a:latin typeface="Calibri" pitchFamily="34" charset="0"/>
-                <a:ea typeface="Calibri" pitchFamily="34" charset="-122"/>
-                <a:cs typeface="Calibri" pitchFamily="34" charset="-120"/>
-              </a:rPr>
-              <a:t>disperdere</a:t>
-            </a:r>
-            <a:r>
-              <a:rPr lang="en-US" sz="1400" b="1" dirty="0">
-                <a:solidFill>
-                  <a:srgbClr val="8FD9EC"/>
-                </a:solidFill>
-                <a:latin typeface="Calibri" pitchFamily="34" charset="0"/>
-                <a:ea typeface="Calibri" pitchFamily="34" charset="-122"/>
-                <a:cs typeface="Calibri" pitchFamily="34" charset="-120"/>
-              </a:rPr>
-              <a:t> Mandala</a:t>
-            </a:r>
-            <a:endParaRPr lang="en-US" sz="1400" dirty="0"/>
-          </a:p>
-        </p:txBody>
-      </p:sp>
-      <p:sp>
-        <p:nvSpPr>
-          <p:cNvPr id="9" name="Text 7"/>
-          <p:cNvSpPr txBox="1"/>
-          <p:nvPr/>
-        </p:nvSpPr>
-        <p:spPr>
-          <a:xfrm>
-            <a:off x="6428232" y="2304288"/>
-            <a:ext cx="4800600" cy="1371600"/>
-          </a:xfrm>
-          <a:prstGeom prst="rect">
-            <a:avLst/>
-          </a:prstGeom>
-          <a:noFill/>
-          <a:ln/>
-        </p:spPr>
-        <p:txBody>
-          <a:bodyPr wrap="square" lIns="0" tIns="0" rIns="0" bIns="0" rtlCol="0" anchor="ctr"/>
-          <a:lstStyle/>
-          <a:p>
-            <a:pPr marL="0" indent="0">
-              <a:lnSpc>
-                <a:spcPct val="115000"/>
-              </a:lnSpc>
-              <a:buNone/>
-            </a:pPr>
-            <a:r>
-              <a:rPr lang="en-US" sz="1200" dirty="0">
-                <a:solidFill>
-                  <a:srgbClr val="E8EEF7"/>
-                </a:solidFill>
-                <a:latin typeface="Calibri" pitchFamily="34" charset="0"/>
-                <a:ea typeface="Calibri" pitchFamily="34" charset="-122"/>
-                <a:cs typeface="Calibri" pitchFamily="34" charset="-120"/>
-              </a:rPr>
-              <a:t>Dalla punta del naso — il punto più sporgente dei 478 — ricava quanta energia c'è nel movimento. Sotto una soglia non conta: è respiro, non volontà.</a:t>
-            </a:r>
-            <a:endParaRPr lang="en-US" sz="1200" dirty="0"/>
-          </a:p>
-        </p:txBody>
-      </p:sp>
-      <p:sp>
-        <p:nvSpPr>
-          <p:cNvPr id="10" name="Text 8"/>
-          <p:cNvSpPr txBox="1"/>
-          <p:nvPr/>
-        </p:nvSpPr>
-        <p:spPr>
-          <a:xfrm>
-            <a:off x="640080" y="4206240"/>
-            <a:ext cx="10881360" cy="365760"/>
-          </a:xfrm>
-          <a:prstGeom prst="rect">
-            <a:avLst/>
-          </a:prstGeom>
-          <a:noFill/>
-          <a:ln/>
-        </p:spPr>
-        <p:txBody>
-          <a:bodyPr wrap="square" rtlCol="0" anchor="ctr"/>
-          <a:lstStyle/>
-          <a:p>
-            <a:pPr marL="0" indent="0">
-              <a:buNone/>
-            </a:pPr>
-            <a:r>
-              <a:rPr lang="en-US" sz="1700" b="1" dirty="0">
-                <a:solidFill>
-                  <a:srgbClr val="E8B87F"/>
-                </a:solidFill>
-                <a:latin typeface="Calibri" pitchFamily="34" charset="0"/>
-                <a:ea typeface="Calibri" pitchFamily="34" charset="-122"/>
-                <a:cs typeface="Calibri" pitchFamily="34" charset="-120"/>
-              </a:rPr>
-              <a:t>Tre flussi audio aperti una volta sola</a:t>
-            </a:r>
-            <a:endParaRPr lang="en-US" sz="1700" dirty="0"/>
-          </a:p>
-        </p:txBody>
-      </p:sp>
-      <p:sp>
-        <p:nvSpPr>
-          <p:cNvPr id="11" name="Text 9"/>
-          <p:cNvSpPr txBox="1"/>
-          <p:nvPr/>
-        </p:nvSpPr>
-        <p:spPr>
-          <a:xfrm>
-            <a:off x="640080" y="4663440"/>
-            <a:ext cx="10881360" cy="1005840"/>
-          </a:xfrm>
-          <a:prstGeom prst="rect">
-            <a:avLst/>
-          </a:prstGeom>
-          <a:noFill/>
-          <a:ln/>
-        </p:spPr>
-        <p:txBody>
-          <a:bodyPr wrap="square" rtlCol="0" anchor="ctr"/>
-          <a:lstStyle/>
-          <a:p>
-            <a:pPr marL="0" indent="0">
-              <a:lnSpc>
-                <a:spcPct val="125000"/>
-              </a:lnSpc>
-              <a:buNone/>
-            </a:pPr>
-            <a:r>
-              <a:rPr lang="en-US" sz="1350" dirty="0">
-                <a:solidFill>
-                  <a:srgbClr val="E8EEF7"/>
-                </a:solidFill>
-                <a:latin typeface="Calibri" pitchFamily="34" charset="0"/>
-                <a:ea typeface="Calibri" pitchFamily="34" charset="-122"/>
-                <a:cs typeface="Calibri" pitchFamily="34" charset="-120"/>
-              </a:rPr>
-              <a:t>Aprire o chiudere un flusso mentre un altro suona fa riconfigurare la scheda audio, e si sente come un “click” </a:t>
-            </a:r>
-            <a:r>
-              <a:rPr lang="en-US" sz="1350" dirty="0" err="1">
-                <a:solidFill>
-                  <a:srgbClr val="E8EEF7"/>
-                </a:solidFill>
-                <a:latin typeface="Calibri" pitchFamily="34" charset="0"/>
-                <a:ea typeface="Calibri" pitchFamily="34" charset="-122"/>
-                <a:cs typeface="Calibri" pitchFamily="34" charset="-120"/>
-              </a:rPr>
-              <a:t>fastidioso</a:t>
-            </a:r>
-            <a:r>
-              <a:rPr lang="en-US" sz="1350" dirty="0">
-                <a:solidFill>
-                  <a:srgbClr val="E8EEF7"/>
-                </a:solidFill>
-                <a:latin typeface="Calibri" pitchFamily="34" charset="0"/>
-                <a:ea typeface="Calibri" pitchFamily="34" charset="-122"/>
-                <a:cs typeface="Calibri" pitchFamily="34" charset="-120"/>
-              </a:rPr>
-              <a:t>. </a:t>
-            </a:r>
-            <a:r>
-              <a:rPr lang="en-US" sz="1350" dirty="0" err="1">
-                <a:solidFill>
-                  <a:srgbClr val="E8EEF7"/>
-                </a:solidFill>
-                <a:latin typeface="Calibri" pitchFamily="34" charset="0"/>
-                <a:ea typeface="Calibri" pitchFamily="34" charset="-122"/>
-                <a:cs typeface="Calibri" pitchFamily="34" charset="-120"/>
-              </a:rPr>
-              <a:t>Soluzione</a:t>
-            </a:r>
-            <a:r>
-              <a:rPr lang="en-US" sz="1350" dirty="0">
-                <a:solidFill>
-                  <a:srgbClr val="E8EEF7"/>
-                </a:solidFill>
-                <a:latin typeface="Calibri" pitchFamily="34" charset="0"/>
-                <a:ea typeface="Calibri" pitchFamily="34" charset="-122"/>
-                <a:cs typeface="Calibri" pitchFamily="34" charset="-120"/>
-              </a:rPr>
-              <a:t>: </a:t>
-            </a:r>
-            <a:r>
-              <a:rPr lang="en-US" sz="1350" dirty="0" err="1">
-                <a:solidFill>
-                  <a:srgbClr val="E8EEF7"/>
-                </a:solidFill>
-                <a:latin typeface="Calibri" pitchFamily="34" charset="0"/>
-                <a:ea typeface="Calibri" pitchFamily="34" charset="-122"/>
-                <a:cs typeface="Calibri" pitchFamily="34" charset="-120"/>
-              </a:rPr>
-              <a:t>microfono</a:t>
-            </a:r>
-            <a:r>
-              <a:rPr lang="en-US" sz="1350" dirty="0">
-                <a:solidFill>
-                  <a:srgbClr val="E8EEF7"/>
-                </a:solidFill>
-                <a:latin typeface="Calibri" pitchFamily="34" charset="0"/>
-                <a:ea typeface="Calibri" pitchFamily="34" charset="-122"/>
-                <a:cs typeface="Calibri" pitchFamily="34" charset="-120"/>
-              </a:rPr>
-              <a:t>, tappeto musicale e traccia della meditazione si aprono all'avvio e restano aperti fino alla fine: quello che si accende e si spegne è solo un interruttore.</a:t>
-            </a:r>
-            <a:endParaRPr lang="en-US" sz="1350" dirty="0"/>
-          </a:p>
-        </p:txBody>
-      </p:sp>
-      <p:sp>
-        <p:nvSpPr>
-          <p:cNvPr id="13" name="Text 1">
-            <a:extLst>
-              <a:ext uri="{FF2B5EF4-FFF2-40B4-BE49-F238E27FC236}">
-                <a16:creationId xmlns:a16="http://schemas.microsoft.com/office/drawing/2014/main" id="{4F867328-C7ED-7DF5-1D68-4C4EEDCA60DB}"/>
-              </a:ext>
-            </a:extLst>
-          </p:cNvPr>
-          <p:cNvSpPr txBox="1"/>
-          <p:nvPr/>
-        </p:nvSpPr>
-        <p:spPr>
-          <a:xfrm>
-            <a:off x="792480" y="838200"/>
-            <a:ext cx="5257800" cy="777240"/>
-          </a:xfrm>
-          <a:prstGeom prst="rect">
-            <a:avLst/>
-          </a:prstGeom>
-          <a:noFill/>
-          <a:ln/>
-        </p:spPr>
-        <p:txBody>
-          <a:bodyPr wrap="square" rtlCol="0" anchor="ctr"/>
-          <a:lstStyle/>
-          <a:p>
-            <a:pPr marL="0" indent="0">
-              <a:buNone/>
-            </a:pPr>
-            <a:r>
-              <a:rPr lang="en-US" sz="3400" b="1" dirty="0" err="1">
-                <a:solidFill>
-                  <a:srgbClr val="E8EEF7"/>
-                </a:solidFill>
-                <a:latin typeface="Cambria" pitchFamily="34" charset="0"/>
-                <a:ea typeface="Cambria" pitchFamily="34" charset="-122"/>
-                <a:cs typeface="Cambria" pitchFamily="34" charset="-120"/>
-              </a:rPr>
-              <a:t>Microfono</a:t>
-            </a:r>
-            <a:r>
-              <a:rPr lang="en-US" sz="3400" b="1" dirty="0">
-                <a:solidFill>
-                  <a:srgbClr val="E8EEF7"/>
-                </a:solidFill>
-                <a:latin typeface="Cambria" pitchFamily="34" charset="0"/>
-                <a:ea typeface="Cambria" pitchFamily="34" charset="-122"/>
-                <a:cs typeface="Cambria" pitchFamily="34" charset="-120"/>
-              </a:rPr>
-              <a:t> e Whisper</a:t>
-            </a:r>
-            <a:endParaRPr lang="en-US" sz="3400" dirty="0"/>
-          </a:p>
-        </p:txBody>
-      </p:sp>
-    </p:spTree>
-  </p:cSld>
-  <p:clrMapOvr>
-    <a:masterClrMapping/>
-  </p:clrMapOvr>
-</p:sld>
-</file>
-
-<file path=ppt/slides/slide8.xml><?xml version="1.0" encoding="utf-8"?>
-<p:sld xmlns:a="http://schemas.openxmlformats.org/drawingml/2006/main" xmlns:r="http://schemas.openxmlformats.org/officeDocument/2006/relationships" xmlns:p="http://schemas.openxmlformats.org/presentationml/2006/main">
-  <p:cSld name="Slide 8">
-    <p:bg>
-      <p:bgPr>
-        <a:solidFill>
-          <a:srgbClr val="0B1026"/>
-        </a:solidFill>
-        <a:effectLst/>
-      </p:bgPr>
-    </p:bg>
-    <p:spTree>
-      <p:nvGrpSpPr>
-        <p:cNvPr id="1" name=""/>
-        <p:cNvGrpSpPr/>
-        <p:nvPr/>
-      </p:nvGrpSpPr>
-      <p:grpSpPr>
-        <a:xfrm>
-          <a:off x="0" y="0"/>
-          <a:ext cx="0" cy="0"/>
-          <a:chOff x="0" y="0"/>
-          <a:chExt cx="0" cy="0"/>
-        </a:xfrm>
-      </p:grpSpPr>
-      <p:sp>
-        <p:nvSpPr>
-          <p:cNvPr id="2" name="Text 0"/>
-          <p:cNvSpPr txBox="1"/>
-          <p:nvPr/>
-        </p:nvSpPr>
-        <p:spPr>
-          <a:xfrm>
-            <a:off x="640080" y="384048"/>
-            <a:ext cx="10058400" cy="274320"/>
-          </a:xfrm>
-          <a:prstGeom prst="rect">
-            <a:avLst/>
-          </a:prstGeom>
-          <a:noFill/>
-          <a:ln/>
-        </p:spPr>
-        <p:txBody>
-          <a:bodyPr wrap="square" rtlCol="0" anchor="ctr"/>
-          <a:lstStyle/>
-          <a:p>
-            <a:pPr marL="0" indent="0">
-              <a:buNone/>
-            </a:pPr>
-            <a:r>
-              <a:rPr lang="en-US" sz="1200" b="1" kern="0" spc="200" dirty="0">
-                <a:solidFill>
-                  <a:srgbClr val="8FD9EC"/>
-                </a:solidFill>
-                <a:latin typeface="Calibri" pitchFamily="34" charset="0"/>
-                <a:ea typeface="Calibri" pitchFamily="34" charset="-122"/>
-                <a:cs typeface="Calibri" pitchFamily="34" charset="-120"/>
-              </a:rPr>
-              <a:t>RAZIONALITÀ</a:t>
-            </a:r>
-            <a:endParaRPr lang="en-US" sz="1200" dirty="0"/>
-          </a:p>
-        </p:txBody>
-      </p:sp>
-      <p:sp>
-        <p:nvSpPr>
-          <p:cNvPr id="3" name="Text 1"/>
-          <p:cNvSpPr txBox="1"/>
-          <p:nvPr/>
-        </p:nvSpPr>
-        <p:spPr>
-          <a:xfrm>
-            <a:off x="640080" y="685800"/>
-            <a:ext cx="10881360" cy="777240"/>
-          </a:xfrm>
-          <a:prstGeom prst="rect">
-            <a:avLst/>
-          </a:prstGeom>
-          <a:noFill/>
-          <a:ln/>
-        </p:spPr>
-        <p:txBody>
-          <a:bodyPr wrap="square" rtlCol="0" anchor="ctr"/>
-          <a:lstStyle/>
-          <a:p>
-            <a:pPr marL="0" indent="0">
-              <a:buNone/>
-            </a:pPr>
-            <a:r>
-              <a:rPr lang="en-US" sz="3400" b="1" dirty="0" err="1">
-                <a:solidFill>
-                  <a:srgbClr val="E8EEF7"/>
-                </a:solidFill>
-                <a:latin typeface="Cambria" pitchFamily="34" charset="0"/>
-                <a:ea typeface="Cambria" pitchFamily="34" charset="-122"/>
-                <a:cs typeface="Cambria" pitchFamily="34" charset="-120"/>
-              </a:rPr>
-              <a:t>Transitional</a:t>
-            </a:r>
-            <a:r>
-              <a:rPr lang="en-US" sz="3400" b="1" dirty="0">
-                <a:solidFill>
-                  <a:srgbClr val="E8EEF7"/>
-                </a:solidFill>
-                <a:latin typeface="Cambria" pitchFamily="34" charset="0"/>
-                <a:ea typeface="Cambria" pitchFamily="34" charset="-122"/>
-                <a:cs typeface="Cambria" pitchFamily="34" charset="-120"/>
-              </a:rPr>
-              <a:t> Network – </a:t>
-            </a:r>
-            <a:r>
-              <a:rPr lang="en-US" sz="3400" b="1" dirty="0" err="1">
-                <a:solidFill>
-                  <a:srgbClr val="E8EEF7"/>
-                </a:solidFill>
-                <a:latin typeface="Cambria" pitchFamily="34" charset="0"/>
-                <a:ea typeface="Cambria" pitchFamily="34" charset="-122"/>
-                <a:cs typeface="Cambria" pitchFamily="34" charset="-120"/>
-              </a:rPr>
-              <a:t>Macchina</a:t>
-            </a:r>
-            <a:r>
-              <a:rPr lang="en-US" sz="3400" b="1" dirty="0">
-                <a:solidFill>
-                  <a:srgbClr val="E8EEF7"/>
-                </a:solidFill>
-                <a:latin typeface="Cambria" pitchFamily="34" charset="0"/>
-                <a:ea typeface="Cambria" pitchFamily="34" charset="-122"/>
-                <a:cs typeface="Cambria" pitchFamily="34" charset="-120"/>
-              </a:rPr>
-              <a:t> a Stati</a:t>
-            </a:r>
-            <a:endParaRPr lang="en-US" sz="3400" dirty="0"/>
-          </a:p>
-        </p:txBody>
-      </p:sp>
-      <p:sp>
-        <p:nvSpPr>
-          <p:cNvPr id="4" name="Shape 2"/>
-          <p:cNvSpPr/>
-          <p:nvPr/>
-        </p:nvSpPr>
-        <p:spPr>
-          <a:xfrm>
-            <a:off x="502920" y="3135544"/>
-            <a:ext cx="1115568" cy="868680"/>
-          </a:xfrm>
-          <a:prstGeom prst="roundRect">
-            <a:avLst>
-              <a:gd name="adj" fmla="val 6316"/>
-            </a:avLst>
-          </a:prstGeom>
-          <a:solidFill>
-            <a:srgbClr val="141B33"/>
-          </a:solidFill>
-          <a:ln w="17780">
-            <a:solidFill>
-              <a:srgbClr val="5A7FB8"/>
-            </a:solidFill>
-            <a:prstDash val="solid"/>
-          </a:ln>
-        </p:spPr>
-        <p:txBody>
-          <a:bodyPr/>
-          <a:lstStyle/>
-          <a:p>
-            <a:endParaRPr lang="en-IT"/>
-          </a:p>
-        </p:txBody>
-      </p:sp>
-      <p:sp>
-        <p:nvSpPr>
-          <p:cNvPr id="5" name="Text 3"/>
-          <p:cNvSpPr txBox="1"/>
-          <p:nvPr/>
-        </p:nvSpPr>
-        <p:spPr>
-          <a:xfrm>
-            <a:off x="539496" y="3135544"/>
-            <a:ext cx="1042416" cy="868680"/>
-          </a:xfrm>
-          <a:prstGeom prst="rect">
-            <a:avLst/>
-          </a:prstGeom>
-          <a:noFill/>
-          <a:ln/>
-        </p:spPr>
-        <p:txBody>
-          <a:bodyPr wrap="square" lIns="0" tIns="0" rIns="0" bIns="0" rtlCol="0" anchor="ctr"/>
-          <a:lstStyle/>
-          <a:p>
-            <a:pPr marL="0" indent="0" algn="ctr">
-              <a:buNone/>
-            </a:pPr>
-            <a:r>
-              <a:rPr lang="en-US" sz="950" b="1" dirty="0">
-                <a:solidFill>
-                  <a:srgbClr val="E8EEF7"/>
-                </a:solidFill>
-                <a:latin typeface="Calibri" pitchFamily="34" charset="0"/>
-                <a:ea typeface="Calibri" pitchFamily="34" charset="-122"/>
-                <a:cs typeface="Calibri" pitchFamily="34" charset="-120"/>
-              </a:rPr>
-              <a:t>Benvenuto</a:t>
-            </a:r>
-            <a:endParaRPr lang="en-US" sz="950" dirty="0"/>
-          </a:p>
-        </p:txBody>
-      </p:sp>
-      <p:sp>
-        <p:nvSpPr>
-          <p:cNvPr id="6" name="Shape 4"/>
-          <p:cNvSpPr/>
-          <p:nvPr/>
-        </p:nvSpPr>
-        <p:spPr>
-          <a:xfrm>
-            <a:off x="1618488" y="3569884"/>
-            <a:ext cx="150876" cy="0"/>
-          </a:xfrm>
-          <a:prstGeom prst="line">
-            <a:avLst/>
-          </a:prstGeom>
-          <a:noFill/>
-          <a:ln w="16510">
-            <a:solidFill>
-              <a:srgbClr val="44507A"/>
-            </a:solidFill>
-            <a:prstDash val="solid"/>
-            <a:tailEnd type="triangle"/>
-          </a:ln>
-        </p:spPr>
-        <p:txBody>
-          <a:bodyPr/>
-          <a:lstStyle/>
-          <a:p>
-            <a:endParaRPr lang="en-IT"/>
-          </a:p>
-        </p:txBody>
-      </p:sp>
-      <p:sp>
-        <p:nvSpPr>
-          <p:cNvPr id="7" name="Shape 5"/>
-          <p:cNvSpPr/>
-          <p:nvPr/>
-        </p:nvSpPr>
-        <p:spPr>
-          <a:xfrm>
-            <a:off x="1769364" y="3135544"/>
-            <a:ext cx="1115568" cy="868680"/>
-          </a:xfrm>
-          <a:prstGeom prst="roundRect">
-            <a:avLst>
-              <a:gd name="adj" fmla="val 6316"/>
-            </a:avLst>
-          </a:prstGeom>
-          <a:solidFill>
-            <a:srgbClr val="141B33"/>
-          </a:solidFill>
-          <a:ln w="17780">
-            <a:solidFill>
-              <a:srgbClr val="5A7FB8"/>
-            </a:solidFill>
-            <a:prstDash val="solid"/>
-          </a:ln>
-        </p:spPr>
-        <p:txBody>
-          <a:bodyPr/>
-          <a:lstStyle/>
-          <a:p>
-            <a:endParaRPr lang="en-IT"/>
-          </a:p>
-        </p:txBody>
-      </p:sp>
-      <p:sp>
-        <p:nvSpPr>
-          <p:cNvPr id="8" name="Text 6"/>
-          <p:cNvSpPr txBox="1"/>
-          <p:nvPr/>
-        </p:nvSpPr>
-        <p:spPr>
-          <a:xfrm>
-            <a:off x="1805940" y="3135544"/>
-            <a:ext cx="1042416" cy="868680"/>
-          </a:xfrm>
-          <a:prstGeom prst="rect">
-            <a:avLst/>
-          </a:prstGeom>
-          <a:noFill/>
-          <a:ln/>
-        </p:spPr>
-        <p:txBody>
-          <a:bodyPr wrap="square" lIns="0" tIns="0" rIns="0" bIns="0" rtlCol="0" anchor="ctr"/>
-          <a:lstStyle/>
-          <a:p>
-            <a:pPr marL="0" indent="0" algn="ctr">
-              <a:buNone/>
-            </a:pPr>
-            <a:r>
-              <a:rPr lang="en-US" sz="950" b="1" dirty="0" err="1">
-                <a:solidFill>
-                  <a:srgbClr val="E8EEF7"/>
-                </a:solidFill>
-                <a:latin typeface="Calibri" pitchFamily="34" charset="0"/>
-                <a:ea typeface="Calibri" pitchFamily="34" charset="-122"/>
-                <a:cs typeface="Calibri" pitchFamily="34" charset="-120"/>
-              </a:rPr>
-              <a:t>Invito</a:t>
-            </a:r>
-            <a:endParaRPr lang="en-US" sz="950" b="1" dirty="0">
-              <a:solidFill>
-                <a:srgbClr val="E8EEF7"/>
-              </a:solidFill>
-              <a:latin typeface="Calibri" pitchFamily="34" charset="0"/>
-              <a:ea typeface="Calibri" pitchFamily="34" charset="-122"/>
-              <a:cs typeface="Calibri" pitchFamily="34" charset="-120"/>
-            </a:endParaRPr>
-          </a:p>
-          <a:p>
-            <a:pPr marL="0" indent="0" algn="ctr">
-              <a:buNone/>
-            </a:pPr>
-            <a:r>
-              <a:rPr lang="en-US" sz="950" b="1" dirty="0">
-                <a:solidFill>
-                  <a:srgbClr val="E8EEF7"/>
-                </a:solidFill>
-                <a:latin typeface="Calibri" pitchFamily="34" charset="0"/>
-                <a:cs typeface="Calibri" pitchFamily="34" charset="-120"/>
-              </a:rPr>
-              <a:t>a </a:t>
-            </a:r>
-            <a:r>
-              <a:rPr lang="en-US" sz="950" b="1" dirty="0" err="1">
-                <a:solidFill>
-                  <a:srgbClr val="E8EEF7"/>
-                </a:solidFill>
-                <a:latin typeface="Calibri" pitchFamily="34" charset="0"/>
-                <a:cs typeface="Calibri" pitchFamily="34" charset="-120"/>
-              </a:rPr>
-              <a:t>parlare</a:t>
-            </a:r>
-            <a:endParaRPr lang="en-US" sz="950" dirty="0"/>
-          </a:p>
-        </p:txBody>
-      </p:sp>
-      <p:sp>
-        <p:nvSpPr>
-          <p:cNvPr id="9" name="Shape 7"/>
-          <p:cNvSpPr/>
-          <p:nvPr/>
-        </p:nvSpPr>
-        <p:spPr>
-          <a:xfrm>
-            <a:off x="2884932" y="3569884"/>
-            <a:ext cx="150876" cy="0"/>
-          </a:xfrm>
-          <a:prstGeom prst="line">
-            <a:avLst/>
-          </a:prstGeom>
-          <a:noFill/>
-          <a:ln w="16510">
-            <a:solidFill>
-              <a:srgbClr val="44507A"/>
-            </a:solidFill>
-            <a:prstDash val="solid"/>
-            <a:tailEnd type="triangle"/>
-          </a:ln>
-        </p:spPr>
-        <p:txBody>
-          <a:bodyPr/>
-          <a:lstStyle/>
-          <a:p>
-            <a:endParaRPr lang="en-IT"/>
-          </a:p>
-        </p:txBody>
-      </p:sp>
-      <p:sp>
-        <p:nvSpPr>
-          <p:cNvPr id="10" name="Shape 8"/>
-          <p:cNvSpPr/>
-          <p:nvPr/>
-        </p:nvSpPr>
-        <p:spPr>
-          <a:xfrm>
-            <a:off x="3035808" y="3135544"/>
-            <a:ext cx="1115568" cy="868680"/>
-          </a:xfrm>
-          <a:prstGeom prst="roundRect">
-            <a:avLst>
-              <a:gd name="adj" fmla="val 6316"/>
-            </a:avLst>
-          </a:prstGeom>
-          <a:solidFill>
-            <a:srgbClr val="141B33"/>
-          </a:solidFill>
-          <a:ln w="17780">
-            <a:solidFill>
-              <a:srgbClr val="E8B87F"/>
-            </a:solidFill>
-            <a:prstDash val="solid"/>
-          </a:ln>
-        </p:spPr>
-        <p:txBody>
-          <a:bodyPr/>
-          <a:lstStyle/>
-          <a:p>
-            <a:endParaRPr lang="en-IT"/>
-          </a:p>
-        </p:txBody>
-      </p:sp>
-      <p:sp>
-        <p:nvSpPr>
-          <p:cNvPr id="11" name="Text 9"/>
-          <p:cNvSpPr txBox="1"/>
-          <p:nvPr/>
-        </p:nvSpPr>
-        <p:spPr>
-          <a:xfrm>
-            <a:off x="3072384" y="3135544"/>
-            <a:ext cx="1042416" cy="868680"/>
-          </a:xfrm>
-          <a:prstGeom prst="rect">
-            <a:avLst/>
-          </a:prstGeom>
-          <a:noFill/>
-          <a:ln/>
-        </p:spPr>
-        <p:txBody>
-          <a:bodyPr wrap="square" lIns="0" tIns="0" rIns="0" bIns="0" rtlCol="0" anchor="ctr"/>
-          <a:lstStyle/>
-          <a:p>
-            <a:pPr marL="0" indent="0" algn="ctr">
-              <a:buNone/>
-            </a:pPr>
-            <a:r>
-              <a:rPr lang="en-US" sz="950" b="1" dirty="0" err="1">
-                <a:solidFill>
-                  <a:srgbClr val="E8B87F"/>
-                </a:solidFill>
-                <a:latin typeface="Calibri" pitchFamily="34" charset="0"/>
-                <a:ea typeface="Calibri" pitchFamily="34" charset="-122"/>
-                <a:cs typeface="Calibri" pitchFamily="34" charset="-120"/>
-              </a:rPr>
-              <a:t>Ascolto</a:t>
-            </a:r>
-            <a:endParaRPr lang="en-US" sz="950" dirty="0"/>
-          </a:p>
-        </p:txBody>
-      </p:sp>
-      <p:sp>
-        <p:nvSpPr>
-          <p:cNvPr id="12" name="Shape 10"/>
-          <p:cNvSpPr/>
-          <p:nvPr/>
-        </p:nvSpPr>
-        <p:spPr>
-          <a:xfrm>
-            <a:off x="4151376" y="3569884"/>
-            <a:ext cx="150876" cy="0"/>
-          </a:xfrm>
-          <a:prstGeom prst="line">
-            <a:avLst/>
-          </a:prstGeom>
-          <a:noFill/>
-          <a:ln w="16510">
-            <a:solidFill>
-              <a:srgbClr val="44507A"/>
-            </a:solidFill>
-            <a:prstDash val="solid"/>
-            <a:tailEnd type="triangle"/>
-          </a:ln>
-        </p:spPr>
-        <p:txBody>
-          <a:bodyPr/>
-          <a:lstStyle/>
-          <a:p>
-            <a:endParaRPr lang="en-IT"/>
-          </a:p>
-        </p:txBody>
-      </p:sp>
-      <p:sp>
-        <p:nvSpPr>
-          <p:cNvPr id="13" name="Shape 11"/>
-          <p:cNvSpPr/>
-          <p:nvPr/>
-        </p:nvSpPr>
-        <p:spPr>
-          <a:xfrm>
-            <a:off x="4302252" y="3135544"/>
-            <a:ext cx="1115568" cy="868680"/>
-          </a:xfrm>
-          <a:prstGeom prst="roundRect">
-            <a:avLst>
-              <a:gd name="adj" fmla="val 6316"/>
-            </a:avLst>
-          </a:prstGeom>
-          <a:solidFill>
-            <a:srgbClr val="141B33"/>
-          </a:solidFill>
-          <a:ln w="17780">
-            <a:solidFill>
-              <a:srgbClr val="5A7FB8"/>
-            </a:solidFill>
-            <a:prstDash val="solid"/>
-          </a:ln>
-        </p:spPr>
-        <p:txBody>
-          <a:bodyPr/>
-          <a:lstStyle/>
-          <a:p>
-            <a:endParaRPr lang="en-IT"/>
-          </a:p>
-        </p:txBody>
-      </p:sp>
-      <p:sp>
-        <p:nvSpPr>
-          <p:cNvPr id="14" name="Text 12"/>
-          <p:cNvSpPr txBox="1"/>
-          <p:nvPr/>
-        </p:nvSpPr>
-        <p:spPr>
-          <a:xfrm>
-            <a:off x="4338828" y="3135544"/>
-            <a:ext cx="1042416" cy="868680"/>
-          </a:xfrm>
-          <a:prstGeom prst="rect">
-            <a:avLst/>
-          </a:prstGeom>
-          <a:noFill/>
-          <a:ln/>
-        </p:spPr>
-        <p:txBody>
-          <a:bodyPr wrap="square" lIns="0" tIns="0" rIns="0" bIns="0" rtlCol="0" anchor="ctr"/>
-          <a:lstStyle/>
-          <a:p>
-            <a:pPr marL="0" indent="0" algn="ctr">
-              <a:buNone/>
-            </a:pPr>
-            <a:r>
-              <a:rPr lang="en-US" sz="950" b="1" dirty="0" err="1">
-                <a:solidFill>
-                  <a:srgbClr val="E8EEF7"/>
-                </a:solidFill>
-                <a:latin typeface="Calibri" pitchFamily="34" charset="0"/>
-                <a:ea typeface="Calibri" pitchFamily="34" charset="-122"/>
-                <a:cs typeface="Calibri" pitchFamily="34" charset="-120"/>
-              </a:rPr>
-              <a:t>Attesa</a:t>
-            </a:r>
-            <a:endParaRPr lang="en-US" sz="950" dirty="0"/>
-          </a:p>
-        </p:txBody>
-      </p:sp>
-      <p:sp>
-        <p:nvSpPr>
-          <p:cNvPr id="15" name="Shape 13"/>
-          <p:cNvSpPr/>
-          <p:nvPr/>
-        </p:nvSpPr>
-        <p:spPr>
-          <a:xfrm>
-            <a:off x="5417820" y="3569884"/>
-            <a:ext cx="150876" cy="0"/>
-          </a:xfrm>
-          <a:prstGeom prst="line">
-            <a:avLst/>
-          </a:prstGeom>
-          <a:noFill/>
-          <a:ln w="16510">
-            <a:solidFill>
-              <a:srgbClr val="44507A"/>
-            </a:solidFill>
-            <a:prstDash val="solid"/>
-            <a:tailEnd type="triangle"/>
-          </a:ln>
-        </p:spPr>
-        <p:txBody>
-          <a:bodyPr/>
-          <a:lstStyle/>
-          <a:p>
-            <a:endParaRPr lang="en-IT"/>
-          </a:p>
-        </p:txBody>
-      </p:sp>
-      <p:sp>
-        <p:nvSpPr>
-          <p:cNvPr id="16" name="Shape 14"/>
-          <p:cNvSpPr/>
-          <p:nvPr/>
-        </p:nvSpPr>
-        <p:spPr>
-          <a:xfrm>
-            <a:off x="5568696" y="3135544"/>
-            <a:ext cx="1115568" cy="868680"/>
-          </a:xfrm>
-          <a:prstGeom prst="roundRect">
-            <a:avLst>
-              <a:gd name="adj" fmla="val 6316"/>
-            </a:avLst>
-          </a:prstGeom>
-          <a:solidFill>
-            <a:srgbClr val="141B33"/>
-          </a:solidFill>
-          <a:ln w="17780">
-            <a:solidFill>
-              <a:srgbClr val="5A7FB8"/>
-            </a:solidFill>
-            <a:prstDash val="solid"/>
-          </a:ln>
-        </p:spPr>
-        <p:txBody>
-          <a:bodyPr/>
-          <a:lstStyle/>
-          <a:p>
-            <a:endParaRPr lang="en-IT"/>
-          </a:p>
-        </p:txBody>
-      </p:sp>
-      <p:sp>
-        <p:nvSpPr>
-          <p:cNvPr id="17" name="Text 15"/>
-          <p:cNvSpPr txBox="1"/>
-          <p:nvPr/>
-        </p:nvSpPr>
-        <p:spPr>
-          <a:xfrm>
-            <a:off x="5605272" y="3135544"/>
-            <a:ext cx="1042416" cy="868680"/>
-          </a:xfrm>
-          <a:prstGeom prst="rect">
-            <a:avLst/>
-          </a:prstGeom>
-          <a:noFill/>
-          <a:ln/>
-        </p:spPr>
-        <p:txBody>
-          <a:bodyPr wrap="square" lIns="0" tIns="0" rIns="0" bIns="0" rtlCol="0" anchor="ctr"/>
-          <a:lstStyle/>
-          <a:p>
-            <a:pPr marL="0" indent="0" algn="ctr">
-              <a:buNone/>
-            </a:pPr>
-            <a:r>
-              <a:rPr lang="en-US" sz="950" b="1" dirty="0">
-                <a:solidFill>
-                  <a:srgbClr val="E8EEF7"/>
-                </a:solidFill>
-                <a:latin typeface="Calibri" pitchFamily="34" charset="0"/>
-                <a:ea typeface="Calibri" pitchFamily="34" charset="-122"/>
-                <a:cs typeface="Calibri" pitchFamily="34" charset="-120"/>
-              </a:rPr>
-              <a:t>Display </a:t>
-            </a:r>
-            <a:r>
-              <a:rPr lang="en-US" sz="950" b="1" dirty="0" err="1">
-                <a:solidFill>
-                  <a:srgbClr val="E8EEF7"/>
-                </a:solidFill>
-                <a:latin typeface="Calibri" pitchFamily="34" charset="0"/>
-                <a:ea typeface="Calibri" pitchFamily="34" charset="-122"/>
-                <a:cs typeface="Calibri" pitchFamily="34" charset="-120"/>
-              </a:rPr>
-              <a:t>frasi</a:t>
-            </a:r>
-            <a:r>
-              <a:rPr lang="en-US" sz="950" b="1" dirty="0">
-                <a:solidFill>
-                  <a:srgbClr val="E8EEF7"/>
-                </a:solidFill>
-                <a:latin typeface="Calibri" pitchFamily="34" charset="0"/>
-                <a:ea typeface="Calibri" pitchFamily="34" charset="-122"/>
-                <a:cs typeface="Calibri" pitchFamily="34" charset="-120"/>
-              </a:rPr>
-              <a:t> </a:t>
-            </a:r>
-            <a:r>
-              <a:rPr lang="en-US" sz="950" b="1" dirty="0" err="1">
-                <a:solidFill>
-                  <a:srgbClr val="E8EEF7"/>
-                </a:solidFill>
-                <a:latin typeface="Calibri" pitchFamily="34" charset="0"/>
-                <a:ea typeface="Calibri" pitchFamily="34" charset="-122"/>
-                <a:cs typeface="Calibri" pitchFamily="34" charset="-120"/>
-              </a:rPr>
-              <a:t>personalizzate</a:t>
-            </a:r>
-            <a:endParaRPr lang="en-US" sz="950" dirty="0"/>
-          </a:p>
-        </p:txBody>
-      </p:sp>
-      <p:sp>
-        <p:nvSpPr>
-          <p:cNvPr id="18" name="Shape 16"/>
-          <p:cNvSpPr/>
-          <p:nvPr/>
-        </p:nvSpPr>
-        <p:spPr>
-          <a:xfrm>
-            <a:off x="6684264" y="3569884"/>
-            <a:ext cx="150876" cy="0"/>
-          </a:xfrm>
-          <a:prstGeom prst="line">
-            <a:avLst/>
-          </a:prstGeom>
-          <a:noFill/>
-          <a:ln w="16510">
-            <a:solidFill>
-              <a:srgbClr val="44507A"/>
-            </a:solidFill>
-            <a:prstDash val="solid"/>
-            <a:tailEnd type="triangle"/>
-          </a:ln>
-        </p:spPr>
-        <p:txBody>
-          <a:bodyPr/>
-          <a:lstStyle/>
-          <a:p>
-            <a:endParaRPr lang="en-IT"/>
-          </a:p>
-        </p:txBody>
-      </p:sp>
-      <p:sp>
-        <p:nvSpPr>
-          <p:cNvPr id="19" name="Shape 17"/>
-          <p:cNvSpPr/>
-          <p:nvPr/>
-        </p:nvSpPr>
-        <p:spPr>
-          <a:xfrm>
-            <a:off x="6835140" y="3135544"/>
-            <a:ext cx="1115568" cy="868680"/>
-          </a:xfrm>
-          <a:prstGeom prst="roundRect">
-            <a:avLst>
-              <a:gd name="adj" fmla="val 6316"/>
-            </a:avLst>
-          </a:prstGeom>
-          <a:solidFill>
-            <a:srgbClr val="141B33"/>
-          </a:solidFill>
-          <a:ln w="17780">
-            <a:solidFill>
-              <a:srgbClr val="5A7FB8"/>
-            </a:solidFill>
-            <a:prstDash val="solid"/>
-          </a:ln>
-        </p:spPr>
-        <p:txBody>
-          <a:bodyPr/>
-          <a:lstStyle/>
-          <a:p>
-            <a:endParaRPr lang="en-IT"/>
-          </a:p>
-        </p:txBody>
-      </p:sp>
-      <p:sp>
-        <p:nvSpPr>
-          <p:cNvPr id="20" name="Text 18"/>
-          <p:cNvSpPr txBox="1"/>
-          <p:nvPr/>
-        </p:nvSpPr>
-        <p:spPr>
-          <a:xfrm>
-            <a:off x="6871716" y="3135544"/>
-            <a:ext cx="1042416" cy="868680"/>
-          </a:xfrm>
-          <a:prstGeom prst="rect">
-            <a:avLst/>
-          </a:prstGeom>
-          <a:noFill/>
-          <a:ln/>
-        </p:spPr>
-        <p:txBody>
-          <a:bodyPr wrap="square" lIns="0" tIns="0" rIns="0" bIns="0" rtlCol="0" anchor="ctr"/>
-          <a:lstStyle/>
-          <a:p>
-            <a:pPr marL="0" indent="0" algn="ctr">
-              <a:buNone/>
-            </a:pPr>
-            <a:r>
-              <a:rPr lang="en-US" sz="950" b="1" dirty="0" err="1">
-                <a:solidFill>
-                  <a:srgbClr val="E8EEF7"/>
-                </a:solidFill>
-                <a:latin typeface="Calibri" pitchFamily="34" charset="0"/>
-                <a:ea typeface="Calibri" pitchFamily="34" charset="-122"/>
-                <a:cs typeface="Calibri" pitchFamily="34" charset="-120"/>
-              </a:rPr>
-              <a:t>Invito</a:t>
-            </a:r>
-            <a:endParaRPr lang="en-US" sz="950" dirty="0"/>
-          </a:p>
-          <a:p>
-            <a:pPr marL="0" indent="0" algn="ctr">
-              <a:buNone/>
-            </a:pPr>
-            <a:r>
-              <a:rPr lang="en-US" sz="950" b="1" dirty="0">
-                <a:solidFill>
-                  <a:srgbClr val="E8EEF7"/>
-                </a:solidFill>
-                <a:latin typeface="Calibri" pitchFamily="34" charset="0"/>
-                <a:ea typeface="Calibri" pitchFamily="34" charset="-122"/>
-                <a:cs typeface="Calibri" pitchFamily="34" charset="-120"/>
-              </a:rPr>
-              <a:t>meditazione</a:t>
-            </a:r>
-            <a:endParaRPr lang="en-US" sz="950" dirty="0"/>
-          </a:p>
-        </p:txBody>
-      </p:sp>
-      <p:sp>
-        <p:nvSpPr>
-          <p:cNvPr id="21" name="Shape 19"/>
-          <p:cNvSpPr/>
-          <p:nvPr/>
-        </p:nvSpPr>
-        <p:spPr>
-          <a:xfrm>
-            <a:off x="7950708" y="3569884"/>
-            <a:ext cx="150876" cy="0"/>
-          </a:xfrm>
-          <a:prstGeom prst="line">
-            <a:avLst/>
-          </a:prstGeom>
-          <a:noFill/>
-          <a:ln w="16510">
-            <a:solidFill>
-              <a:srgbClr val="44507A"/>
-            </a:solidFill>
-            <a:prstDash val="solid"/>
-            <a:tailEnd type="triangle"/>
-          </a:ln>
-        </p:spPr>
-        <p:txBody>
-          <a:bodyPr/>
-          <a:lstStyle/>
-          <a:p>
-            <a:endParaRPr lang="en-IT"/>
-          </a:p>
-        </p:txBody>
-      </p:sp>
-      <p:sp>
-        <p:nvSpPr>
-          <p:cNvPr id="22" name="Shape 20"/>
-          <p:cNvSpPr/>
-          <p:nvPr/>
-        </p:nvSpPr>
-        <p:spPr>
-          <a:xfrm>
-            <a:off x="8101584" y="3135544"/>
-            <a:ext cx="1115568" cy="868680"/>
-          </a:xfrm>
-          <a:prstGeom prst="roundRect">
-            <a:avLst>
-              <a:gd name="adj" fmla="val 6316"/>
-            </a:avLst>
-          </a:prstGeom>
-          <a:solidFill>
-            <a:srgbClr val="141B33"/>
-          </a:solidFill>
-          <a:ln w="17780">
-            <a:solidFill>
-              <a:srgbClr val="E8B87F"/>
-            </a:solidFill>
-            <a:prstDash val="solid"/>
-          </a:ln>
-        </p:spPr>
-        <p:txBody>
-          <a:bodyPr/>
-          <a:lstStyle/>
-          <a:p>
-            <a:endParaRPr lang="en-IT"/>
-          </a:p>
-        </p:txBody>
-      </p:sp>
-      <p:sp>
-        <p:nvSpPr>
-          <p:cNvPr id="23" name="Text 21"/>
-          <p:cNvSpPr txBox="1"/>
-          <p:nvPr/>
-        </p:nvSpPr>
-        <p:spPr>
-          <a:xfrm>
-            <a:off x="8138160" y="3135544"/>
-            <a:ext cx="1042416" cy="868680"/>
-          </a:xfrm>
-          <a:prstGeom prst="rect">
-            <a:avLst/>
-          </a:prstGeom>
-          <a:noFill/>
-          <a:ln/>
-        </p:spPr>
-        <p:txBody>
-          <a:bodyPr wrap="square" lIns="0" tIns="0" rIns="0" bIns="0" rtlCol="0" anchor="ctr"/>
-          <a:lstStyle/>
-          <a:p>
-            <a:pPr marL="0" indent="0" algn="ctr">
-              <a:buNone/>
-            </a:pPr>
-            <a:r>
-              <a:rPr lang="en-US" sz="950" b="1" dirty="0" err="1">
-                <a:solidFill>
-                  <a:srgbClr val="E8B87F"/>
-                </a:solidFill>
-                <a:latin typeface="Calibri" pitchFamily="34" charset="0"/>
-                <a:ea typeface="Calibri" pitchFamily="34" charset="-122"/>
-                <a:cs typeface="Calibri" pitchFamily="34" charset="-120"/>
-              </a:rPr>
-              <a:t>Meditazione</a:t>
-            </a:r>
-            <a:endParaRPr lang="en-US" sz="950" dirty="0"/>
-          </a:p>
-        </p:txBody>
-      </p:sp>
-      <p:sp>
-        <p:nvSpPr>
-          <p:cNvPr id="24" name="Shape 22"/>
-          <p:cNvSpPr/>
-          <p:nvPr/>
-        </p:nvSpPr>
-        <p:spPr>
-          <a:xfrm>
-            <a:off x="9217152" y="3569884"/>
-            <a:ext cx="150876" cy="0"/>
-          </a:xfrm>
-          <a:prstGeom prst="line">
-            <a:avLst/>
-          </a:prstGeom>
-          <a:noFill/>
-          <a:ln w="16510">
-            <a:solidFill>
-              <a:srgbClr val="44507A"/>
-            </a:solidFill>
-            <a:prstDash val="solid"/>
-            <a:tailEnd type="triangle"/>
-          </a:ln>
-        </p:spPr>
-        <p:txBody>
-          <a:bodyPr/>
-          <a:lstStyle/>
-          <a:p>
-            <a:endParaRPr lang="en-IT"/>
-          </a:p>
-        </p:txBody>
-      </p:sp>
-      <p:sp>
-        <p:nvSpPr>
-          <p:cNvPr id="25" name="Shape 23"/>
-          <p:cNvSpPr/>
-          <p:nvPr/>
-        </p:nvSpPr>
-        <p:spPr>
-          <a:xfrm>
-            <a:off x="9368028" y="3135544"/>
-            <a:ext cx="1115568" cy="868680"/>
-          </a:xfrm>
-          <a:prstGeom prst="roundRect">
-            <a:avLst>
-              <a:gd name="adj" fmla="val 6316"/>
-            </a:avLst>
-          </a:prstGeom>
-          <a:solidFill>
-            <a:srgbClr val="141B33"/>
-          </a:solidFill>
-          <a:ln w="17780">
-            <a:solidFill>
-              <a:srgbClr val="5A7FB8"/>
-            </a:solidFill>
-            <a:prstDash val="solid"/>
-          </a:ln>
-        </p:spPr>
-        <p:txBody>
-          <a:bodyPr/>
-          <a:lstStyle/>
-          <a:p>
-            <a:endParaRPr lang="en-IT"/>
-          </a:p>
-        </p:txBody>
-      </p:sp>
-      <p:sp>
-        <p:nvSpPr>
-          <p:cNvPr id="26" name="Text 24"/>
-          <p:cNvSpPr txBox="1"/>
-          <p:nvPr/>
-        </p:nvSpPr>
-        <p:spPr>
-          <a:xfrm>
-            <a:off x="9404604" y="3135544"/>
-            <a:ext cx="1042416" cy="868680"/>
-          </a:xfrm>
-          <a:prstGeom prst="rect">
-            <a:avLst/>
-          </a:prstGeom>
-          <a:noFill/>
-          <a:ln/>
-        </p:spPr>
-        <p:txBody>
-          <a:bodyPr wrap="square" lIns="0" tIns="0" rIns="0" bIns="0" rtlCol="0" anchor="ctr"/>
-          <a:lstStyle/>
-          <a:p>
-            <a:pPr marL="0" indent="0" algn="ctr">
-              <a:buNone/>
-            </a:pPr>
-            <a:r>
-              <a:rPr lang="en-US" sz="950" b="1" dirty="0">
-                <a:solidFill>
-                  <a:srgbClr val="E8EEF7"/>
-                </a:solidFill>
-                <a:latin typeface="Calibri" pitchFamily="34" charset="0"/>
-                <a:ea typeface="Calibri" pitchFamily="34" charset="-122"/>
-                <a:cs typeface="Calibri" pitchFamily="34" charset="-120"/>
-              </a:rPr>
-              <a:t>Mandala</a:t>
-            </a:r>
-            <a:endParaRPr lang="en-US" sz="950" dirty="0"/>
-          </a:p>
-        </p:txBody>
-      </p:sp>
-      <p:sp>
-        <p:nvSpPr>
-          <p:cNvPr id="27" name="Shape 25"/>
-          <p:cNvSpPr/>
-          <p:nvPr/>
-        </p:nvSpPr>
-        <p:spPr>
-          <a:xfrm>
-            <a:off x="10483596" y="3569884"/>
-            <a:ext cx="150876" cy="0"/>
-          </a:xfrm>
-          <a:prstGeom prst="line">
-            <a:avLst/>
-          </a:prstGeom>
-          <a:noFill/>
-          <a:ln w="16510">
-            <a:solidFill>
-              <a:srgbClr val="44507A"/>
-            </a:solidFill>
-            <a:prstDash val="solid"/>
-            <a:tailEnd type="triangle"/>
-          </a:ln>
-        </p:spPr>
-        <p:txBody>
-          <a:bodyPr/>
-          <a:lstStyle/>
-          <a:p>
-            <a:endParaRPr lang="en-IT"/>
-          </a:p>
-        </p:txBody>
-      </p:sp>
-      <p:sp>
-        <p:nvSpPr>
-          <p:cNvPr id="28" name="Shape 26"/>
-          <p:cNvSpPr/>
-          <p:nvPr/>
-        </p:nvSpPr>
-        <p:spPr>
-          <a:xfrm>
-            <a:off x="10634472" y="3135544"/>
-            <a:ext cx="1115568" cy="868680"/>
-          </a:xfrm>
-          <a:prstGeom prst="roundRect">
-            <a:avLst>
-              <a:gd name="adj" fmla="val 6316"/>
-            </a:avLst>
-          </a:prstGeom>
-          <a:solidFill>
-            <a:srgbClr val="141B33"/>
-          </a:solidFill>
-          <a:ln w="17780">
-            <a:solidFill>
-              <a:srgbClr val="E8B87F"/>
-            </a:solidFill>
-            <a:prstDash val="solid"/>
-          </a:ln>
-        </p:spPr>
-        <p:txBody>
-          <a:bodyPr/>
-          <a:lstStyle/>
-          <a:p>
-            <a:endParaRPr lang="en-IT"/>
-          </a:p>
-        </p:txBody>
-      </p:sp>
-      <p:sp>
-        <p:nvSpPr>
-          <p:cNvPr id="29" name="Text 27"/>
-          <p:cNvSpPr txBox="1"/>
-          <p:nvPr/>
-        </p:nvSpPr>
-        <p:spPr>
-          <a:xfrm>
-            <a:off x="10671048" y="3135544"/>
-            <a:ext cx="1042416" cy="868680"/>
-          </a:xfrm>
-          <a:prstGeom prst="rect">
-            <a:avLst/>
-          </a:prstGeom>
-          <a:noFill/>
-          <a:ln/>
-        </p:spPr>
-        <p:txBody>
-          <a:bodyPr wrap="square" lIns="0" tIns="0" rIns="0" bIns="0" rtlCol="0" anchor="ctr"/>
-          <a:lstStyle/>
-          <a:p>
-            <a:pPr marL="0" indent="0" algn="ctr">
-              <a:buNone/>
-            </a:pPr>
-            <a:r>
-              <a:rPr lang="en-US" sz="950" b="1" dirty="0" err="1">
-                <a:solidFill>
-                  <a:srgbClr val="E8B87F"/>
-                </a:solidFill>
-                <a:latin typeface="Calibri" pitchFamily="34" charset="0"/>
-                <a:ea typeface="Calibri" pitchFamily="34" charset="-122"/>
-                <a:cs typeface="Calibri" pitchFamily="34" charset="-120"/>
-              </a:rPr>
-              <a:t>Distruzione</a:t>
-            </a:r>
-            <a:r>
-              <a:rPr lang="en-US" sz="950" b="1" dirty="0">
-                <a:solidFill>
-                  <a:srgbClr val="E8B87F"/>
-                </a:solidFill>
-                <a:latin typeface="Calibri" pitchFamily="34" charset="0"/>
-                <a:ea typeface="Calibri" pitchFamily="34" charset="-122"/>
-                <a:cs typeface="Calibri" pitchFamily="34" charset="-120"/>
-              </a:rPr>
-              <a:t> Mandala</a:t>
-            </a:r>
-            <a:endParaRPr lang="en-US" sz="950" dirty="0"/>
-          </a:p>
-        </p:txBody>
-      </p:sp>
-      <p:sp>
-        <p:nvSpPr>
-          <p:cNvPr id="30" name="Text 28"/>
-          <p:cNvSpPr txBox="1"/>
-          <p:nvPr/>
-        </p:nvSpPr>
-        <p:spPr>
-          <a:xfrm>
-            <a:off x="2315886" y="4388272"/>
-            <a:ext cx="1298448" cy="502920"/>
-          </a:xfrm>
-          <a:prstGeom prst="rect">
-            <a:avLst/>
-          </a:prstGeom>
-          <a:noFill/>
-          <a:ln/>
-        </p:spPr>
-        <p:txBody>
-          <a:bodyPr wrap="square" lIns="0" tIns="0" rIns="0" bIns="0" rtlCol="0" anchor="ctr"/>
-          <a:lstStyle/>
-          <a:p>
-            <a:pPr marL="0" indent="0" algn="ctr">
-              <a:buNone/>
-            </a:pPr>
-            <a:r>
-              <a:rPr lang="en-US" sz="900" b="1" dirty="0">
-                <a:solidFill>
-                  <a:srgbClr val="8FD9EC"/>
-                </a:solidFill>
-                <a:latin typeface="Calibri" pitchFamily="34" charset="0"/>
-                <a:ea typeface="Calibri" pitchFamily="34" charset="-122"/>
-                <a:cs typeface="Calibri" pitchFamily="34" charset="-120"/>
-              </a:rPr>
-              <a:t>occhi</a:t>
-            </a:r>
-            <a:endParaRPr lang="en-US" sz="900" dirty="0"/>
-          </a:p>
-          <a:p>
-            <a:pPr marL="0" indent="0" algn="ctr">
-              <a:buNone/>
-            </a:pPr>
-            <a:r>
-              <a:rPr lang="en-US" sz="900" b="1" dirty="0">
-                <a:solidFill>
-                  <a:srgbClr val="8FD9EC"/>
-                </a:solidFill>
-                <a:latin typeface="Calibri" pitchFamily="34" charset="0"/>
-                <a:ea typeface="Calibri" pitchFamily="34" charset="-122"/>
-                <a:cs typeface="Calibri" pitchFamily="34" charset="-120"/>
-              </a:rPr>
-              <a:t>CHIUSI</a:t>
-            </a:r>
-            <a:endParaRPr lang="en-US" sz="900" dirty="0"/>
-          </a:p>
-        </p:txBody>
-      </p:sp>
-      <p:sp>
-        <p:nvSpPr>
-          <p:cNvPr id="31" name="Shape 29"/>
-          <p:cNvSpPr/>
-          <p:nvPr/>
-        </p:nvSpPr>
-        <p:spPr>
-          <a:xfrm>
-            <a:off x="2965110" y="4077376"/>
-            <a:ext cx="0" cy="292608"/>
-          </a:xfrm>
-          <a:prstGeom prst="line">
-            <a:avLst/>
-          </a:prstGeom>
-          <a:noFill/>
-          <a:ln w="15240">
-            <a:solidFill>
-              <a:srgbClr val="8FD9EC"/>
-            </a:solidFill>
-            <a:prstDash val="solid"/>
-            <a:headEnd type="triangle"/>
-          </a:ln>
-        </p:spPr>
-        <p:txBody>
-          <a:bodyPr/>
-          <a:lstStyle/>
-          <a:p>
-            <a:endParaRPr lang="en-IT"/>
-          </a:p>
-        </p:txBody>
-      </p:sp>
-      <p:sp>
-        <p:nvSpPr>
-          <p:cNvPr id="32" name="Text 30"/>
-          <p:cNvSpPr txBox="1"/>
-          <p:nvPr/>
-        </p:nvSpPr>
-        <p:spPr>
-          <a:xfrm>
-            <a:off x="3582329" y="4388272"/>
-            <a:ext cx="1298448" cy="502920"/>
-          </a:xfrm>
-          <a:prstGeom prst="rect">
-            <a:avLst/>
-          </a:prstGeom>
-          <a:noFill/>
-          <a:ln/>
-        </p:spPr>
-        <p:txBody>
-          <a:bodyPr wrap="square" lIns="0" tIns="0" rIns="0" bIns="0" rtlCol="0" anchor="ctr"/>
-          <a:lstStyle/>
-          <a:p>
-            <a:pPr marL="0" indent="0" algn="ctr">
-              <a:buNone/>
-            </a:pPr>
-            <a:r>
-              <a:rPr lang="en-US" sz="900" b="1" dirty="0">
-                <a:solidFill>
-                  <a:srgbClr val="8FD9EC"/>
-                </a:solidFill>
-                <a:latin typeface="Calibri" pitchFamily="34" charset="0"/>
-                <a:ea typeface="Calibri" pitchFamily="34" charset="-122"/>
-                <a:cs typeface="Calibri" pitchFamily="34" charset="-120"/>
-              </a:rPr>
-              <a:t>occhi</a:t>
-            </a:r>
-            <a:endParaRPr lang="en-US" sz="900" dirty="0"/>
-          </a:p>
-          <a:p>
-            <a:pPr marL="0" indent="0" algn="ctr">
-              <a:buNone/>
-            </a:pPr>
-            <a:r>
-              <a:rPr lang="en-US" sz="900" b="1" dirty="0">
-                <a:solidFill>
-                  <a:srgbClr val="8FD9EC"/>
-                </a:solidFill>
-                <a:latin typeface="Calibri" pitchFamily="34" charset="0"/>
-                <a:ea typeface="Calibri" pitchFamily="34" charset="-122"/>
-                <a:cs typeface="Calibri" pitchFamily="34" charset="-120"/>
-              </a:rPr>
-              <a:t>APERTI</a:t>
-            </a:r>
-            <a:endParaRPr lang="en-US" sz="900" dirty="0"/>
-          </a:p>
-        </p:txBody>
-      </p:sp>
-      <p:sp>
-        <p:nvSpPr>
-          <p:cNvPr id="33" name="Shape 31"/>
-          <p:cNvSpPr/>
-          <p:nvPr/>
-        </p:nvSpPr>
-        <p:spPr>
-          <a:xfrm>
-            <a:off x="4231553" y="4077376"/>
-            <a:ext cx="0" cy="292608"/>
-          </a:xfrm>
-          <a:prstGeom prst="line">
-            <a:avLst/>
-          </a:prstGeom>
-          <a:noFill/>
-          <a:ln w="15240">
-            <a:solidFill>
-              <a:srgbClr val="8FD9EC"/>
-            </a:solidFill>
-            <a:prstDash val="solid"/>
-            <a:headEnd type="triangle"/>
-          </a:ln>
-        </p:spPr>
-        <p:txBody>
-          <a:bodyPr/>
-          <a:lstStyle/>
-          <a:p>
-            <a:endParaRPr lang="en-IT"/>
-          </a:p>
-        </p:txBody>
-      </p:sp>
-      <p:sp>
-        <p:nvSpPr>
-          <p:cNvPr id="34" name="Text 32"/>
-          <p:cNvSpPr txBox="1"/>
-          <p:nvPr/>
-        </p:nvSpPr>
-        <p:spPr>
-          <a:xfrm>
-            <a:off x="7402925" y="4388272"/>
-            <a:ext cx="1298448" cy="502920"/>
-          </a:xfrm>
-          <a:prstGeom prst="rect">
-            <a:avLst/>
-          </a:prstGeom>
-          <a:noFill/>
-          <a:ln/>
-        </p:spPr>
-        <p:txBody>
-          <a:bodyPr wrap="square" lIns="0" tIns="0" rIns="0" bIns="0" rtlCol="0" anchor="ctr"/>
-          <a:lstStyle/>
-          <a:p>
-            <a:pPr marL="0" indent="0" algn="ctr">
-              <a:buNone/>
-            </a:pPr>
-            <a:r>
-              <a:rPr lang="en-US" sz="900" b="1" dirty="0">
-                <a:solidFill>
-                  <a:srgbClr val="8FD9EC"/>
-                </a:solidFill>
-                <a:latin typeface="Calibri" pitchFamily="34" charset="0"/>
-                <a:ea typeface="Calibri" pitchFamily="34" charset="-122"/>
-                <a:cs typeface="Calibri" pitchFamily="34" charset="-120"/>
-              </a:rPr>
-              <a:t>occhi</a:t>
-            </a:r>
-            <a:endParaRPr lang="en-US" sz="900" dirty="0"/>
-          </a:p>
-          <a:p>
-            <a:pPr marL="0" indent="0" algn="ctr">
-              <a:buNone/>
-            </a:pPr>
-            <a:r>
-              <a:rPr lang="en-US" sz="900" b="1" dirty="0">
-                <a:solidFill>
-                  <a:srgbClr val="8FD9EC"/>
-                </a:solidFill>
-                <a:latin typeface="Calibri" pitchFamily="34" charset="0"/>
-                <a:ea typeface="Calibri" pitchFamily="34" charset="-122"/>
-                <a:cs typeface="Calibri" pitchFamily="34" charset="-120"/>
-              </a:rPr>
-              <a:t>CHIUSI</a:t>
-            </a:r>
-            <a:endParaRPr lang="en-US" sz="900" dirty="0"/>
-          </a:p>
-        </p:txBody>
-      </p:sp>
-      <p:sp>
-        <p:nvSpPr>
-          <p:cNvPr id="35" name="Shape 33"/>
-          <p:cNvSpPr/>
-          <p:nvPr/>
-        </p:nvSpPr>
-        <p:spPr>
-          <a:xfrm>
-            <a:off x="8052149" y="4077376"/>
-            <a:ext cx="0" cy="292608"/>
-          </a:xfrm>
-          <a:prstGeom prst="line">
-            <a:avLst/>
-          </a:prstGeom>
-          <a:noFill/>
-          <a:ln w="15240">
-            <a:solidFill>
-              <a:srgbClr val="8FD9EC"/>
-            </a:solidFill>
-            <a:prstDash val="solid"/>
-            <a:headEnd type="triangle"/>
-          </a:ln>
-        </p:spPr>
-        <p:txBody>
-          <a:bodyPr/>
-          <a:lstStyle/>
-          <a:p>
-            <a:endParaRPr lang="en-IT"/>
-          </a:p>
-        </p:txBody>
-      </p:sp>
-      <p:sp>
-        <p:nvSpPr>
-          <p:cNvPr id="36" name="Text 34"/>
-          <p:cNvSpPr txBox="1"/>
-          <p:nvPr/>
-        </p:nvSpPr>
-        <p:spPr>
-          <a:xfrm>
-            <a:off x="8669369" y="4388272"/>
-            <a:ext cx="1298448" cy="502920"/>
-          </a:xfrm>
-          <a:prstGeom prst="rect">
-            <a:avLst/>
-          </a:prstGeom>
-          <a:noFill/>
-          <a:ln/>
-        </p:spPr>
-        <p:txBody>
-          <a:bodyPr wrap="square" lIns="0" tIns="0" rIns="0" bIns="0" rtlCol="0" anchor="ctr"/>
-          <a:lstStyle/>
-          <a:p>
-            <a:pPr marL="0" indent="0" algn="ctr">
-              <a:buNone/>
-            </a:pPr>
-            <a:r>
-              <a:rPr lang="en-US" sz="900" b="1" dirty="0">
-                <a:solidFill>
-                  <a:srgbClr val="8FD9EC"/>
-                </a:solidFill>
-                <a:latin typeface="Calibri" pitchFamily="34" charset="0"/>
-                <a:ea typeface="Calibri" pitchFamily="34" charset="-122"/>
-                <a:cs typeface="Calibri" pitchFamily="34" charset="-120"/>
-              </a:rPr>
-              <a:t>occhi</a:t>
-            </a:r>
-            <a:endParaRPr lang="en-US" sz="900" dirty="0"/>
-          </a:p>
-          <a:p>
-            <a:pPr marL="0" indent="0" algn="ctr">
-              <a:buNone/>
-            </a:pPr>
-            <a:r>
-              <a:rPr lang="en-US" sz="900" b="1" dirty="0">
-                <a:solidFill>
-                  <a:srgbClr val="8FD9EC"/>
-                </a:solidFill>
-                <a:latin typeface="Calibri" pitchFamily="34" charset="0"/>
-                <a:ea typeface="Calibri" pitchFamily="34" charset="-122"/>
-                <a:cs typeface="Calibri" pitchFamily="34" charset="-120"/>
-              </a:rPr>
-              <a:t>APERTI</a:t>
-            </a:r>
-            <a:endParaRPr lang="en-US" sz="900" dirty="0"/>
-          </a:p>
-        </p:txBody>
-      </p:sp>
-      <p:sp>
-        <p:nvSpPr>
-          <p:cNvPr id="37" name="Shape 35"/>
-          <p:cNvSpPr/>
-          <p:nvPr/>
-        </p:nvSpPr>
-        <p:spPr>
-          <a:xfrm>
-            <a:off x="9318593" y="4077376"/>
-            <a:ext cx="0" cy="292608"/>
-          </a:xfrm>
-          <a:prstGeom prst="line">
-            <a:avLst/>
-          </a:prstGeom>
-          <a:noFill/>
-          <a:ln w="15240">
-            <a:solidFill>
-              <a:srgbClr val="8FD9EC"/>
-            </a:solidFill>
-            <a:prstDash val="solid"/>
-            <a:headEnd type="triangle"/>
-          </a:ln>
-        </p:spPr>
-        <p:txBody>
-          <a:bodyPr/>
-          <a:lstStyle/>
-          <a:p>
-            <a:endParaRPr lang="en-IT"/>
-          </a:p>
-        </p:txBody>
-      </p:sp>
-      <p:sp>
-        <p:nvSpPr>
-          <p:cNvPr id="38" name="Text 36"/>
-          <p:cNvSpPr txBox="1"/>
-          <p:nvPr/>
-        </p:nvSpPr>
-        <p:spPr>
-          <a:xfrm>
-            <a:off x="10543032" y="4388272"/>
-            <a:ext cx="1298448" cy="502920"/>
-          </a:xfrm>
-          <a:prstGeom prst="rect">
-            <a:avLst/>
-          </a:prstGeom>
-          <a:noFill/>
-          <a:ln/>
-        </p:spPr>
-        <p:txBody>
-          <a:bodyPr wrap="square" lIns="0" tIns="0" rIns="0" bIns="0" rtlCol="0" anchor="ctr"/>
-          <a:lstStyle/>
-          <a:p>
-            <a:pPr marL="0" indent="0" algn="ctr">
-              <a:buNone/>
-            </a:pPr>
-            <a:r>
-              <a:rPr lang="en-US" sz="900" b="1" dirty="0">
-                <a:solidFill>
-                  <a:srgbClr val="E8887F"/>
-                </a:solidFill>
-                <a:latin typeface="Calibri" pitchFamily="34" charset="0"/>
-                <a:ea typeface="Calibri" pitchFamily="34" charset="-122"/>
-                <a:cs typeface="Calibri" pitchFamily="34" charset="-120"/>
-              </a:rPr>
-              <a:t>movimento</a:t>
-            </a:r>
-            <a:endParaRPr lang="en-US" sz="900" dirty="0"/>
-          </a:p>
-          <a:p>
-            <a:pPr marL="0" indent="0" algn="ctr">
-              <a:buNone/>
-            </a:pPr>
-            <a:r>
-              <a:rPr lang="en-US" sz="900" b="1" dirty="0">
-                <a:solidFill>
-                  <a:srgbClr val="E8887F"/>
-                </a:solidFill>
-                <a:latin typeface="Calibri" pitchFamily="34" charset="0"/>
-                <a:ea typeface="Calibri" pitchFamily="34" charset="-122"/>
-                <a:cs typeface="Calibri" pitchFamily="34" charset="-120"/>
-              </a:rPr>
-              <a:t>del volto</a:t>
-            </a:r>
-            <a:endParaRPr lang="en-US" sz="900" dirty="0"/>
-          </a:p>
-        </p:txBody>
-      </p:sp>
-      <p:sp>
-        <p:nvSpPr>
-          <p:cNvPr id="39" name="Shape 37"/>
-          <p:cNvSpPr/>
-          <p:nvPr/>
-        </p:nvSpPr>
-        <p:spPr>
-          <a:xfrm>
-            <a:off x="11192256" y="4077376"/>
-            <a:ext cx="0" cy="292608"/>
-          </a:xfrm>
-          <a:prstGeom prst="line">
-            <a:avLst/>
-          </a:prstGeom>
-          <a:noFill/>
-          <a:ln w="15240">
-            <a:solidFill>
-              <a:srgbClr val="E8887F"/>
-            </a:solidFill>
-            <a:prstDash val="solid"/>
-            <a:headEnd type="triangle"/>
-          </a:ln>
-        </p:spPr>
-        <p:txBody>
-          <a:bodyPr/>
-          <a:lstStyle/>
-          <a:p>
-            <a:endParaRPr lang="en-IT"/>
-          </a:p>
-        </p:txBody>
-      </p:sp>
-      <p:sp>
-        <p:nvSpPr>
-          <p:cNvPr id="40" name="Text 38"/>
-          <p:cNvSpPr txBox="1"/>
-          <p:nvPr/>
-        </p:nvSpPr>
-        <p:spPr>
-          <a:xfrm>
-            <a:off x="91440" y="2568616"/>
-            <a:ext cx="1938528" cy="274320"/>
-          </a:xfrm>
-          <a:prstGeom prst="rect">
-            <a:avLst/>
-          </a:prstGeom>
-          <a:noFill/>
-          <a:ln/>
-        </p:spPr>
-        <p:txBody>
-          <a:bodyPr wrap="square" lIns="0" tIns="0" rIns="0" bIns="0" rtlCol="0" anchor="ctr"/>
-          <a:lstStyle/>
-          <a:p>
-            <a:pPr marL="0" indent="0" algn="ctr">
-              <a:buNone/>
-            </a:pPr>
-            <a:r>
-              <a:rPr lang="en-US" sz="850" i="1" dirty="0">
-                <a:solidFill>
-                  <a:srgbClr val="8A97B0"/>
-                </a:solidFill>
-                <a:latin typeface="Calibri" pitchFamily="34" charset="0"/>
-                <a:ea typeface="Calibri" pitchFamily="34" charset="-122"/>
-                <a:cs typeface="Calibri" pitchFamily="34" charset="-120"/>
-              </a:rPr>
-              <a:t>a tempo</a:t>
-            </a:r>
-            <a:endParaRPr lang="en-US" sz="850" dirty="0"/>
-          </a:p>
-        </p:txBody>
-      </p:sp>
-      <p:sp>
-        <p:nvSpPr>
-          <p:cNvPr id="41" name="Shape 39"/>
-          <p:cNvSpPr/>
-          <p:nvPr/>
-        </p:nvSpPr>
-        <p:spPr>
-          <a:xfrm>
-            <a:off x="1060704" y="2879512"/>
-            <a:ext cx="0" cy="237744"/>
-          </a:xfrm>
-          <a:prstGeom prst="line">
-            <a:avLst/>
-          </a:prstGeom>
-          <a:noFill/>
-          <a:ln w="13970">
-            <a:solidFill>
-              <a:srgbClr val="44507A"/>
-            </a:solidFill>
-            <a:prstDash val="solid"/>
-            <a:tailEnd type="triangle"/>
-          </a:ln>
-        </p:spPr>
-        <p:txBody>
-          <a:bodyPr/>
-          <a:lstStyle/>
-          <a:p>
-            <a:endParaRPr lang="en-IT"/>
-          </a:p>
-        </p:txBody>
-      </p:sp>
-      <p:sp>
-        <p:nvSpPr>
-          <p:cNvPr id="42" name="Text 40"/>
-          <p:cNvSpPr txBox="1"/>
-          <p:nvPr/>
-        </p:nvSpPr>
-        <p:spPr>
-          <a:xfrm>
-            <a:off x="3890772" y="2568616"/>
-            <a:ext cx="1938528" cy="274320"/>
-          </a:xfrm>
-          <a:prstGeom prst="rect">
-            <a:avLst/>
-          </a:prstGeom>
-          <a:noFill/>
-          <a:ln/>
-        </p:spPr>
-        <p:txBody>
-          <a:bodyPr wrap="square" lIns="0" tIns="0" rIns="0" bIns="0" rtlCol="0" anchor="ctr"/>
-          <a:lstStyle/>
-          <a:p>
-            <a:pPr marL="0" indent="0" algn="ctr">
-              <a:buNone/>
-            </a:pPr>
-            <a:r>
-              <a:rPr lang="en-US" sz="850" i="1" dirty="0">
-                <a:solidFill>
-                  <a:srgbClr val="8A97B0"/>
-                </a:solidFill>
-                <a:latin typeface="Calibri" pitchFamily="34" charset="0"/>
-                <a:ea typeface="Calibri" pitchFamily="34" charset="-122"/>
-                <a:cs typeface="Calibri" pitchFamily="34" charset="-120"/>
-              </a:rPr>
-              <a:t>quando Claude risponde</a:t>
-            </a:r>
-            <a:endParaRPr lang="en-US" sz="850" dirty="0"/>
-          </a:p>
-        </p:txBody>
-      </p:sp>
-      <p:sp>
-        <p:nvSpPr>
-          <p:cNvPr id="43" name="Shape 41"/>
-          <p:cNvSpPr/>
-          <p:nvPr/>
-        </p:nvSpPr>
-        <p:spPr>
-          <a:xfrm>
-            <a:off x="4860036" y="2879512"/>
-            <a:ext cx="0" cy="237744"/>
-          </a:xfrm>
-          <a:prstGeom prst="line">
-            <a:avLst/>
-          </a:prstGeom>
-          <a:noFill/>
-          <a:ln w="13970">
-            <a:solidFill>
-              <a:srgbClr val="44507A"/>
-            </a:solidFill>
-            <a:prstDash val="solid"/>
-            <a:tailEnd type="triangle"/>
-          </a:ln>
-        </p:spPr>
-        <p:txBody>
-          <a:bodyPr/>
-          <a:lstStyle/>
-          <a:p>
-            <a:endParaRPr lang="en-IT"/>
-          </a:p>
-        </p:txBody>
-      </p:sp>
-      <p:sp>
-        <p:nvSpPr>
-          <p:cNvPr id="44" name="Text 42"/>
-          <p:cNvSpPr txBox="1"/>
-          <p:nvPr/>
-        </p:nvSpPr>
-        <p:spPr>
-          <a:xfrm>
-            <a:off x="5157216" y="2568616"/>
-            <a:ext cx="1938528" cy="274320"/>
-          </a:xfrm>
-          <a:prstGeom prst="rect">
-            <a:avLst/>
-          </a:prstGeom>
-          <a:noFill/>
-          <a:ln/>
-        </p:spPr>
-        <p:txBody>
-          <a:bodyPr wrap="square" lIns="0" tIns="0" rIns="0" bIns="0" rtlCol="0" anchor="ctr"/>
-          <a:lstStyle/>
-          <a:p>
-            <a:pPr marL="0" indent="0" algn="ctr">
-              <a:buNone/>
-            </a:pPr>
-            <a:r>
-              <a:rPr lang="en-US" sz="850" i="1" dirty="0">
-                <a:solidFill>
-                  <a:srgbClr val="8A97B0"/>
-                </a:solidFill>
-                <a:latin typeface="Calibri" pitchFamily="34" charset="0"/>
-                <a:ea typeface="Calibri" pitchFamily="34" charset="-122"/>
-                <a:cs typeface="Calibri" pitchFamily="34" charset="-120"/>
-              </a:rPr>
-              <a:t>a tempo</a:t>
-            </a:r>
-            <a:endParaRPr lang="en-US" sz="850" dirty="0"/>
-          </a:p>
-        </p:txBody>
-      </p:sp>
-      <p:sp>
-        <p:nvSpPr>
-          <p:cNvPr id="45" name="Shape 43"/>
-          <p:cNvSpPr/>
-          <p:nvPr/>
-        </p:nvSpPr>
-        <p:spPr>
-          <a:xfrm>
-            <a:off x="6126480" y="2879512"/>
-            <a:ext cx="0" cy="237744"/>
-          </a:xfrm>
-          <a:prstGeom prst="line">
-            <a:avLst/>
-          </a:prstGeom>
-          <a:noFill/>
-          <a:ln w="13970">
-            <a:solidFill>
-              <a:srgbClr val="44507A"/>
-            </a:solidFill>
-            <a:prstDash val="solid"/>
-            <a:tailEnd type="triangle"/>
-          </a:ln>
-        </p:spPr>
-        <p:txBody>
-          <a:bodyPr/>
-          <a:lstStyle/>
-          <a:p>
-            <a:endParaRPr lang="en-IT"/>
-          </a:p>
-        </p:txBody>
-      </p:sp>
-      <p:sp>
-        <p:nvSpPr>
-          <p:cNvPr id="46" name="Text 44"/>
-          <p:cNvSpPr txBox="1"/>
-          <p:nvPr/>
-        </p:nvSpPr>
-        <p:spPr>
-          <a:xfrm>
-            <a:off x="8956548" y="2568616"/>
-            <a:ext cx="1938528" cy="274320"/>
-          </a:xfrm>
-          <a:prstGeom prst="rect">
-            <a:avLst/>
-          </a:prstGeom>
-          <a:noFill/>
-          <a:ln/>
-        </p:spPr>
-        <p:txBody>
-          <a:bodyPr wrap="square" lIns="0" tIns="0" rIns="0" bIns="0" rtlCol="0" anchor="ctr"/>
-          <a:lstStyle/>
-          <a:p>
-            <a:pPr marL="0" indent="0" algn="ctr">
-              <a:buNone/>
-            </a:pPr>
-            <a:r>
-              <a:rPr lang="en-US" sz="850" i="1" dirty="0">
-                <a:solidFill>
-                  <a:srgbClr val="8A97B0"/>
-                </a:solidFill>
-                <a:latin typeface="Calibri" pitchFamily="34" charset="0"/>
-                <a:ea typeface="Calibri" pitchFamily="34" charset="-122"/>
-                <a:cs typeface="Calibri" pitchFamily="34" charset="-120"/>
-              </a:rPr>
-              <a:t>a tempo</a:t>
-            </a:r>
-            <a:endParaRPr lang="en-US" sz="850" dirty="0"/>
-          </a:p>
-        </p:txBody>
-      </p:sp>
-      <p:sp>
-        <p:nvSpPr>
-          <p:cNvPr id="47" name="Shape 45"/>
-          <p:cNvSpPr/>
-          <p:nvPr/>
-        </p:nvSpPr>
-        <p:spPr>
-          <a:xfrm>
-            <a:off x="9925812" y="2879512"/>
-            <a:ext cx="0" cy="237744"/>
-          </a:xfrm>
-          <a:prstGeom prst="line">
-            <a:avLst/>
-          </a:prstGeom>
-          <a:noFill/>
-          <a:ln w="13970">
-            <a:solidFill>
-              <a:srgbClr val="44507A"/>
-            </a:solidFill>
-            <a:prstDash val="solid"/>
-            <a:tailEnd type="triangle"/>
-          </a:ln>
-        </p:spPr>
-        <p:txBody>
-          <a:bodyPr/>
-          <a:lstStyle/>
-          <a:p>
-            <a:endParaRPr lang="en-IT"/>
-          </a:p>
-        </p:txBody>
-      </p:sp>
-    </p:spTree>
-  </p:cSld>
-  <p:clrMapOvr>
-    <a:masterClrMapping/>
-  </p:clrMapOvr>
-</p:sld>
-</file>
-
-<file path=ppt/slides/slide9.xml><?xml version="1.0" encoding="utf-8"?>
-<p:sld xmlns:a="http://schemas.openxmlformats.org/drawingml/2006/main" xmlns:r="http://schemas.openxmlformats.org/officeDocument/2006/relationships" xmlns:p="http://schemas.openxmlformats.org/presentationml/2006/main">
-  <p:cSld name="Slide 9">
-    <p:bg>
-      <p:bgPr>
-        <a:solidFill>
-          <a:srgbClr val="0B1026"/>
-        </a:solidFill>
-        <a:effectLst/>
-      </p:bgPr>
-    </p:bg>
-    <p:spTree>
-      <p:nvGrpSpPr>
-        <p:cNvPr id="1" name=""/>
-        <p:cNvGrpSpPr/>
-        <p:nvPr/>
-      </p:nvGrpSpPr>
-      <p:grpSpPr>
-        <a:xfrm>
-          <a:off x="0" y="0"/>
-          <a:ext cx="0" cy="0"/>
-          <a:chOff x="0" y="0"/>
-          <a:chExt cx="0" cy="0"/>
-        </a:xfrm>
-      </p:grpSpPr>
-      <p:sp>
-        <p:nvSpPr>
-          <p:cNvPr id="2" name="Text 0"/>
-          <p:cNvSpPr txBox="1"/>
-          <p:nvPr/>
-        </p:nvSpPr>
-        <p:spPr>
-          <a:xfrm>
-            <a:off x="640080" y="384048"/>
-            <a:ext cx="10058400" cy="274320"/>
-          </a:xfrm>
-          <a:prstGeom prst="rect">
-            <a:avLst/>
-          </a:prstGeom>
-          <a:noFill/>
-          <a:ln/>
-        </p:spPr>
-        <p:txBody>
-          <a:bodyPr wrap="square" rtlCol="0" anchor="ctr"/>
-          <a:lstStyle/>
-          <a:p>
-            <a:pPr marL="0" indent="0">
-              <a:buNone/>
-            </a:pPr>
-            <a:r>
-              <a:rPr lang="en-US" sz="1200" b="1" kern="0" spc="200" dirty="0">
-                <a:solidFill>
-                  <a:srgbClr val="8FD9EC"/>
-                </a:solidFill>
-                <a:latin typeface="Calibri" pitchFamily="34" charset="0"/>
-                <a:ea typeface="Calibri" pitchFamily="34" charset="-122"/>
-                <a:cs typeface="Calibri" pitchFamily="34" charset="-120"/>
-              </a:rPr>
-              <a:t>AZIONE  ·  LE PARTICELLE</a:t>
-            </a:r>
-            <a:endParaRPr lang="en-US" sz="1200" dirty="0"/>
-          </a:p>
-        </p:txBody>
-      </p:sp>
-      <p:sp>
-        <p:nvSpPr>
-          <p:cNvPr id="3" name="Text 1"/>
-          <p:cNvSpPr txBox="1"/>
-          <p:nvPr/>
-        </p:nvSpPr>
-        <p:spPr>
-          <a:xfrm>
-            <a:off x="640080" y="685800"/>
-            <a:ext cx="10881360" cy="777240"/>
-          </a:xfrm>
-          <a:prstGeom prst="rect">
-            <a:avLst/>
-          </a:prstGeom>
-          <a:noFill/>
-          <a:ln/>
-        </p:spPr>
-        <p:txBody>
-          <a:bodyPr wrap="square" rtlCol="0" anchor="ctr"/>
-          <a:lstStyle/>
-          <a:p>
-            <a:pPr marL="0" indent="0">
-              <a:buNone/>
-            </a:pPr>
-            <a:r>
-              <a:rPr lang="en-US" sz="3400" b="1" dirty="0">
-                <a:solidFill>
-                  <a:srgbClr val="E8EEF7"/>
-                </a:solidFill>
-                <a:latin typeface="Cambria" pitchFamily="34" charset="0"/>
-                <a:ea typeface="Cambria" pitchFamily="34" charset="-122"/>
-                <a:cs typeface="Cambria" pitchFamily="34" charset="-120"/>
-              </a:rPr>
-              <a:t>13.664 </a:t>
-            </a:r>
-            <a:r>
-              <a:rPr lang="en-US" sz="3400" b="1" dirty="0" err="1">
-                <a:solidFill>
-                  <a:srgbClr val="E8EEF7"/>
-                </a:solidFill>
-                <a:latin typeface="Cambria" pitchFamily="34" charset="0"/>
-                <a:ea typeface="Cambria" pitchFamily="34" charset="-122"/>
-                <a:cs typeface="Cambria" pitchFamily="34" charset="-120"/>
-              </a:rPr>
-              <a:t>particelle</a:t>
-            </a:r>
-            <a:r>
-              <a:rPr lang="en-US" sz="3400" b="1" dirty="0">
-                <a:solidFill>
-                  <a:srgbClr val="E8EEF7"/>
-                </a:solidFill>
-                <a:latin typeface="Cambria" pitchFamily="34" charset="0"/>
-                <a:ea typeface="Cambria" pitchFamily="34" charset="-122"/>
-                <a:cs typeface="Cambria" pitchFamily="34" charset="-120"/>
-              </a:rPr>
-              <a:t> </a:t>
-            </a:r>
-            <a:r>
-              <a:rPr lang="en-US" sz="3400" b="1" dirty="0" err="1">
-                <a:solidFill>
-                  <a:srgbClr val="E8EEF7"/>
-                </a:solidFill>
-                <a:latin typeface="Cambria" pitchFamily="34" charset="0"/>
-                <a:ea typeface="Cambria" pitchFamily="34" charset="-122"/>
-                <a:cs typeface="Cambria" pitchFamily="34" charset="-120"/>
-              </a:rPr>
-              <a:t>reattive</a:t>
-            </a:r>
-            <a:endParaRPr lang="en-US" sz="3400" dirty="0"/>
-          </a:p>
-        </p:txBody>
-      </p:sp>
-      <p:sp>
-        <p:nvSpPr>
-          <p:cNvPr id="4" name="Text 2"/>
-          <p:cNvSpPr txBox="1"/>
-          <p:nvPr/>
-        </p:nvSpPr>
-        <p:spPr>
-          <a:xfrm>
-            <a:off x="640080" y="1782089"/>
-            <a:ext cx="10881360" cy="411480"/>
-          </a:xfrm>
-          <a:prstGeom prst="rect">
-            <a:avLst/>
-          </a:prstGeom>
-          <a:noFill/>
-          <a:ln/>
-        </p:spPr>
-        <p:txBody>
-          <a:bodyPr wrap="square" rtlCol="0" anchor="ctr"/>
-          <a:lstStyle/>
-          <a:p>
-            <a:pPr marL="0" indent="0">
-              <a:buNone/>
-            </a:pPr>
-            <a:r>
-              <a:rPr lang="en-US" sz="1250" i="1" dirty="0">
-                <a:solidFill>
-                  <a:srgbClr val="8FD9EC"/>
-                </a:solidFill>
-                <a:latin typeface="Calibri" pitchFamily="34" charset="0"/>
-                <a:ea typeface="Calibri" pitchFamily="34" charset="-122"/>
-                <a:cs typeface="Calibri" pitchFamily="34" charset="-120"/>
-              </a:rPr>
-              <a:t>“A particle system is a collection of many many minute particles that together represent a fuzzy object.”</a:t>
-            </a:r>
-            <a:r>
-              <a:rPr lang="en-US" sz="1250" dirty="0">
-                <a:solidFill>
-                  <a:srgbClr val="8A97B0"/>
-                </a:solidFill>
-                <a:latin typeface="Calibri" pitchFamily="34" charset="0"/>
-                <a:ea typeface="Calibri" pitchFamily="34" charset="-122"/>
-                <a:cs typeface="Calibri" pitchFamily="34" charset="-120"/>
-              </a:rPr>
-              <a:t>   —  W. T. Reeves, Lucasfilm, 1982</a:t>
-            </a:r>
-            <a:endParaRPr lang="en-US" sz="1250" dirty="0"/>
-          </a:p>
-        </p:txBody>
-      </p:sp>
-      <p:pic>
-        <p:nvPicPr>
-          <p:cNvPr id="5" name="Image 0" descr="/tmp/ppt/p_seek.png"/>
-          <p:cNvPicPr>
-            <a:picLocks noChangeAspect="1"/>
-          </p:cNvPicPr>
-          <p:nvPr/>
-        </p:nvPicPr>
-        <p:blipFill>
-          <a:blip r:embed="rId3"/>
-          <a:stretch>
-            <a:fillRect/>
-          </a:stretch>
-        </p:blipFill>
-        <p:spPr>
-          <a:xfrm>
-            <a:off x="886968" y="2503476"/>
-            <a:ext cx="2743200" cy="2212848"/>
-          </a:xfrm>
-          <a:prstGeom prst="rect">
-            <a:avLst/>
-          </a:prstGeom>
-        </p:spPr>
-      </p:pic>
-      <p:sp>
-        <p:nvSpPr>
-          <p:cNvPr id="6" name="Text 3"/>
-          <p:cNvSpPr txBox="1"/>
-          <p:nvPr/>
-        </p:nvSpPr>
-        <p:spPr>
-          <a:xfrm>
-            <a:off x="502920" y="4789476"/>
-            <a:ext cx="3502152" cy="329184"/>
-          </a:xfrm>
-          <a:prstGeom prst="rect">
-            <a:avLst/>
-          </a:prstGeom>
-          <a:noFill/>
-          <a:ln/>
-        </p:spPr>
-        <p:txBody>
-          <a:bodyPr wrap="square" lIns="0" tIns="0" rIns="0" bIns="0" rtlCol="0" anchor="ctr"/>
-          <a:lstStyle/>
-          <a:p>
-            <a:pPr marL="0" indent="0" algn="ctr">
-              <a:buNone/>
-            </a:pPr>
-            <a:r>
-              <a:rPr lang="en-US" sz="1400" b="1" dirty="0">
-                <a:solidFill>
-                  <a:srgbClr val="8FD9EC"/>
-                </a:solidFill>
-                <a:latin typeface="Calibri" pitchFamily="34" charset="0"/>
-                <a:ea typeface="Calibri" pitchFamily="34" charset="-122"/>
-                <a:cs typeface="Calibri" pitchFamily="34" charset="-120"/>
-              </a:rPr>
-              <a:t>SEEK</a:t>
-            </a:r>
-            <a:endParaRPr lang="en-US" sz="1400" dirty="0"/>
-          </a:p>
-        </p:txBody>
-      </p:sp>
-      <p:sp>
-        <p:nvSpPr>
-          <p:cNvPr id="7" name="Text 4"/>
-          <p:cNvSpPr txBox="1"/>
-          <p:nvPr/>
-        </p:nvSpPr>
-        <p:spPr>
-          <a:xfrm>
-            <a:off x="640080" y="5173524"/>
-            <a:ext cx="3227832" cy="914400"/>
-          </a:xfrm>
-          <a:prstGeom prst="rect">
-            <a:avLst/>
-          </a:prstGeom>
-          <a:noFill/>
-          <a:ln/>
-        </p:spPr>
-        <p:txBody>
-          <a:bodyPr wrap="square" lIns="0" tIns="0" rIns="0" bIns="0" rtlCol="0" anchor="ctr"/>
-          <a:lstStyle/>
-          <a:p>
-            <a:pPr marL="0" indent="0" algn="ctr">
-              <a:lnSpc>
-                <a:spcPct val="115000"/>
-              </a:lnSpc>
-              <a:buNone/>
-            </a:pPr>
-            <a:r>
-              <a:rPr lang="en-US" sz="1100" dirty="0">
-                <a:solidFill>
-                  <a:srgbClr val="E8EEF7"/>
-                </a:solidFill>
-                <a:latin typeface="Calibri" pitchFamily="34" charset="0"/>
-                <a:ea typeface="Calibri" pitchFamily="34" charset="-122"/>
-                <a:cs typeface="Calibri" pitchFamily="34" charset="-120"/>
-              </a:rPr>
-              <a:t>Ognuna insegue il suo posto con la propria inerzia: confronta dov'è con dove vorrebbe essere e applica una forza.</a:t>
-            </a:r>
-            <a:endParaRPr lang="en-US" sz="1100" dirty="0"/>
-          </a:p>
-        </p:txBody>
-      </p:sp>
-      <p:pic>
-        <p:nvPicPr>
-          <p:cNvPr id="8" name="Image 1" descr="/tmp/ppt/p_repulsione.png"/>
-          <p:cNvPicPr>
-            <a:picLocks noChangeAspect="1"/>
-          </p:cNvPicPr>
-          <p:nvPr/>
-        </p:nvPicPr>
-        <p:blipFill>
-          <a:blip r:embed="rId4"/>
-          <a:stretch>
-            <a:fillRect/>
-          </a:stretch>
-        </p:blipFill>
-        <p:spPr>
-          <a:xfrm>
-            <a:off x="4663440" y="2503476"/>
-            <a:ext cx="2743200" cy="2212848"/>
-          </a:xfrm>
-          <a:prstGeom prst="rect">
-            <a:avLst/>
-          </a:prstGeom>
-        </p:spPr>
-      </p:pic>
-      <p:sp>
-        <p:nvSpPr>
-          <p:cNvPr id="9" name="Text 5"/>
-          <p:cNvSpPr txBox="1"/>
-          <p:nvPr/>
-        </p:nvSpPr>
-        <p:spPr>
-          <a:xfrm>
-            <a:off x="4279392" y="4789476"/>
-            <a:ext cx="3502152" cy="329184"/>
-          </a:xfrm>
-          <a:prstGeom prst="rect">
-            <a:avLst/>
-          </a:prstGeom>
-          <a:noFill/>
-          <a:ln/>
-        </p:spPr>
-        <p:txBody>
-          <a:bodyPr wrap="square" lIns="0" tIns="0" rIns="0" bIns="0" rtlCol="0" anchor="ctr"/>
-          <a:lstStyle/>
-          <a:p>
-            <a:pPr marL="0" indent="0" algn="ctr">
-              <a:buNone/>
-            </a:pPr>
-            <a:r>
-              <a:rPr lang="en-US" sz="1400" b="1" dirty="0">
-                <a:solidFill>
-                  <a:srgbClr val="E8887F"/>
-                </a:solidFill>
-                <a:latin typeface="Calibri" pitchFamily="34" charset="0"/>
-                <a:ea typeface="Calibri" pitchFamily="34" charset="-122"/>
-                <a:cs typeface="Calibri" pitchFamily="34" charset="-120"/>
-              </a:rPr>
-              <a:t>REPULSIONE</a:t>
-            </a:r>
-            <a:endParaRPr lang="en-US" sz="1400" dirty="0"/>
-          </a:p>
-        </p:txBody>
-      </p:sp>
-      <p:sp>
-        <p:nvSpPr>
-          <p:cNvPr id="10" name="Text 6"/>
-          <p:cNvSpPr txBox="1"/>
-          <p:nvPr/>
-        </p:nvSpPr>
-        <p:spPr>
-          <a:xfrm>
-            <a:off x="4416552" y="5173524"/>
-            <a:ext cx="3227832" cy="914400"/>
-          </a:xfrm>
-          <a:prstGeom prst="rect">
-            <a:avLst/>
-          </a:prstGeom>
-          <a:noFill/>
-          <a:ln/>
-        </p:spPr>
-        <p:txBody>
-          <a:bodyPr wrap="square" lIns="0" tIns="0" rIns="0" bIns="0" rtlCol="0" anchor="ctr"/>
-          <a:lstStyle/>
-          <a:p>
-            <a:pPr marL="0" indent="0" algn="ctr">
-              <a:lnSpc>
-                <a:spcPct val="115000"/>
-              </a:lnSpc>
-              <a:buNone/>
-            </a:pPr>
-            <a:r>
-              <a:rPr lang="en-US" sz="1100" dirty="0">
-                <a:solidFill>
-                  <a:srgbClr val="E8EEF7"/>
-                </a:solidFill>
-                <a:latin typeface="Calibri" pitchFamily="34" charset="0"/>
-                <a:ea typeface="Calibri" pitchFamily="34" charset="-122"/>
-                <a:cs typeface="Calibri" pitchFamily="34" charset="-120"/>
-              </a:rPr>
-              <a:t>Il naso respinge ciò che gli passa vicino. La spinta cala col quadrato della distanza e si annulla sul bordo del raggio.</a:t>
-            </a:r>
-            <a:endParaRPr lang="en-US" sz="1100" dirty="0"/>
-          </a:p>
-        </p:txBody>
-      </p:sp>
-      <p:pic>
-        <p:nvPicPr>
-          <p:cNvPr id="11" name="Image 2" descr="/tmp/ppt/p_swarm.png"/>
-          <p:cNvPicPr>
-            <a:picLocks noChangeAspect="1"/>
-          </p:cNvPicPr>
-          <p:nvPr/>
-        </p:nvPicPr>
-        <p:blipFill>
-          <a:blip r:embed="rId5"/>
-          <a:stretch>
-            <a:fillRect/>
-          </a:stretch>
-        </p:blipFill>
-        <p:spPr>
-          <a:xfrm>
-            <a:off x="8439912" y="2503476"/>
-            <a:ext cx="2743200" cy="2212848"/>
-          </a:xfrm>
-          <a:prstGeom prst="rect">
-            <a:avLst/>
-          </a:prstGeom>
-        </p:spPr>
-      </p:pic>
-      <p:sp>
-        <p:nvSpPr>
-          <p:cNvPr id="12" name="Text 7"/>
-          <p:cNvSpPr txBox="1"/>
-          <p:nvPr/>
-        </p:nvSpPr>
-        <p:spPr>
-          <a:xfrm>
-            <a:off x="8055864" y="4789476"/>
-            <a:ext cx="3502152" cy="329184"/>
-          </a:xfrm>
-          <a:prstGeom prst="rect">
-            <a:avLst/>
-          </a:prstGeom>
-          <a:noFill/>
-          <a:ln/>
-        </p:spPr>
-        <p:txBody>
-          <a:bodyPr wrap="square" lIns="0" tIns="0" rIns="0" bIns="0" rtlCol="0" anchor="ctr"/>
-          <a:lstStyle/>
-          <a:p>
-            <a:pPr marL="0" indent="0" algn="ctr">
-              <a:buNone/>
-            </a:pPr>
-            <a:r>
-              <a:rPr lang="en-US" sz="1400" b="1" dirty="0">
-                <a:solidFill>
-                  <a:srgbClr val="5A7FB8"/>
-                </a:solidFill>
-                <a:latin typeface="Calibri" pitchFamily="34" charset="0"/>
-                <a:ea typeface="Calibri" pitchFamily="34" charset="-122"/>
-                <a:cs typeface="Calibri" pitchFamily="34" charset="-120"/>
-              </a:rPr>
-              <a:t>SWARM</a:t>
-            </a:r>
-            <a:endParaRPr lang="en-US" sz="1400" dirty="0"/>
-          </a:p>
-        </p:txBody>
-      </p:sp>
-      <p:sp>
-        <p:nvSpPr>
-          <p:cNvPr id="13" name="Text 8"/>
-          <p:cNvSpPr txBox="1"/>
-          <p:nvPr/>
-        </p:nvSpPr>
-        <p:spPr>
-          <a:xfrm>
-            <a:off x="8193024" y="5173524"/>
-            <a:ext cx="3227832" cy="914400"/>
-          </a:xfrm>
-          <a:prstGeom prst="rect">
-            <a:avLst/>
-          </a:prstGeom>
-          <a:noFill/>
-          <a:ln/>
-        </p:spPr>
-        <p:txBody>
-          <a:bodyPr wrap="square" lIns="0" tIns="0" rIns="0" bIns="0" rtlCol="0" anchor="ctr"/>
-          <a:lstStyle/>
-          <a:p>
-            <a:pPr marL="0" indent="0" algn="ctr">
-              <a:lnSpc>
-                <a:spcPct val="115000"/>
-              </a:lnSpc>
-              <a:buNone/>
-            </a:pPr>
-            <a:r>
-              <a:rPr lang="en-US" sz="1100" dirty="0">
-                <a:solidFill>
-                  <a:srgbClr val="E8EEF7"/>
-                </a:solidFill>
-                <a:latin typeface="Calibri" pitchFamily="34" charset="0"/>
-                <a:ea typeface="Calibri" pitchFamily="34" charset="-122"/>
-                <a:cs typeface="Calibri" pitchFamily="34" charset="-120"/>
-              </a:rPr>
-              <a:t>Nessuna interazione fra particelle: la forma emerge </a:t>
-            </a:r>
-            <a:r>
-              <a:rPr lang="en-US" sz="1100" dirty="0" err="1">
-                <a:solidFill>
-                  <a:srgbClr val="E8EEF7"/>
-                </a:solidFill>
-                <a:latin typeface="Calibri" pitchFamily="34" charset="0"/>
-                <a:ea typeface="Calibri" pitchFamily="34" charset="-122"/>
-                <a:cs typeface="Calibri" pitchFamily="34" charset="-120"/>
-              </a:rPr>
-              <a:t>dalla</a:t>
-            </a:r>
-            <a:r>
-              <a:rPr lang="en-US" sz="1100" dirty="0">
-                <a:solidFill>
-                  <a:srgbClr val="E8EEF7"/>
-                </a:solidFill>
-                <a:latin typeface="Calibri" pitchFamily="34" charset="0"/>
-                <a:ea typeface="Calibri" pitchFamily="34" charset="-122"/>
-                <a:cs typeface="Calibri" pitchFamily="34" charset="-120"/>
-              </a:rPr>
-              <a:t> somma di </a:t>
-            </a:r>
-            <a:r>
-              <a:rPr lang="en-US" sz="1100" dirty="0" err="1">
-                <a:solidFill>
-                  <a:srgbClr val="E8EEF7"/>
-                </a:solidFill>
-                <a:latin typeface="Calibri" pitchFamily="34" charset="0"/>
-                <a:ea typeface="Calibri" pitchFamily="34" charset="-122"/>
-                <a:cs typeface="Calibri" pitchFamily="34" charset="-120"/>
-              </a:rPr>
-              <a:t>queste</a:t>
-            </a:r>
-            <a:r>
-              <a:rPr lang="en-US" sz="1100" dirty="0">
-                <a:solidFill>
-                  <a:srgbClr val="E8EEF7"/>
-                </a:solidFill>
-                <a:latin typeface="Calibri" pitchFamily="34" charset="0"/>
-                <a:ea typeface="Calibri" pitchFamily="34" charset="-122"/>
-                <a:cs typeface="Calibri" pitchFamily="34" charset="-120"/>
-              </a:rPr>
-              <a:t>.</a:t>
-            </a:r>
-            <a:endParaRPr lang="en-US" sz="1100" dirty="0"/>
           </a:p>
         </p:txBody>
       </p:sp>
